--- a/session6/session6_full.pptx
+++ b/session6/session6_full.pptx
@@ -6,12 +6,15 @@
   </p:sldMasterIdLst>
   <p:sldIdLst>
     <p:sldId id="256" r:id="rId2"/>
+    <p:sldId id="268" r:id="rId19"/>
     <p:sldId id="257" r:id="rId3"/>
     <p:sldId id="258" r:id="rId4"/>
+    <p:sldId id="269" r:id="rId20"/>
     <p:sldId id="259" r:id="rId5"/>
     <p:sldId id="260" r:id="rId6"/>
     <p:sldId id="261" r:id="rId7"/>
     <p:sldId id="262" r:id="rId8"/>
+    <p:sldId id="270" r:id="rId21"/>
     <p:sldId id="263" r:id="rId9"/>
     <p:sldId id="264" r:id="rId10"/>
     <p:sldId id="265" r:id="rId11"/>
@@ -2021,6 +2024,10 @@
             <a:prstDash val="solid"/>
           </a:ln>
         </p:spPr>
+        <p:txBody>
+          <a:bodyPr/>
+          <a:p/>
+        </p:txBody>
       </p:sp>
       <p:sp>
         <p:nvSpPr>
@@ -2175,6 +2182,39 @@
               <a:t>Koji</a:t>
             </a:r>
             <a:endParaRPr lang="en-US" sz="1100" dirty="0"/>
+          </a:p>
+        </p:txBody>
+      </p:sp>
+      <p:sp>
+        <p:nvSpPr>
+          <p:cNvPr id="11" name="TextBox 10"/>
+          <p:cNvSpPr txBox="1"/>
+          <p:nvPr/>
+        </p:nvSpPr>
+        <p:spPr>
+          <a:xfrm>
+            <a:off x="457200" y="4280000"/>
+            <a:ext cx="8229600" cy="290000"/>
+          </a:xfrm>
+          <a:prstGeom prst="rect">
+            <a:avLst/>
+          </a:prstGeom>
+          <a:noFill/>
+        </p:spPr>
+        <p:txBody>
+          <a:bodyPr wrap="square" lIns="0" rIns="0" tIns="0" bIns="0">
+            <a:spAutoFit/>
+          </a:bodyPr>
+          <a:lstStyle/>
+          <a:p>
+            <a:r>
+              <a:rPr sz="1500" b="1">
+                <a:solidFill>
+                  <a:srgbClr val="FFC800"/>
+                </a:solidFill>
+              </a:rPr>
+              <a:t>★ 覚えて帰る一言: 「計器なしで本番に飛ばさない」</a:t>
+            </a:r>
           </a:p>
         </p:txBody>
       </p:sp>
@@ -2187,6 +2227,2343 @@
 </file>
 
 <file path=ppt/slides/slide10.xml><?xml version="1.0" encoding="utf-8"?>
+<p:sld xmlns:a="http://schemas.openxmlformats.org/drawingml/2006/main" xmlns:p="http://schemas.openxmlformats.org/presentationml/2006/main" xmlns:r="http://schemas.openxmlformats.org/officeDocument/2006/relationships">
+  <p:cSld>
+    <p:bg>
+      <p:bgPr>
+        <a:solidFill>
+          <a:srgbClr val="FFFFFF"/>
+        </a:solidFill>
+        <a:effectLst/>
+      </p:bgPr>
+    </p:bg>
+    <p:spTree>
+      <p:nvGrpSpPr>
+        <p:cNvPr id="1" name=""/>
+        <p:cNvGrpSpPr/>
+        <p:nvPr/>
+      </p:nvGrpSpPr>
+      <p:grpSpPr/>
+      <p:sp>
+        <p:nvSpPr>
+          <p:cNvPr id="2" name="TextBox 1"/>
+          <p:cNvSpPr txBox="1"/>
+          <p:nvPr/>
+        </p:nvSpPr>
+        <p:spPr>
+          <a:xfrm>
+            <a:off x="457200" y="320040"/>
+            <a:ext cx="8229600" cy="548640"/>
+          </a:xfrm>
+          <a:prstGeom prst="rect">
+            <a:avLst/>
+          </a:prstGeom>
+          <a:noFill/>
+        </p:spPr>
+        <p:txBody>
+          <a:bodyPr wrap="square" lIns="0" rIns="0" tIns="0" bIns="0">
+            <a:spAutoFit/>
+          </a:bodyPr>
+          <a:lstStyle/>
+          <a:p>
+            <a:r>
+              <a:rPr sz="2400" b="1" i="0">
+                <a:solidFill>
+                  <a:srgbClr val="1E2761"/>
+                </a:solidFill>
+              </a:rPr>
+              <a:t>Claude Code × Langfuse のトレース例</a:t>
+            </a:r>
+          </a:p>
+        </p:txBody>
+      </p:sp>
+      <p:sp>
+        <p:nvSpPr>
+          <p:cNvPr id="3" name="TextBox 2"/>
+          <p:cNvSpPr txBox="1"/>
+          <p:nvPr/>
+        </p:nvSpPr>
+        <p:spPr>
+          <a:xfrm>
+            <a:off x="457200" y="960000"/>
+            <a:ext cx="8229600" cy="330000"/>
+          </a:xfrm>
+          <a:prstGeom prst="rect">
+            <a:avLst/>
+          </a:prstGeom>
+          <a:noFill/>
+        </p:spPr>
+        <p:txBody>
+          <a:bodyPr wrap="square" lIns="0" rIns="0" tIns="0" bIns="0">
+            <a:spAutoFit/>
+          </a:bodyPr>
+          <a:lstStyle/>
+          <a:p>
+            <a:r>
+              <a:rPr sz="1300" b="0" i="1">
+                <a:solidFill>
+                  <a:srgbClr val="64748B"/>
+                </a:solidFill>
+              </a:rPr>
+              <a:t>1セッションの全ステップが、所要時間・トークン・コスト込みで自動的に残る</a:t>
+            </a:r>
+          </a:p>
+        </p:txBody>
+      </p:sp>
+      <p:sp>
+        <p:nvSpPr>
+          <p:cNvPr id="4" name="TextBox 3"/>
+          <p:cNvSpPr txBox="1"/>
+          <p:nvPr/>
+        </p:nvSpPr>
+        <p:spPr>
+          <a:xfrm>
+            <a:off x="457200" y="1430000"/>
+            <a:ext cx="8229600" cy="330000"/>
+          </a:xfrm>
+          <a:prstGeom prst="rect">
+            <a:avLst/>
+          </a:prstGeom>
+          <a:noFill/>
+        </p:spPr>
+        <p:txBody>
+          <a:bodyPr wrap="square" lIns="0" rIns="0" tIns="0" bIns="0">
+            <a:spAutoFit/>
+          </a:bodyPr>
+          <a:lstStyle/>
+          <a:p>
+            <a:r>
+              <a:rPr sz="1300" b="1" i="0">
+                <a:solidFill>
+                  <a:srgbClr val="1E2761"/>
+                </a:solidFill>
+              </a:rPr>
+              <a:t>Claude Code Session:「認証機能を実装して」</a:t>
+            </a:r>
+          </a:p>
+        </p:txBody>
+      </p:sp>
+      <p:sp>
+        <p:nvSpPr>
+          <p:cNvPr id="5" name="TextBox 4"/>
+          <p:cNvSpPr txBox="1"/>
+          <p:nvPr/>
+        </p:nvSpPr>
+        <p:spPr>
+          <a:xfrm>
+            <a:off x="457200" y="1800000"/>
+            <a:ext cx="8229600" cy="2200000"/>
+          </a:xfrm>
+          <a:prstGeom prst="rect">
+            <a:avLst/>
+          </a:prstGeom>
+          <a:noFill/>
+        </p:spPr>
+        <p:txBody>
+          <a:bodyPr wrap="none" lIns="20000" rIns="20000" tIns="20000" bIns="20000">
+            <a:spAutoFit/>
+          </a:bodyPr>
+          <a:lstStyle/>
+          <a:p>
+            <a:r>
+              <a:rPr sz="1100">
+                <a:solidFill>
+                  <a:srgbClr val="2D3748"/>
+                </a:solidFill>
+                <a:latin typeface="Menlo"/>
+              </a:rPr>
+              <a:t>├─ Read: src/auth/login.ts          0.3s     120 tok</a:t>
+            </a:r>
+          </a:p>
+          <a:p>
+            <a:r>
+              <a:rPr sz="1100">
+                <a:solidFill>
+                  <a:srgbClr val="2D3748"/>
+                </a:solidFill>
+                <a:latin typeface="Menlo"/>
+              </a:rPr>
+              <a:t>├─ Read: CLAUDE.md                  0.1s      80 tok</a:t>
+            </a:r>
+          </a:p>
+          <a:p>
+            <a:r>
+              <a:rPr sz="1100">
+                <a:solidFill>
+                  <a:srgbClr val="2D3748"/>
+                </a:solidFill>
+                <a:latin typeface="Menlo"/>
+              </a:rPr>
+              <a:t>├─ Planning                         1.5s     950 tok   $0.03</a:t>
+            </a:r>
+          </a:p>
+          <a:p>
+            <a:r>
+              <a:rPr sz="1100">
+                <a:solidFill>
+                  <a:srgbClr val="2D3748"/>
+                </a:solidFill>
+                <a:latin typeface="Menlo"/>
+              </a:rPr>
+              <a:t>├─ Edit: src/auth/login.ts          0.8s     600 tok   $0.02</a:t>
+            </a:r>
+          </a:p>
+          <a:p>
+            <a:r>
+              <a:rPr sz="1100">
+                <a:solidFill>
+                  <a:srgbClr val="2D3748"/>
+                </a:solidFill>
+                <a:latin typeface="Menlo"/>
+              </a:rPr>
+              <a:t>├─ Bash: npm run test               3.2s             ← FAIL</a:t>
+            </a:r>
+          </a:p>
+          <a:p>
+            <a:r>
+              <a:rPr sz="1100">
+                <a:solidFill>
+                  <a:srgbClr val="2D3748"/>
+                </a:solidFill>
+                <a:latin typeface="Menlo"/>
+              </a:rPr>
+              <a:t>├─ Planning (retry)                 1.2s     800 tok   $0.02</a:t>
+            </a:r>
+          </a:p>
+          <a:p>
+            <a:r>
+              <a:rPr sz="1100">
+                <a:solidFill>
+                  <a:srgbClr val="2D3748"/>
+                </a:solidFill>
+                <a:latin typeface="Menlo"/>
+              </a:rPr>
+              <a:t>├─ Edit: src/auth/login.ts          0.6s     450 tok   $0.01</a:t>
+            </a:r>
+          </a:p>
+          <a:p>
+            <a:r>
+              <a:rPr sz="1100">
+                <a:solidFill>
+                  <a:srgbClr val="2D3748"/>
+                </a:solidFill>
+                <a:latin typeface="Menlo"/>
+              </a:rPr>
+              <a:t>├─ Bash: npm run test               2.8s             ← PASS ✓</a:t>
+            </a:r>
+          </a:p>
+          <a:p>
+            <a:r>
+              <a:rPr sz="1100">
+                <a:solidFill>
+                  <a:srgbClr val="2D3748"/>
+                </a:solidFill>
+                <a:latin typeface="Menlo"/>
+              </a:rPr>
+              <a:t>└─ Total                           10.7s   3,350 tok   $0.08</a:t>
+            </a:r>
+          </a:p>
+        </p:txBody>
+      </p:sp>
+      <p:sp>
+        <p:nvSpPr>
+          <p:cNvPr id="6" name="TextBox 5"/>
+          <p:cNvSpPr txBox="1"/>
+          <p:nvPr/>
+        </p:nvSpPr>
+        <p:spPr>
+          <a:xfrm>
+            <a:off x="457200" y="4150000"/>
+            <a:ext cx="8229600" cy="330000"/>
+          </a:xfrm>
+          <a:prstGeom prst="rect">
+            <a:avLst/>
+          </a:prstGeom>
+          <a:noFill/>
+        </p:spPr>
+        <p:txBody>
+          <a:bodyPr wrap="square" lIns="0" rIns="0" tIns="0" bIns="0">
+            <a:spAutoFit/>
+          </a:bodyPr>
+          <a:lstStyle/>
+          <a:p>
+            <a:r>
+              <a:rPr sz="1300" b="1" i="0">
+                <a:solidFill>
+                  <a:srgbClr val="1E2761"/>
+                </a:solidFill>
+              </a:rPr>
+              <a:t>★ 防ぐ（Hooks）と 残す（Trace）が連動 ― 第3回のHooksブロックもこのトレースに残る</a:t>
+            </a:r>
+          </a:p>
+        </p:txBody>
+      </p:sp>
+      <p:sp>
+        <p:nvSpPr>
+          <p:cNvPr id="7" name="TextBox 6"/>
+          <p:cNvSpPr txBox="1"/>
+          <p:nvPr/>
+        </p:nvSpPr>
+        <p:spPr>
+          <a:xfrm>
+            <a:off x="457200" y="4500000"/>
+            <a:ext cx="8229600" cy="330000"/>
+          </a:xfrm>
+          <a:prstGeom prst="rect">
+            <a:avLst/>
+          </a:prstGeom>
+          <a:noFill/>
+        </p:spPr>
+        <p:txBody>
+          <a:bodyPr wrap="square" lIns="0" rIns="0" tIns="0" bIns="0">
+            <a:spAutoFit/>
+          </a:bodyPr>
+          <a:lstStyle/>
+          <a:p>
+            <a:r>
+              <a:rPr sz="1200" b="0" i="1">
+                <a:solidFill>
+                  <a:srgbClr val="64748B"/>
+                </a:solidFill>
+              </a:rPr>
+              <a:t>→ 失敗の手前で何が起きたかが、後から階層的に追える</a:t>
+            </a:r>
+          </a:p>
+        </p:txBody>
+      </p:sp>
+      <p:sp>
+        <p:nvSpPr>
+          <p:cNvPr id="8" name="TextBox 7"/>
+          <p:cNvSpPr txBox="1"/>
+          <p:nvPr/>
+        </p:nvSpPr>
+        <p:spPr>
+          <a:xfrm>
+            <a:off x="5486400" y="4828032"/>
+            <a:ext cx="3474720" cy="228600"/>
+          </a:xfrm>
+          <a:prstGeom prst="rect">
+            <a:avLst/>
+          </a:prstGeom>
+          <a:noFill/>
+        </p:spPr>
+        <p:txBody>
+          <a:bodyPr wrap="square" lIns="0" rIns="0" tIns="0" bIns="0">
+            <a:spAutoFit/>
+          </a:bodyPr>
+          <a:lstStyle/>
+          <a:p>
+            <a:r>
+              <a:rPr sz="1000" b="0" i="0">
+                <a:solidFill>
+                  <a:srgbClr val="64748B"/>
+                </a:solidFill>
+              </a:rPr>
+              <a:t>○ ○ ○ ○ ○ ● ○ ○ ○ ○</a:t>
+            </a:r>
+          </a:p>
+        </p:txBody>
+      </p:sp>
+    </p:spTree>
+  </p:cSld>
+  <p:clrMapOvr>
+    <a:masterClrMapping/>
+  </p:clrMapOvr>
+</p:sld>
+</file>
+
+<file path=ppt/slides/slide11.xml><?xml version="1.0" encoding="utf-8"?>
+<p:sld xmlns:a="http://schemas.openxmlformats.org/drawingml/2006/main" xmlns:r="http://schemas.openxmlformats.org/officeDocument/2006/relationships" xmlns:p="http://schemas.openxmlformats.org/presentationml/2006/main">
+  <p:cSld name="Slide 8">
+    <p:bg>
+      <p:bgPr>
+        <a:solidFill>
+          <a:srgbClr val="FFFFFF"/>
+        </a:solidFill>
+      </p:bgPr>
+    </p:bg>
+    <p:spTree>
+      <p:nvGrpSpPr>
+        <p:cNvPr id="1" name=""/>
+        <p:cNvGrpSpPr/>
+        <p:nvPr/>
+      </p:nvGrpSpPr>
+      <p:grpSpPr>
+        <a:xfrm>
+          <a:off x="0" y="0"/>
+          <a:ext cx="0" cy="0"/>
+          <a:chOff x="0" y="0"/>
+          <a:chExt cx="0" cy="0"/>
+        </a:xfrm>
+      </p:grpSpPr>
+      <p:sp>
+        <p:nvSpPr>
+          <p:cNvPr id="2" name="Text 0"/>
+          <p:cNvSpPr/>
+          <p:nvPr/>
+        </p:nvSpPr>
+        <p:spPr>
+          <a:xfrm>
+            <a:off x="457200" y="320040"/>
+            <a:ext cx="8229600" cy="548640"/>
+          </a:xfrm>
+          <a:prstGeom prst="rect">
+            <a:avLst/>
+          </a:prstGeom>
+          <a:noFill/>
+          <a:ln/>
+        </p:spPr>
+        <p:txBody>
+          <a:bodyPr wrap="square" lIns="0" tIns="0" rIns="0" bIns="0" rtlCol="0" anchor="ctr"/>
+          <a:lstStyle/>
+          <a:p>
+            <a:pPr indent="0" marL="0">
+              <a:buNone/>
+            </a:pPr>
+            <a:r>
+              <a:rPr lang="en-US" sz="2200" b="1" dirty="0">
+                <a:solidFill>
+                  <a:srgbClr val="1E2761"/>
+                </a:solidFill>
+                <a:latin typeface="Arial Black" pitchFamily="34" charset="0"/>
+                <a:ea typeface="Arial Black" pitchFamily="34" charset="-122"/>
+                <a:cs typeface="Arial Black" pitchFamily="34" charset="-120"/>
+              </a:rPr>
+              <a:t>機能②: 評価（LLM-as-a-Judge）</a:t>
+            </a:r>
+            <a:endParaRPr lang="en-US" sz="2200" dirty="0"/>
+          </a:p>
+        </p:txBody>
+      </p:sp>
+      <p:sp>
+        <p:nvSpPr>
+          <p:cNvPr id="3" name="Shape 1"/>
+          <p:cNvSpPr/>
+          <p:nvPr/>
+        </p:nvSpPr>
+        <p:spPr>
+          <a:xfrm>
+            <a:off x="457200" y="932688"/>
+            <a:ext cx="548640" cy="45720"/>
+          </a:xfrm>
+          <a:prstGeom prst="rect">
+            <a:avLst/>
+          </a:prstGeom>
+          <a:solidFill>
+            <a:srgbClr val="F96167"/>
+          </a:solidFill>
+          <a:ln w="12700">
+            <a:solidFill>
+              <a:srgbClr val="F96167"/>
+            </a:solidFill>
+            <a:prstDash val="solid"/>
+          </a:ln>
+        </p:spPr>
+        <p:txBody>
+          <a:bodyPr/>
+          <a:p/>
+        </p:txBody>
+      </p:sp>
+      <p:sp>
+        <p:nvSpPr>
+          <p:cNvPr id="4" name="Text 2"/>
+          <p:cNvSpPr/>
+          <p:nvPr/>
+        </p:nvSpPr>
+        <p:spPr>
+          <a:xfrm>
+            <a:off x="457200" y="1051560"/>
+            <a:ext cx="8229600" cy="274320"/>
+          </a:xfrm>
+          <a:prstGeom prst="rect">
+            <a:avLst/>
+          </a:prstGeom>
+          <a:noFill/>
+          <a:ln/>
+        </p:spPr>
+        <p:txBody>
+          <a:bodyPr wrap="square" lIns="0" tIns="0" rIns="0" bIns="0" rtlCol="0" anchor="ctr"/>
+          <a:lstStyle/>
+          <a:p>
+            <a:pPr indent="0" marL="0">
+              <a:buNone/>
+            </a:pPr>
+            <a:r>
+              <a:rPr lang="en-US" sz="1300" i="1" dirty="0">
+                <a:solidFill>
+                  <a:srgbClr val="64748B"/>
+                </a:solidFill>
+                <a:latin typeface="Meiryo" pitchFamily="34" charset="0"/>
+                <a:ea typeface="Meiryo" pitchFamily="34" charset="-122"/>
+                <a:cs typeface="Meiryo" pitchFamily="34" charset="-120"/>
+              </a:rPr>
+              <a:t>Claude Codeの出力品質を定量的に評価する ― 変化にデータで気づく</a:t>
+            </a:r>
+            <a:endParaRPr lang="en-US" sz="1300" dirty="0"/>
+          </a:p>
+        </p:txBody>
+      </p:sp>
+      <p:sp>
+        <p:nvSpPr>
+          <p:cNvPr id="5" name="Shape 3"/>
+          <p:cNvSpPr/>
+          <p:nvPr/>
+        </p:nvSpPr>
+        <p:spPr>
+          <a:xfrm>
+            <a:off x="457200" y="1417320"/>
+            <a:ext cx="2606040" cy="2468880"/>
+          </a:xfrm>
+          <a:prstGeom prst="rect">
+            <a:avLst/>
+          </a:prstGeom>
+          <a:solidFill>
+            <a:srgbClr val="F8F9FC"/>
+          </a:solidFill>
+          <a:ln w="9525">
+            <a:solidFill>
+              <a:srgbClr val="E5E9F2"/>
+            </a:solidFill>
+            <a:prstDash val="solid"/>
+          </a:ln>
+          <a:effectLst>
+            <a:outerShdw sx="100000" sy="100000" kx="0" ky="0" algn="bl" rotWithShape="0" blurRad="50800" dist="12700" dir="8100000">
+              <a:srgbClr val="000000">
+                <a:alpha val="10000"/>
+              </a:srgbClr>
+            </a:outerShdw>
+          </a:effectLst>
+        </p:spPr>
+        <p:txBody>
+          <a:bodyPr/>
+          <a:p/>
+        </p:txBody>
+      </p:sp>
+      <p:sp>
+        <p:nvSpPr>
+          <p:cNvPr id="6" name="Shape 4"/>
+          <p:cNvSpPr/>
+          <p:nvPr/>
+        </p:nvSpPr>
+        <p:spPr>
+          <a:xfrm>
+            <a:off x="457200" y="1417320"/>
+            <a:ext cx="2606040" cy="64008"/>
+          </a:xfrm>
+          <a:prstGeom prst="rect">
+            <a:avLst/>
+          </a:prstGeom>
+          <a:solidFill>
+            <a:srgbClr val="F96167"/>
+          </a:solidFill>
+          <a:ln w="12700">
+            <a:solidFill>
+              <a:srgbClr val="F96167"/>
+            </a:solidFill>
+            <a:prstDash val="solid"/>
+          </a:ln>
+        </p:spPr>
+        <p:txBody>
+          <a:bodyPr/>
+          <a:p/>
+        </p:txBody>
+      </p:sp>
+      <p:pic>
+        <p:nvPicPr>
+          <p:cNvPr id="7" name="Image 0" descr="preencoded.png">    </p:cNvPr>
+          <p:cNvPicPr>
+            <a:picLocks noChangeAspect="1"/>
+          </p:cNvPicPr>
+          <p:nvPr/>
+        </p:nvPicPr>
+        <p:blipFill>
+          <a:blip r:embed="rId1"/>
+          <a:stretch>
+            <a:fillRect/>
+          </a:stretch>
+        </p:blipFill>
+        <p:spPr>
+          <a:xfrm>
+            <a:off x="594360" y="1600200"/>
+            <a:ext cx="274320" cy="274320"/>
+          </a:xfrm>
+          <a:prstGeom prst="rect">
+            <a:avLst/>
+          </a:prstGeom>
+        </p:spPr>
+      </p:pic>
+      <p:sp>
+        <p:nvSpPr>
+          <p:cNvPr id="8" name="Text 5"/>
+          <p:cNvSpPr/>
+          <p:nvPr/>
+        </p:nvSpPr>
+        <p:spPr>
+          <a:xfrm>
+            <a:off x="960120" y="1554480"/>
+            <a:ext cx="1965960" cy="457200"/>
+          </a:xfrm>
+          <a:prstGeom prst="rect">
+            <a:avLst/>
+          </a:prstGeom>
+          <a:noFill/>
+          <a:ln/>
+        </p:spPr>
+        <p:txBody>
+          <a:bodyPr wrap="square" lIns="0" tIns="0" rIns="0" bIns="0" rtlCol="0" anchor="ctr"/>
+          <a:lstStyle/>
+          <a:p>
+            <a:pPr indent="0" marL="0">
+              <a:buNone/>
+            </a:pPr>
+            <a:r>
+              <a:rPr lang="en-US" sz="1100" b="1" dirty="0">
+                <a:solidFill>
+                  <a:srgbClr val="1E2761"/>
+                </a:solidFill>
+                <a:latin typeface="Meiryo" pitchFamily="34" charset="0"/>
+                <a:ea typeface="Meiryo" pitchFamily="34" charset="-122"/>
+                <a:cs typeface="Meiryo" pitchFamily="34" charset="-120"/>
+              </a:rPr>
+              <a:t>LLM-as-a-Judge</a:t>
+            </a:r>
+            <a:endParaRPr lang="en-US" sz="1100" dirty="0"/>
+          </a:p>
+          <a:p>
+            <a:pPr indent="0" marL="0">
+              <a:buNone/>
+            </a:pPr>
+            <a:r>
+              <a:rPr lang="en-US" sz="1100" b="1" dirty="0">
+                <a:solidFill>
+                  <a:srgbClr val="1E2761"/>
+                </a:solidFill>
+                <a:latin typeface="Meiryo" pitchFamily="34" charset="0"/>
+                <a:ea typeface="Meiryo" pitchFamily="34" charset="-122"/>
+                <a:cs typeface="Meiryo" pitchFamily="34" charset="-120"/>
+              </a:rPr>
+              <a:t>自動スコアリング</a:t>
+            </a:r>
+            <a:endParaRPr lang="en-US" sz="1100" dirty="0"/>
+          </a:p>
+        </p:txBody>
+      </p:sp>
+      <p:sp>
+        <p:nvSpPr>
+          <p:cNvPr id="9" name="Text 6"/>
+          <p:cNvSpPr/>
+          <p:nvPr/>
+        </p:nvSpPr>
+        <p:spPr>
+          <a:xfrm>
+            <a:off x="594360" y="2103120"/>
+            <a:ext cx="2331720" cy="1645920"/>
+          </a:xfrm>
+          <a:prstGeom prst="rect">
+            <a:avLst/>
+          </a:prstGeom>
+          <a:noFill/>
+          <a:ln/>
+        </p:spPr>
+        <p:txBody>
+          <a:bodyPr wrap="square" lIns="0" tIns="0" rIns="0" bIns="0" rtlCol="0" anchor="t"/>
+          <a:lstStyle/>
+          <a:p>
+            <a:pPr marL="342900" indent="-342900">
+              <a:spcAft>
+                <a:spcPts val="300"/>
+              </a:spcAft>
+              <a:buSzPct val="100000"/>
+              <a:buChar char="•"/>
+            </a:pPr>
+            <a:r>
+              <a:rPr lang="en-US" sz="900" dirty="0">
+                <a:solidFill>
+                  <a:srgbClr val="2D3748"/>
+                </a:solidFill>
+                <a:latin typeface="Meiryo" pitchFamily="34" charset="0"/>
+                <a:ea typeface="Meiryo" pitchFamily="34" charset="-122"/>
+                <a:cs typeface="Meiryo" pitchFamily="34" charset="-120"/>
+              </a:rPr>
+              <a:t>高性能LLMを「審査員」として定義</a:t>
+            </a:r>
+            <a:endParaRPr lang="en-US" sz="900" dirty="0"/>
+          </a:p>
+          <a:p>
+            <a:pPr marL="342900" indent="-342900">
+              <a:spcAft>
+                <a:spcPts val="300"/>
+              </a:spcAft>
+              <a:buSzPct val="100000"/>
+              <a:buChar char="•"/>
+            </a:pPr>
+            <a:r>
+              <a:rPr lang="en-US" sz="900" dirty="0">
+                <a:solidFill>
+                  <a:srgbClr val="2D3748"/>
+                </a:solidFill>
+                <a:latin typeface="Meiryo" pitchFamily="34" charset="0"/>
+                <a:ea typeface="Meiryo" pitchFamily="34" charset="-122"/>
+                <a:cs typeface="Meiryo" pitchFamily="34" charset="-120"/>
+              </a:rPr>
+              <a:t>本番トレースに自動スコアリング</a:t>
+            </a:r>
+            <a:endParaRPr lang="en-US" sz="900" dirty="0"/>
+          </a:p>
+          <a:p>
+            <a:pPr marL="342900" indent="-342900">
+              <a:spcAft>
+                <a:spcPts val="300"/>
+              </a:spcAft>
+              <a:buSzPct val="100000"/>
+              <a:buChar char="•"/>
+            </a:pPr>
+            <a:r>
+              <a:rPr lang="en-US" sz="900" dirty="0">
+                <a:solidFill>
+                  <a:srgbClr val="2D3748"/>
+                </a:solidFill>
+                <a:latin typeface="Meiryo" pitchFamily="34" charset="0"/>
+                <a:ea typeface="Meiryo" pitchFamily="34" charset="-122"/>
+                <a:cs typeface="Meiryo" pitchFamily="34" charset="-120"/>
+              </a:rPr>
+              <a:t>指標: 正確性 / 関連性 / ハルシネーション</a:t>
+            </a:r>
+            <a:endParaRPr lang="en-US" sz="900" dirty="0"/>
+          </a:p>
+          <a:p>
+            <a:pPr marL="342900" indent="-342900">
+              <a:spcAft>
+                <a:spcPts val="300"/>
+              </a:spcAft>
+              <a:buSzPct val="100000"/>
+              <a:buChar char="•"/>
+            </a:pPr>
+            <a:r>
+              <a:rPr lang="en-US" sz="900" dirty="0">
+                <a:solidFill>
+                  <a:srgbClr val="2D3748"/>
+                </a:solidFill>
+                <a:latin typeface="Meiryo" pitchFamily="34" charset="0"/>
+                <a:ea typeface="Meiryo" pitchFamily="34" charset="-122"/>
+                <a:cs typeface="Meiryo" pitchFamily="34" charset="-120"/>
+              </a:rPr>
+              <a:t>Claude Codeの生成コードの品質評価にも応用可</a:t>
+            </a:r>
+            <a:endParaRPr lang="en-US" sz="900" dirty="0"/>
+          </a:p>
+        </p:txBody>
+      </p:sp>
+      <p:sp>
+        <p:nvSpPr>
+          <p:cNvPr id="10" name="Shape 7"/>
+          <p:cNvSpPr/>
+          <p:nvPr/>
+        </p:nvSpPr>
+        <p:spPr>
+          <a:xfrm>
+            <a:off x="3200400" y="1417320"/>
+            <a:ext cx="2606040" cy="2468880"/>
+          </a:xfrm>
+          <a:prstGeom prst="rect">
+            <a:avLst/>
+          </a:prstGeom>
+          <a:solidFill>
+            <a:srgbClr val="F8F9FC"/>
+          </a:solidFill>
+          <a:ln w="9525">
+            <a:solidFill>
+              <a:srgbClr val="E5E9F2"/>
+            </a:solidFill>
+            <a:prstDash val="solid"/>
+          </a:ln>
+          <a:effectLst>
+            <a:outerShdw sx="100000" sy="100000" kx="0" ky="0" algn="bl" rotWithShape="0" blurRad="50800" dist="12700" dir="8100000">
+              <a:srgbClr val="000000">
+                <a:alpha val="10000"/>
+              </a:srgbClr>
+            </a:outerShdw>
+          </a:effectLst>
+        </p:spPr>
+        <p:txBody>
+          <a:bodyPr/>
+          <a:p/>
+        </p:txBody>
+      </p:sp>
+      <p:sp>
+        <p:nvSpPr>
+          <p:cNvPr id="11" name="Shape 8"/>
+          <p:cNvSpPr/>
+          <p:nvPr/>
+        </p:nvSpPr>
+        <p:spPr>
+          <a:xfrm>
+            <a:off x="3200400" y="1417320"/>
+            <a:ext cx="2606040" cy="64008"/>
+          </a:xfrm>
+          <a:prstGeom prst="rect">
+            <a:avLst/>
+          </a:prstGeom>
+          <a:solidFill>
+            <a:srgbClr val="1E2761"/>
+          </a:solidFill>
+          <a:ln w="12700">
+            <a:solidFill>
+              <a:srgbClr val="1E2761"/>
+            </a:solidFill>
+            <a:prstDash val="solid"/>
+          </a:ln>
+        </p:spPr>
+        <p:txBody>
+          <a:bodyPr/>
+          <a:p/>
+        </p:txBody>
+      </p:sp>
+      <p:pic>
+        <p:nvPicPr>
+          <p:cNvPr id="12" name="Image 1" descr="preencoded.png">    </p:cNvPr>
+          <p:cNvPicPr>
+            <a:picLocks noChangeAspect="1"/>
+          </p:cNvPicPr>
+          <p:nvPr/>
+        </p:nvPicPr>
+        <p:blipFill>
+          <a:blip r:embed="rId2"/>
+          <a:stretch>
+            <a:fillRect/>
+          </a:stretch>
+        </p:blipFill>
+        <p:spPr>
+          <a:xfrm>
+            <a:off x="3337560" y="1600200"/>
+            <a:ext cx="274320" cy="274320"/>
+          </a:xfrm>
+          <a:prstGeom prst="rect">
+            <a:avLst/>
+          </a:prstGeom>
+        </p:spPr>
+      </p:pic>
+      <p:sp>
+        <p:nvSpPr>
+          <p:cNvPr id="13" name="Text 9"/>
+          <p:cNvSpPr/>
+          <p:nvPr/>
+        </p:nvSpPr>
+        <p:spPr>
+          <a:xfrm>
+            <a:off x="3703320" y="1554480"/>
+            <a:ext cx="1965960" cy="457200"/>
+          </a:xfrm>
+          <a:prstGeom prst="rect">
+            <a:avLst/>
+          </a:prstGeom>
+          <a:noFill/>
+          <a:ln/>
+        </p:spPr>
+        <p:txBody>
+          <a:bodyPr wrap="square" lIns="0" tIns="0" rIns="0" bIns="0" rtlCol="0" anchor="ctr"/>
+          <a:lstStyle/>
+          <a:p>
+            <a:pPr indent="0" marL="0">
+              <a:buNone/>
+            </a:pPr>
+            <a:r>
+              <a:rPr lang="en-US" sz="1100" b="1" dirty="0">
+                <a:solidFill>
+                  <a:srgbClr val="1E2761"/>
+                </a:solidFill>
+                <a:latin typeface="Meiryo" pitchFamily="34" charset="0"/>
+                <a:ea typeface="Meiryo" pitchFamily="34" charset="-122"/>
+                <a:cs typeface="Meiryo" pitchFamily="34" charset="-120"/>
+              </a:rPr>
+              <a:t>多様な評価手法</a:t>
+            </a:r>
+            <a:endParaRPr lang="en-US" sz="1100" dirty="0"/>
+          </a:p>
+          <a:p>
+            <a:pPr indent="0" marL="0">
+              <a:buNone/>
+            </a:pPr>
+            <a:r>
+              <a:rPr lang="en-US" sz="1100" b="1" dirty="0">
+                <a:solidFill>
+                  <a:srgbClr val="1E2761"/>
+                </a:solidFill>
+                <a:latin typeface="Meiryo" pitchFamily="34" charset="0"/>
+                <a:ea typeface="Meiryo" pitchFamily="34" charset="-122"/>
+                <a:cs typeface="Meiryo" pitchFamily="34" charset="-120"/>
+              </a:rPr>
+              <a:t>の統合</a:t>
+            </a:r>
+            <a:endParaRPr lang="en-US" sz="1100" dirty="0"/>
+          </a:p>
+        </p:txBody>
+      </p:sp>
+      <p:sp>
+        <p:nvSpPr>
+          <p:cNvPr id="14" name="Text 10"/>
+          <p:cNvSpPr/>
+          <p:nvPr/>
+        </p:nvSpPr>
+        <p:spPr>
+          <a:xfrm>
+            <a:off x="3337560" y="2103120"/>
+            <a:ext cx="2331720" cy="1645920"/>
+          </a:xfrm>
+          <a:prstGeom prst="rect">
+            <a:avLst/>
+          </a:prstGeom>
+          <a:noFill/>
+          <a:ln/>
+        </p:spPr>
+        <p:txBody>
+          <a:bodyPr wrap="square" lIns="0" tIns="0" rIns="0" bIns="0" rtlCol="0" anchor="t"/>
+          <a:lstStyle/>
+          <a:p>
+            <a:pPr marL="342900" indent="-342900">
+              <a:spcAft>
+                <a:spcPts val="300"/>
+              </a:spcAft>
+              <a:buSzPct val="100000"/>
+              <a:buChar char="•"/>
+            </a:pPr>
+            <a:r>
+              <a:rPr lang="en-US" sz="900" dirty="0">
+                <a:solidFill>
+                  <a:srgbClr val="2D3748"/>
+                </a:solidFill>
+                <a:latin typeface="Meiryo" pitchFamily="34" charset="0"/>
+                <a:ea typeface="Meiryo" pitchFamily="34" charset="-122"/>
+                <a:cs typeface="Meiryo" pitchFamily="34" charset="-120"/>
+              </a:rPr>
+              <a:t>AI自動評価（LLM-as-a-Judge）</a:t>
+            </a:r>
+            <a:endParaRPr lang="en-US" sz="900" dirty="0"/>
+          </a:p>
+          <a:p>
+            <a:pPr marL="342900" indent="-342900">
+              <a:spcAft>
+                <a:spcPts val="300"/>
+              </a:spcAft>
+              <a:buSzPct val="100000"/>
+              <a:buChar char="•"/>
+            </a:pPr>
+            <a:r>
+              <a:rPr lang="en-US" sz="900" dirty="0">
+                <a:solidFill>
+                  <a:srgbClr val="2D3748"/>
+                </a:solidFill>
+                <a:latin typeface="Meiryo" pitchFamily="34" charset="0"/>
+                <a:ea typeface="Meiryo" pitchFamily="34" charset="-122"/>
+                <a:cs typeface="Meiryo" pitchFamily="34" charset="-120"/>
+              </a:rPr>
+              <a:t>エンドユーザーフィードバック（👍👎）</a:t>
+            </a:r>
+            <a:endParaRPr lang="en-US" sz="900" dirty="0"/>
+          </a:p>
+          <a:p>
+            <a:pPr marL="342900" indent="-342900">
+              <a:spcAft>
+                <a:spcPts val="300"/>
+              </a:spcAft>
+              <a:buSzPct val="100000"/>
+              <a:buChar char="•"/>
+            </a:pPr>
+            <a:r>
+              <a:rPr lang="en-US" sz="900" dirty="0">
+                <a:solidFill>
+                  <a:srgbClr val="2D3748"/>
+                </a:solidFill>
+                <a:latin typeface="Meiryo" pitchFamily="34" charset="0"/>
+                <a:ea typeface="Meiryo" pitchFamily="34" charset="-122"/>
+                <a:cs typeface="Meiryo" pitchFamily="34" charset="-120"/>
+              </a:rPr>
+              <a:t>ドメイン専門家の手動アノテーション</a:t>
+            </a:r>
+            <a:endParaRPr lang="en-US" sz="900" dirty="0"/>
+          </a:p>
+          <a:p>
+            <a:pPr marL="342900" indent="-342900">
+              <a:spcAft>
+                <a:spcPts val="300"/>
+              </a:spcAft>
+              <a:buSzPct val="100000"/>
+              <a:buChar char="•"/>
+            </a:pPr>
+            <a:r>
+              <a:rPr lang="en-US" sz="900" dirty="0">
+                <a:solidFill>
+                  <a:srgbClr val="2D3748"/>
+                </a:solidFill>
+                <a:latin typeface="Meiryo" pitchFamily="34" charset="0"/>
+                <a:ea typeface="Meiryo" pitchFamily="34" charset="-122"/>
+                <a:cs typeface="Meiryo" pitchFamily="34" charset="-120"/>
+              </a:rPr>
+              <a:t>Claude Codeのレビュー結果を評価データに蓄積</a:t>
+            </a:r>
+            <a:endParaRPr lang="en-US" sz="900" dirty="0"/>
+          </a:p>
+        </p:txBody>
+      </p:sp>
+      <p:sp>
+        <p:nvSpPr>
+          <p:cNvPr id="15" name="Shape 11"/>
+          <p:cNvSpPr/>
+          <p:nvPr/>
+        </p:nvSpPr>
+        <p:spPr>
+          <a:xfrm>
+            <a:off x="5943600" y="1417320"/>
+            <a:ext cx="2606040" cy="2468880"/>
+          </a:xfrm>
+          <a:prstGeom prst="rect">
+            <a:avLst/>
+          </a:prstGeom>
+          <a:solidFill>
+            <a:srgbClr val="F8F9FC"/>
+          </a:solidFill>
+          <a:ln w="9525">
+            <a:solidFill>
+              <a:srgbClr val="E5E9F2"/>
+            </a:solidFill>
+            <a:prstDash val="solid"/>
+          </a:ln>
+          <a:effectLst>
+            <a:outerShdw sx="100000" sy="100000" kx="0" ky="0" algn="bl" rotWithShape="0" blurRad="50800" dist="12700" dir="8100000">
+              <a:srgbClr val="000000">
+                <a:alpha val="10000"/>
+              </a:srgbClr>
+            </a:outerShdw>
+          </a:effectLst>
+        </p:spPr>
+        <p:txBody>
+          <a:bodyPr/>
+          <a:p/>
+        </p:txBody>
+      </p:sp>
+      <p:sp>
+        <p:nvSpPr>
+          <p:cNvPr id="16" name="Shape 12"/>
+          <p:cNvSpPr/>
+          <p:nvPr/>
+        </p:nvSpPr>
+        <p:spPr>
+          <a:xfrm>
+            <a:off x="5943600" y="1417320"/>
+            <a:ext cx="2606040" cy="64008"/>
+          </a:xfrm>
+          <a:prstGeom prst="rect">
+            <a:avLst/>
+          </a:prstGeom>
+          <a:solidFill>
+            <a:srgbClr val="1E2761"/>
+          </a:solidFill>
+          <a:ln w="12700">
+            <a:solidFill>
+              <a:srgbClr val="1E2761"/>
+            </a:solidFill>
+            <a:prstDash val="solid"/>
+          </a:ln>
+        </p:spPr>
+        <p:txBody>
+          <a:bodyPr/>
+          <a:p/>
+        </p:txBody>
+      </p:sp>
+      <p:pic>
+        <p:nvPicPr>
+          <p:cNvPr id="17" name="Image 2" descr="preencoded.png">    </p:cNvPr>
+          <p:cNvPicPr>
+            <a:picLocks noChangeAspect="1"/>
+          </p:cNvPicPr>
+          <p:nvPr/>
+        </p:nvPicPr>
+        <p:blipFill>
+          <a:blip r:embed="rId3"/>
+          <a:stretch>
+            <a:fillRect/>
+          </a:stretch>
+        </p:blipFill>
+        <p:spPr>
+          <a:xfrm>
+            <a:off x="6080760" y="1600200"/>
+            <a:ext cx="274320" cy="274320"/>
+          </a:xfrm>
+          <a:prstGeom prst="rect">
+            <a:avLst/>
+          </a:prstGeom>
+        </p:spPr>
+      </p:pic>
+      <p:sp>
+        <p:nvSpPr>
+          <p:cNvPr id="18" name="Text 13"/>
+          <p:cNvSpPr/>
+          <p:nvPr/>
+        </p:nvSpPr>
+        <p:spPr>
+          <a:xfrm>
+            <a:off x="6446520" y="1554480"/>
+            <a:ext cx="1965960" cy="457200"/>
+          </a:xfrm>
+          <a:prstGeom prst="rect">
+            <a:avLst/>
+          </a:prstGeom>
+          <a:noFill/>
+          <a:ln/>
+        </p:spPr>
+        <p:txBody>
+          <a:bodyPr wrap="square" lIns="0" tIns="0" rIns="0" bIns="0" rtlCol="0" anchor="ctr"/>
+          <a:lstStyle/>
+          <a:p>
+            <a:pPr indent="0" marL="0">
+              <a:buNone/>
+            </a:pPr>
+            <a:r>
+              <a:rPr lang="en-US" sz="1100" b="1" dirty="0">
+                <a:solidFill>
+                  <a:srgbClr val="1E2761"/>
+                </a:solidFill>
+                <a:latin typeface="Meiryo" pitchFamily="34" charset="0"/>
+                <a:ea typeface="Meiryo" pitchFamily="34" charset="-122"/>
+                <a:cs typeface="Meiryo" pitchFamily="34" charset="-120"/>
+              </a:rPr>
+              <a:t>RAGパイプライン</a:t>
+            </a:r>
+            <a:endParaRPr lang="en-US" sz="1100" dirty="0"/>
+          </a:p>
+          <a:p>
+            <a:pPr indent="0" marL="0">
+              <a:buNone/>
+            </a:pPr>
+            <a:r>
+              <a:rPr lang="en-US" sz="1100" b="1" dirty="0">
+                <a:solidFill>
+                  <a:srgbClr val="1E2761"/>
+                </a:solidFill>
+                <a:latin typeface="Meiryo" pitchFamily="34" charset="0"/>
+                <a:ea typeface="Meiryo" pitchFamily="34" charset="-122"/>
+                <a:cs typeface="Meiryo" pitchFamily="34" charset="-120"/>
+              </a:rPr>
+              <a:t>の診断</a:t>
+            </a:r>
+            <a:endParaRPr lang="en-US" sz="1100" dirty="0"/>
+          </a:p>
+        </p:txBody>
+      </p:sp>
+      <p:sp>
+        <p:nvSpPr>
+          <p:cNvPr id="19" name="Text 14"/>
+          <p:cNvSpPr/>
+          <p:nvPr/>
+        </p:nvSpPr>
+        <p:spPr>
+          <a:xfrm>
+            <a:off x="6080760" y="2103120"/>
+            <a:ext cx="2331720" cy="1645920"/>
+          </a:xfrm>
+          <a:prstGeom prst="rect">
+            <a:avLst/>
+          </a:prstGeom>
+          <a:noFill/>
+          <a:ln/>
+        </p:spPr>
+        <p:txBody>
+          <a:bodyPr wrap="square" lIns="0" tIns="0" rIns="0" bIns="0" rtlCol="0" anchor="t"/>
+          <a:lstStyle/>
+          <a:p>
+            <a:pPr marL="342900" indent="-342900">
+              <a:spcAft>
+                <a:spcPts val="300"/>
+              </a:spcAft>
+              <a:buSzPct val="100000"/>
+              <a:buChar char="•"/>
+            </a:pPr>
+            <a:r>
+              <a:rPr lang="en-US" sz="900" dirty="0">
+                <a:solidFill>
+                  <a:srgbClr val="2D3748"/>
+                </a:solidFill>
+                <a:latin typeface="Meiryo" pitchFamily="34" charset="0"/>
+                <a:ea typeface="Meiryo" pitchFamily="34" charset="-122"/>
+                <a:cs typeface="Meiryo" pitchFamily="34" charset="-120"/>
+              </a:rPr>
+              <a:t>検索精度と回答忠実性を定量化</a:t>
+            </a:r>
+            <a:endParaRPr lang="en-US" sz="900" dirty="0"/>
+          </a:p>
+          <a:p>
+            <a:pPr marL="342900" indent="-342900">
+              <a:spcAft>
+                <a:spcPts val="300"/>
+              </a:spcAft>
+              <a:buSzPct val="100000"/>
+              <a:buChar char="•"/>
+            </a:pPr>
+            <a:r>
+              <a:rPr lang="en-US" sz="900" dirty="0">
+                <a:solidFill>
+                  <a:srgbClr val="2D3748"/>
+                </a:solidFill>
+                <a:latin typeface="Meiryo" pitchFamily="34" charset="0"/>
+                <a:ea typeface="Meiryo" pitchFamily="34" charset="-122"/>
+                <a:cs typeface="Meiryo" pitchFamily="34" charset="-120"/>
+              </a:rPr>
+              <a:t>検索の問題 vs 生成の問題を切り分け</a:t>
+            </a:r>
+            <a:endParaRPr lang="en-US" sz="900" dirty="0"/>
+          </a:p>
+          <a:p>
+            <a:pPr marL="342900" indent="-342900">
+              <a:spcAft>
+                <a:spcPts val="300"/>
+              </a:spcAft>
+              <a:buSzPct val="100000"/>
+              <a:buChar char="•"/>
+            </a:pPr>
+            <a:r>
+              <a:rPr lang="en-US" sz="900" dirty="0">
+                <a:solidFill>
+                  <a:srgbClr val="2D3748"/>
+                </a:solidFill>
+                <a:latin typeface="Meiryo" pitchFamily="34" charset="0"/>
+                <a:ea typeface="Meiryo" pitchFamily="34" charset="-122"/>
+                <a:cs typeface="Meiryo" pitchFamily="34" charset="-120"/>
+              </a:rPr>
+              <a:t>金融クエリ:「古い文書を検索した」のか</a:t>
+            </a:r>
+            <a:endParaRPr lang="en-US" sz="900" dirty="0"/>
+          </a:p>
+          <a:p>
+            <a:pPr marL="342900" indent="-342900">
+              <a:spcAft>
+                <a:spcPts val="300"/>
+              </a:spcAft>
+              <a:buSzPct val="100000"/>
+              <a:buChar char="•"/>
+            </a:pPr>
+            <a:r>
+              <a:rPr lang="en-US" sz="900" dirty="0">
+                <a:solidFill>
+                  <a:srgbClr val="2D3748"/>
+                </a:solidFill>
+                <a:latin typeface="Meiryo" pitchFamily="34" charset="0"/>
+                <a:ea typeface="Meiryo" pitchFamily="34" charset="-122"/>
+                <a:cs typeface="Meiryo" pitchFamily="34" charset="-120"/>
+              </a:rPr>
+              <a:t>「正しい文書から誤回答を生成した」のか</a:t>
+            </a:r>
+            <a:endParaRPr lang="en-US" sz="900" dirty="0"/>
+          </a:p>
+        </p:txBody>
+      </p:sp>
+      <p:sp>
+        <p:nvSpPr>
+          <p:cNvPr id="20" name="Shape 15"/>
+          <p:cNvSpPr/>
+          <p:nvPr/>
+        </p:nvSpPr>
+        <p:spPr>
+          <a:xfrm>
+            <a:off x="457200" y="4114800"/>
+            <a:ext cx="8229600" cy="365760"/>
+          </a:xfrm>
+          <a:prstGeom prst="rect">
+            <a:avLst/>
+          </a:prstGeom>
+          <a:solidFill>
+            <a:srgbClr val="151B47"/>
+          </a:solidFill>
+          <a:ln w="12700">
+            <a:solidFill>
+              <a:srgbClr val="151B47"/>
+            </a:solidFill>
+            <a:prstDash val="solid"/>
+          </a:ln>
+        </p:spPr>
+        <p:txBody>
+          <a:bodyPr/>
+          <a:p/>
+        </p:txBody>
+      </p:sp>
+      <p:sp>
+        <p:nvSpPr>
+          <p:cNvPr id="21" name="Text 16"/>
+          <p:cNvSpPr/>
+          <p:nvPr/>
+        </p:nvSpPr>
+        <p:spPr>
+          <a:xfrm>
+            <a:off x="594360" y="4114800"/>
+            <a:ext cx="7955280" cy="365760"/>
+          </a:xfrm>
+          <a:prstGeom prst="rect">
+            <a:avLst/>
+          </a:prstGeom>
+          <a:noFill/>
+          <a:ln/>
+        </p:spPr>
+        <p:txBody>
+          <a:bodyPr wrap="square" lIns="0" tIns="0" rIns="0" bIns="0" rtlCol="0" anchor="ctr"/>
+          <a:lstStyle/>
+          <a:p>
+            <a:pPr indent="0" marL="0">
+              <a:buNone/>
+            </a:pPr>
+            <a:r>
+              <a:rPr lang="en-US" sz="1200" dirty="0">
+                <a:solidFill>
+                  <a:srgbClr val="FFFFFF"/>
+                </a:solidFill>
+                <a:latin typeface="Meiryo" pitchFamily="34" charset="0"/>
+                <a:ea typeface="Meiryo" pitchFamily="34" charset="-122"/>
+                <a:cs typeface="Meiryo" pitchFamily="34" charset="-120"/>
+              </a:rPr>
+              <a:t>💡 </a:t>
+            </a:r>
+            <a:pPr indent="0" marL="0">
+              <a:buNone/>
+            </a:pPr>
+            <a:r>
+              <a:rPr lang="en-US" sz="1100" b="1" dirty="0">
+                <a:solidFill>
+                  <a:srgbClr val="FFFFFF"/>
+                </a:solidFill>
+                <a:latin typeface="Meiryo" pitchFamily="34" charset="0"/>
+                <a:ea typeface="Meiryo" pitchFamily="34" charset="-122"/>
+                <a:cs typeface="Meiryo" pitchFamily="34" charset="-120"/>
+              </a:rPr>
+              <a:t>品質の変化にデータで気づける。</a:t>
+            </a:r>
+            <a:pPr indent="0" marL="0">
+              <a:buNone/>
+            </a:pPr>
+            <a:r>
+              <a:rPr lang="en-US" sz="1100" dirty="0">
+                <a:solidFill>
+                  <a:srgbClr val="CADCFC"/>
+                </a:solidFill>
+                <a:latin typeface="Meiryo" pitchFamily="34" charset="0"/>
+                <a:ea typeface="Meiryo" pitchFamily="34" charset="-122"/>
+                <a:cs typeface="Meiryo" pitchFamily="34" charset="-120"/>
+              </a:rPr>
+              <a:t>Claude Codeの出力品質を定量的に評価・追跡できる</a:t>
+            </a:r>
+            <a:endParaRPr lang="en-US" sz="1100" dirty="0"/>
+          </a:p>
+        </p:txBody>
+      </p:sp>
+      <p:sp>
+        <p:nvSpPr>
+          <p:cNvPr id="22" name="Text 17"/>
+          <p:cNvSpPr/>
+          <p:nvPr/>
+        </p:nvSpPr>
+        <p:spPr>
+          <a:xfrm>
+            <a:off x="5486400" y="4828032"/>
+            <a:ext cx="3474720" cy="228600"/>
+          </a:xfrm>
+          <a:prstGeom prst="rect">
+            <a:avLst/>
+          </a:prstGeom>
+          <a:noFill/>
+          <a:ln/>
+        </p:spPr>
+        <p:txBody>
+          <a:bodyPr wrap="square" rtlCol="0" anchor="ctr"/>
+          <a:lstStyle/>
+          <a:p>
+            <a:pPr algn="r" indent="0" marL="0">
+              <a:buNone/>
+            </a:pPr>
+            <a:r>
+              <a:rPr lang="en-US" sz="1000" spc="100" kern="0" dirty="0">
+                <a:solidFill>
+                  <a:srgbClr val="64748B"/>
+                </a:solidFill>
+                <a:latin typeface="Arial" pitchFamily="34" charset="0"/>
+                <a:ea typeface="Arial" pitchFamily="34" charset="-122"/>
+                <a:cs typeface="Arial" pitchFamily="34" charset="-120"/>
+              </a:rPr>
+              <a:t>○ ○ ○ ○ ○ ● ○ ○ ○ ○</a:t>
+            </a:r>
+            <a:endParaRPr lang="en-US" sz="1000" dirty="0"/>
+          </a:p>
+        </p:txBody>
+      </p:sp>
+    </p:spTree>
+  </p:cSld>
+  <p:clrMapOvr>
+    <a:masterClrMapping/>
+  </p:clrMapOvr>
+</p:sld>
+</file>
+
+<file path=ppt/slides/slide12.xml><?xml version="1.0" encoding="utf-8"?>
+<p:sld xmlns:a="http://schemas.openxmlformats.org/drawingml/2006/main" xmlns:r="http://schemas.openxmlformats.org/officeDocument/2006/relationships" xmlns:p="http://schemas.openxmlformats.org/presentationml/2006/main">
+  <p:cSld name="Slide 9">
+    <p:bg>
+      <p:bgPr>
+        <a:solidFill>
+          <a:srgbClr val="FFFFFF"/>
+        </a:solidFill>
+      </p:bgPr>
+    </p:bg>
+    <p:spTree>
+      <p:nvGrpSpPr>
+        <p:cNvPr id="1" name=""/>
+        <p:cNvGrpSpPr/>
+        <p:nvPr/>
+      </p:nvGrpSpPr>
+      <p:grpSpPr>
+        <a:xfrm>
+          <a:off x="0" y="0"/>
+          <a:ext cx="0" cy="0"/>
+          <a:chOff x="0" y="0"/>
+          <a:chExt cx="0" cy="0"/>
+        </a:xfrm>
+      </p:grpSpPr>
+      <p:sp>
+        <p:nvSpPr>
+          <p:cNvPr id="2" name="Text 0"/>
+          <p:cNvSpPr/>
+          <p:nvPr/>
+        </p:nvSpPr>
+        <p:spPr>
+          <a:xfrm>
+            <a:off x="457200" y="320040"/>
+            <a:ext cx="8229600" cy="548640"/>
+          </a:xfrm>
+          <a:prstGeom prst="rect">
+            <a:avLst/>
+          </a:prstGeom>
+          <a:noFill/>
+          <a:ln/>
+        </p:spPr>
+        <p:txBody>
+          <a:bodyPr wrap="square" lIns="0" tIns="0" rIns="0" bIns="0" rtlCol="0" anchor="ctr"/>
+          <a:lstStyle/>
+          <a:p>
+            <a:pPr indent="0" marL="0">
+              <a:buNone/>
+            </a:pPr>
+            <a:r>
+              <a:rPr lang="en-US" sz="2200" b="1" dirty="0">
+                <a:solidFill>
+                  <a:srgbClr val="1E2761"/>
+                </a:solidFill>
+                <a:latin typeface="Arial Black" pitchFamily="34" charset="0"/>
+                <a:ea typeface="Arial Black" pitchFamily="34" charset="-122"/>
+                <a:cs typeface="Arial Black" pitchFamily="34" charset="-120"/>
+              </a:rPr>
+              <a:t>機能③: プロンプト管理（Prompt CMS）</a:t>
+            </a:r>
+            <a:endParaRPr lang="en-US" sz="2200" dirty="0"/>
+          </a:p>
+        </p:txBody>
+      </p:sp>
+      <p:sp>
+        <p:nvSpPr>
+          <p:cNvPr id="3" name="Shape 1"/>
+          <p:cNvSpPr/>
+          <p:nvPr/>
+        </p:nvSpPr>
+        <p:spPr>
+          <a:xfrm>
+            <a:off x="457200" y="932688"/>
+            <a:ext cx="548640" cy="45720"/>
+          </a:xfrm>
+          <a:prstGeom prst="rect">
+            <a:avLst/>
+          </a:prstGeom>
+          <a:solidFill>
+            <a:srgbClr val="F96167"/>
+          </a:solidFill>
+          <a:ln w="12700">
+            <a:solidFill>
+              <a:srgbClr val="F96167"/>
+            </a:solidFill>
+            <a:prstDash val="solid"/>
+          </a:ln>
+        </p:spPr>
+        <p:txBody>
+          <a:bodyPr/>
+          <a:p/>
+        </p:txBody>
+      </p:sp>
+      <p:sp>
+        <p:nvSpPr>
+          <p:cNvPr id="4" name="Text 2"/>
+          <p:cNvSpPr/>
+          <p:nvPr/>
+        </p:nvSpPr>
+        <p:spPr>
+          <a:xfrm>
+            <a:off x="457200" y="1051560"/>
+            <a:ext cx="8229600" cy="274320"/>
+          </a:xfrm>
+          <a:prstGeom prst="rect">
+            <a:avLst/>
+          </a:prstGeom>
+          <a:noFill/>
+          <a:ln/>
+        </p:spPr>
+        <p:txBody>
+          <a:bodyPr wrap="square" lIns="0" tIns="0" rIns="0" bIns="0" rtlCol="0" anchor="ctr"/>
+          <a:lstStyle/>
+          <a:p>
+            <a:pPr indent="0" marL="0">
+              <a:buNone/>
+            </a:pPr>
+            <a:r>
+              <a:rPr lang="en-US" sz="1300" i="1" dirty="0">
+                <a:solidFill>
+                  <a:srgbClr val="64748B"/>
+                </a:solidFill>
+                <a:latin typeface="Meiryo" pitchFamily="34" charset="0"/>
+                <a:ea typeface="Meiryo" pitchFamily="34" charset="-122"/>
+                <a:cs typeface="Meiryo" pitchFamily="34" charset="-120"/>
+              </a:rPr>
+              <a:t>CLAUDE.mdとは別レイヤーで、LLMアプリのプロンプトをバージョン管理する</a:t>
+            </a:r>
+            <a:endParaRPr lang="en-US" sz="1300" dirty="0"/>
+          </a:p>
+        </p:txBody>
+      </p:sp>
+      <p:sp>
+        <p:nvSpPr>
+          <p:cNvPr id="5" name="Shape 3"/>
+          <p:cNvSpPr/>
+          <p:nvPr/>
+        </p:nvSpPr>
+        <p:spPr>
+          <a:xfrm>
+            <a:off x="457200" y="1417320"/>
+            <a:ext cx="2606040" cy="2468880"/>
+          </a:xfrm>
+          <a:prstGeom prst="rect">
+            <a:avLst/>
+          </a:prstGeom>
+          <a:solidFill>
+            <a:srgbClr val="F8F9FC"/>
+          </a:solidFill>
+          <a:ln w="9525">
+            <a:solidFill>
+              <a:srgbClr val="E5E9F2"/>
+            </a:solidFill>
+            <a:prstDash val="solid"/>
+          </a:ln>
+          <a:effectLst>
+            <a:outerShdw sx="100000" sy="100000" kx="0" ky="0" algn="bl" rotWithShape="0" blurRad="50800" dist="12700" dir="8100000">
+              <a:srgbClr val="000000">
+                <a:alpha val="10000"/>
+              </a:srgbClr>
+            </a:outerShdw>
+          </a:effectLst>
+        </p:spPr>
+        <p:txBody>
+          <a:bodyPr/>
+          <a:p/>
+        </p:txBody>
+      </p:sp>
+      <p:sp>
+        <p:nvSpPr>
+          <p:cNvPr id="6" name="Shape 4"/>
+          <p:cNvSpPr/>
+          <p:nvPr/>
+        </p:nvSpPr>
+        <p:spPr>
+          <a:xfrm>
+            <a:off x="457200" y="1417320"/>
+            <a:ext cx="2606040" cy="64008"/>
+          </a:xfrm>
+          <a:prstGeom prst="rect">
+            <a:avLst/>
+          </a:prstGeom>
+          <a:solidFill>
+            <a:srgbClr val="1E2761"/>
+          </a:solidFill>
+          <a:ln w="12700">
+            <a:solidFill>
+              <a:srgbClr val="1E2761"/>
+            </a:solidFill>
+            <a:prstDash val="solid"/>
+          </a:ln>
+        </p:spPr>
+        <p:txBody>
+          <a:bodyPr/>
+          <a:p/>
+        </p:txBody>
+      </p:sp>
+      <p:pic>
+        <p:nvPicPr>
+          <p:cNvPr id="7" name="Image 0" descr="preencoded.png">    </p:cNvPr>
+          <p:cNvPicPr>
+            <a:picLocks noChangeAspect="1"/>
+          </p:cNvPicPr>
+          <p:nvPr/>
+        </p:nvPicPr>
+        <p:blipFill>
+          <a:blip r:embed="rId1"/>
+          <a:stretch>
+            <a:fillRect/>
+          </a:stretch>
+        </p:blipFill>
+        <p:spPr>
+          <a:xfrm>
+            <a:off x="594360" y="1600200"/>
+            <a:ext cx="274320" cy="274320"/>
+          </a:xfrm>
+          <a:prstGeom prst="rect">
+            <a:avLst/>
+          </a:prstGeom>
+        </p:spPr>
+      </p:pic>
+      <p:sp>
+        <p:nvSpPr>
+          <p:cNvPr id="8" name="Text 5"/>
+          <p:cNvSpPr/>
+          <p:nvPr/>
+        </p:nvSpPr>
+        <p:spPr>
+          <a:xfrm>
+            <a:off x="960120" y="1554480"/>
+            <a:ext cx="1965960" cy="457200"/>
+          </a:xfrm>
+          <a:prstGeom prst="rect">
+            <a:avLst/>
+          </a:prstGeom>
+          <a:noFill/>
+          <a:ln/>
+        </p:spPr>
+        <p:txBody>
+          <a:bodyPr wrap="square" lIns="0" tIns="0" rIns="0" bIns="0" rtlCol="0" anchor="ctr"/>
+          <a:lstStyle/>
+          <a:p>
+            <a:pPr indent="0" marL="0">
+              <a:buNone/>
+            </a:pPr>
+            <a:r>
+              <a:rPr lang="en-US" sz="1100" b="1" dirty="0">
+                <a:solidFill>
+                  <a:srgbClr val="1E2761"/>
+                </a:solidFill>
+                <a:latin typeface="Meiryo" pitchFamily="34" charset="0"/>
+                <a:ea typeface="Meiryo" pitchFamily="34" charset="-122"/>
+                <a:cs typeface="Meiryo" pitchFamily="34" charset="-120"/>
+              </a:rPr>
+              <a:t>コードベースからの</a:t>
+            </a:r>
+            <a:endParaRPr lang="en-US" sz="1100" dirty="0"/>
+          </a:p>
+          <a:p>
+            <a:pPr indent="0" marL="0">
+              <a:buNone/>
+            </a:pPr>
+            <a:r>
+              <a:rPr lang="en-US" sz="1100" b="1" dirty="0">
+                <a:solidFill>
+                  <a:srgbClr val="1E2761"/>
+                </a:solidFill>
+                <a:latin typeface="Meiryo" pitchFamily="34" charset="0"/>
+                <a:ea typeface="Meiryo" pitchFamily="34" charset="-122"/>
+                <a:cs typeface="Meiryo" pitchFamily="34" charset="-120"/>
+              </a:rPr>
+              <a:t>完全な分離</a:t>
+            </a:r>
+            <a:endParaRPr lang="en-US" sz="1100" dirty="0"/>
+          </a:p>
+        </p:txBody>
+      </p:sp>
+      <p:sp>
+        <p:nvSpPr>
+          <p:cNvPr id="9" name="Text 6"/>
+          <p:cNvSpPr/>
+          <p:nvPr/>
+        </p:nvSpPr>
+        <p:spPr>
+          <a:xfrm>
+            <a:off x="594360" y="2103120"/>
+            <a:ext cx="2331720" cy="1645920"/>
+          </a:xfrm>
+          <a:prstGeom prst="rect">
+            <a:avLst/>
+          </a:prstGeom>
+          <a:noFill/>
+          <a:ln/>
+        </p:spPr>
+        <p:txBody>
+          <a:bodyPr wrap="square" lIns="0" tIns="0" rIns="0" bIns="0" rtlCol="0" anchor="t"/>
+          <a:lstStyle/>
+          <a:p>
+            <a:pPr marL="342900" indent="-342900">
+              <a:spcAft>
+                <a:spcPts val="300"/>
+              </a:spcAft>
+              <a:buSzPct val="100000"/>
+              <a:buChar char="•"/>
+            </a:pPr>
+            <a:r>
+              <a:rPr lang="en-US" sz="900" dirty="0">
+                <a:solidFill>
+                  <a:srgbClr val="2D3748"/>
+                </a:solidFill>
+                <a:latin typeface="Meiryo" pitchFamily="34" charset="0"/>
+                <a:ea typeface="Meiryo" pitchFamily="34" charset="-122"/>
+                <a:cs typeface="Meiryo" pitchFamily="34" charset="-120"/>
+              </a:rPr>
+              <a:t>「コード変更・再デプロイ」サイクルを排除</a:t>
+            </a:r>
+            <a:endParaRPr lang="en-US" sz="900" dirty="0"/>
+          </a:p>
+          <a:p>
+            <a:pPr marL="342900" indent="-342900">
+              <a:spcAft>
+                <a:spcPts val="300"/>
+              </a:spcAft>
+              <a:buSzPct val="100000"/>
+              <a:buChar char="•"/>
+            </a:pPr>
+            <a:r>
+              <a:rPr lang="en-US" sz="900" dirty="0">
+                <a:solidFill>
+                  <a:srgbClr val="2D3748"/>
+                </a:solidFill>
+                <a:latin typeface="Meiryo" pitchFamily="34" charset="0"/>
+                <a:ea typeface="Meiryo" pitchFamily="34" charset="-122"/>
+                <a:cs typeface="Meiryo" pitchFamily="34" charset="-120"/>
+              </a:rPr>
+              <a:t>API経由でミリ秒単位の低遅延取得</a:t>
+            </a:r>
+            <a:endParaRPr lang="en-US" sz="900" dirty="0"/>
+          </a:p>
+          <a:p>
+            <a:pPr marL="342900" indent="-342900">
+              <a:spcAft>
+                <a:spcPts val="300"/>
+              </a:spcAft>
+              <a:buSzPct val="100000"/>
+              <a:buChar char="•"/>
+            </a:pPr>
+            <a:r>
+              <a:rPr lang="en-US" sz="900" dirty="0">
+                <a:solidFill>
+                  <a:srgbClr val="2D3748"/>
+                </a:solidFill>
+                <a:latin typeface="Meiryo" pitchFamily="34" charset="0"/>
+                <a:ea typeface="Meiryo" pitchFamily="34" charset="-122"/>
+                <a:cs typeface="Meiryo" pitchFamily="34" charset="-120"/>
+              </a:rPr>
+              <a:t>Claude Code用CLAUDE.mdとは別レイヤーのプロンプト管理</a:t>
+            </a:r>
+            <a:endParaRPr lang="en-US" sz="900" dirty="0"/>
+          </a:p>
+        </p:txBody>
+      </p:sp>
+      <p:sp>
+        <p:nvSpPr>
+          <p:cNvPr id="10" name="Shape 7"/>
+          <p:cNvSpPr/>
+          <p:nvPr/>
+        </p:nvSpPr>
+        <p:spPr>
+          <a:xfrm>
+            <a:off x="3200400" y="1417320"/>
+            <a:ext cx="2606040" cy="2468880"/>
+          </a:xfrm>
+          <a:prstGeom prst="rect">
+            <a:avLst/>
+          </a:prstGeom>
+          <a:solidFill>
+            <a:srgbClr val="F8F9FC"/>
+          </a:solidFill>
+          <a:ln w="9525">
+            <a:solidFill>
+              <a:srgbClr val="E5E9F2"/>
+            </a:solidFill>
+            <a:prstDash val="solid"/>
+          </a:ln>
+          <a:effectLst>
+            <a:outerShdw sx="100000" sy="100000" kx="0" ky="0" algn="bl" rotWithShape="0" blurRad="50800" dist="12700" dir="8100000">
+              <a:srgbClr val="000000">
+                <a:alpha val="10000"/>
+              </a:srgbClr>
+            </a:outerShdw>
+          </a:effectLst>
+        </p:spPr>
+        <p:txBody>
+          <a:bodyPr/>
+          <a:p/>
+        </p:txBody>
+      </p:sp>
+      <p:sp>
+        <p:nvSpPr>
+          <p:cNvPr id="11" name="Shape 8"/>
+          <p:cNvSpPr/>
+          <p:nvPr/>
+        </p:nvSpPr>
+        <p:spPr>
+          <a:xfrm>
+            <a:off x="3200400" y="1417320"/>
+            <a:ext cx="2606040" cy="64008"/>
+          </a:xfrm>
+          <a:prstGeom prst="rect">
+            <a:avLst/>
+          </a:prstGeom>
+          <a:solidFill>
+            <a:srgbClr val="1E2761"/>
+          </a:solidFill>
+          <a:ln w="12700">
+            <a:solidFill>
+              <a:srgbClr val="1E2761"/>
+            </a:solidFill>
+            <a:prstDash val="solid"/>
+          </a:ln>
+        </p:spPr>
+        <p:txBody>
+          <a:bodyPr/>
+          <a:p/>
+        </p:txBody>
+      </p:sp>
+      <p:pic>
+        <p:nvPicPr>
+          <p:cNvPr id="12" name="Image 1" descr="preencoded.png">    </p:cNvPr>
+          <p:cNvPicPr>
+            <a:picLocks noChangeAspect="1"/>
+          </p:cNvPicPr>
+          <p:nvPr/>
+        </p:nvPicPr>
+        <p:blipFill>
+          <a:blip r:embed="rId2"/>
+          <a:stretch>
+            <a:fillRect/>
+          </a:stretch>
+        </p:blipFill>
+        <p:spPr>
+          <a:xfrm>
+            <a:off x="3337560" y="1600200"/>
+            <a:ext cx="274320" cy="274320"/>
+          </a:xfrm>
+          <a:prstGeom prst="rect">
+            <a:avLst/>
+          </a:prstGeom>
+        </p:spPr>
+      </p:pic>
+      <p:sp>
+        <p:nvSpPr>
+          <p:cNvPr id="13" name="Text 9"/>
+          <p:cNvSpPr/>
+          <p:nvPr/>
+        </p:nvSpPr>
+        <p:spPr>
+          <a:xfrm>
+            <a:off x="3703320" y="1554480"/>
+            <a:ext cx="1965960" cy="457200"/>
+          </a:xfrm>
+          <a:prstGeom prst="rect">
+            <a:avLst/>
+          </a:prstGeom>
+          <a:noFill/>
+          <a:ln/>
+        </p:spPr>
+        <p:txBody>
+          <a:bodyPr wrap="square" lIns="0" tIns="0" rIns="0" bIns="0" rtlCol="0" anchor="ctr"/>
+          <a:lstStyle/>
+          <a:p>
+            <a:pPr indent="0" marL="0">
+              <a:buNone/>
+            </a:pPr>
+            <a:r>
+              <a:rPr lang="en-US" sz="1100" b="1" dirty="0">
+                <a:solidFill>
+                  <a:srgbClr val="1E2761"/>
+                </a:solidFill>
+                <a:latin typeface="Meiryo" pitchFamily="34" charset="0"/>
+                <a:ea typeface="Meiryo" pitchFamily="34" charset="-122"/>
+                <a:cs typeface="Meiryo" pitchFamily="34" charset="-120"/>
+              </a:rPr>
+              <a:t>バージョン管理と</a:t>
+            </a:r>
+            <a:endParaRPr lang="en-US" sz="1100" dirty="0"/>
+          </a:p>
+          <a:p>
+            <a:pPr indent="0" marL="0">
+              <a:buNone/>
+            </a:pPr>
+            <a:r>
+              <a:rPr lang="en-US" sz="1100" b="1" dirty="0">
+                <a:solidFill>
+                  <a:srgbClr val="1E2761"/>
+                </a:solidFill>
+                <a:latin typeface="Meiryo" pitchFamily="34" charset="0"/>
+                <a:ea typeface="Meiryo" pitchFamily="34" charset="-122"/>
+                <a:cs typeface="Meiryo" pitchFamily="34" charset="-120"/>
+              </a:rPr>
+              <a:t>ロールバック</a:t>
+            </a:r>
+            <a:endParaRPr lang="en-US" sz="1100" dirty="0"/>
+          </a:p>
+        </p:txBody>
+      </p:sp>
+      <p:sp>
+        <p:nvSpPr>
+          <p:cNvPr id="14" name="Text 10"/>
+          <p:cNvSpPr/>
+          <p:nvPr/>
+        </p:nvSpPr>
+        <p:spPr>
+          <a:xfrm>
+            <a:off x="3337560" y="2103120"/>
+            <a:ext cx="2331720" cy="1645920"/>
+          </a:xfrm>
+          <a:prstGeom prst="rect">
+            <a:avLst/>
+          </a:prstGeom>
+          <a:noFill/>
+          <a:ln/>
+        </p:spPr>
+        <p:txBody>
+          <a:bodyPr wrap="square" lIns="0" tIns="0" rIns="0" bIns="0" rtlCol="0" anchor="t"/>
+          <a:lstStyle/>
+          <a:p>
+            <a:pPr marL="342900" indent="-342900">
+              <a:spcAft>
+                <a:spcPts val="300"/>
+              </a:spcAft>
+              <a:buSzPct val="100000"/>
+              <a:buChar char="•"/>
+            </a:pPr>
+            <a:r>
+              <a:rPr lang="en-US" sz="900" dirty="0">
+                <a:solidFill>
+                  <a:srgbClr val="2D3748"/>
+                </a:solidFill>
+                <a:latin typeface="Meiryo" pitchFamily="34" charset="0"/>
+                <a:ea typeface="Meiryo" pitchFamily="34" charset="-122"/>
+                <a:cs typeface="Meiryo" pitchFamily="34" charset="-120"/>
+              </a:rPr>
+              <a:t>全変更が新バージョンとして記録</a:t>
+            </a:r>
+            <a:endParaRPr lang="en-US" sz="900" dirty="0"/>
+          </a:p>
+          <a:p>
+            <a:pPr marL="342900" indent="-342900">
+              <a:spcAft>
+                <a:spcPts val="300"/>
+              </a:spcAft>
+              <a:buSzPct val="100000"/>
+              <a:buChar char="•"/>
+            </a:pPr>
+            <a:r>
+              <a:rPr lang="en-US" sz="900" dirty="0">
+                <a:solidFill>
+                  <a:srgbClr val="2D3748"/>
+                </a:solidFill>
+                <a:latin typeface="Meiryo" pitchFamily="34" charset="0"/>
+                <a:ea typeface="Meiryo" pitchFamily="34" charset="-122"/>
+                <a:cs typeface="Meiryo" pitchFamily="34" charset="-120"/>
+              </a:rPr>
+              <a:t>即座なロールバック（巻き戻し）可能</a:t>
+            </a:r>
+            <a:endParaRPr lang="en-US" sz="900" dirty="0"/>
+          </a:p>
+          <a:p>
+            <a:pPr marL="342900" indent="-342900">
+              <a:spcAft>
+                <a:spcPts val="300"/>
+              </a:spcAft>
+              <a:buSzPct val="100000"/>
+              <a:buChar char="•"/>
+            </a:pPr>
+            <a:r>
+              <a:rPr lang="en-US" sz="900" dirty="0">
+                <a:solidFill>
+                  <a:srgbClr val="2D3748"/>
+                </a:solidFill>
+                <a:latin typeface="Meiryo" pitchFamily="34" charset="0"/>
+                <a:ea typeface="Meiryo" pitchFamily="34" charset="-122"/>
+                <a:cs typeface="Meiryo" pitchFamily="34" charset="-120"/>
+              </a:rPr>
+              <a:t>production / staging ラベルで安全リリース</a:t>
+            </a:r>
+            <a:endParaRPr lang="en-US" sz="900" dirty="0"/>
+          </a:p>
+        </p:txBody>
+      </p:sp>
+      <p:sp>
+        <p:nvSpPr>
+          <p:cNvPr id="15" name="Shape 11"/>
+          <p:cNvSpPr/>
+          <p:nvPr/>
+        </p:nvSpPr>
+        <p:spPr>
+          <a:xfrm>
+            <a:off x="5943600" y="1417320"/>
+            <a:ext cx="2606040" cy="2468880"/>
+          </a:xfrm>
+          <a:prstGeom prst="rect">
+            <a:avLst/>
+          </a:prstGeom>
+          <a:solidFill>
+            <a:srgbClr val="F8F9FC"/>
+          </a:solidFill>
+          <a:ln w="9525">
+            <a:solidFill>
+              <a:srgbClr val="E5E9F2"/>
+            </a:solidFill>
+            <a:prstDash val="solid"/>
+          </a:ln>
+          <a:effectLst>
+            <a:outerShdw sx="100000" sy="100000" kx="0" ky="0" algn="bl" rotWithShape="0" blurRad="50800" dist="12700" dir="8100000">
+              <a:srgbClr val="000000">
+                <a:alpha val="10000"/>
+              </a:srgbClr>
+            </a:outerShdw>
+          </a:effectLst>
+        </p:spPr>
+        <p:txBody>
+          <a:bodyPr/>
+          <a:p/>
+        </p:txBody>
+      </p:sp>
+      <p:sp>
+        <p:nvSpPr>
+          <p:cNvPr id="16" name="Shape 12"/>
+          <p:cNvSpPr/>
+          <p:nvPr/>
+        </p:nvSpPr>
+        <p:spPr>
+          <a:xfrm>
+            <a:off x="5943600" y="1417320"/>
+            <a:ext cx="2606040" cy="64008"/>
+          </a:xfrm>
+          <a:prstGeom prst="rect">
+            <a:avLst/>
+          </a:prstGeom>
+          <a:solidFill>
+            <a:srgbClr val="1E2761"/>
+          </a:solidFill>
+          <a:ln w="12700">
+            <a:solidFill>
+              <a:srgbClr val="1E2761"/>
+            </a:solidFill>
+            <a:prstDash val="solid"/>
+          </a:ln>
+        </p:spPr>
+        <p:txBody>
+          <a:bodyPr/>
+          <a:p/>
+        </p:txBody>
+      </p:sp>
+      <p:pic>
+        <p:nvPicPr>
+          <p:cNvPr id="17" name="Image 2" descr="preencoded.png">    </p:cNvPr>
+          <p:cNvPicPr>
+            <a:picLocks noChangeAspect="1"/>
+          </p:cNvPicPr>
+          <p:nvPr/>
+        </p:nvPicPr>
+        <p:blipFill>
+          <a:blip r:embed="rId3"/>
+          <a:stretch>
+            <a:fillRect/>
+          </a:stretch>
+        </p:blipFill>
+        <p:spPr>
+          <a:xfrm>
+            <a:off x="6080760" y="1600200"/>
+            <a:ext cx="274320" cy="274320"/>
+          </a:xfrm>
+          <a:prstGeom prst="rect">
+            <a:avLst/>
+          </a:prstGeom>
+        </p:spPr>
+      </p:pic>
+      <p:sp>
+        <p:nvSpPr>
+          <p:cNvPr id="18" name="Text 13"/>
+          <p:cNvSpPr/>
+          <p:nvPr/>
+        </p:nvSpPr>
+        <p:spPr>
+          <a:xfrm>
+            <a:off x="6446520" y="1554480"/>
+            <a:ext cx="1965960" cy="457200"/>
+          </a:xfrm>
+          <a:prstGeom prst="rect">
+            <a:avLst/>
+          </a:prstGeom>
+          <a:noFill/>
+          <a:ln/>
+        </p:spPr>
+        <p:txBody>
+          <a:bodyPr wrap="square" lIns="0" tIns="0" rIns="0" bIns="0" rtlCol="0" anchor="ctr"/>
+          <a:lstStyle/>
+          <a:p>
+            <a:pPr indent="0" marL="0">
+              <a:buNone/>
+            </a:pPr>
+            <a:r>
+              <a:rPr lang="en-US" sz="1100" b="1" dirty="0">
+                <a:solidFill>
+                  <a:srgbClr val="1E2761"/>
+                </a:solidFill>
+                <a:latin typeface="Meiryo" pitchFamily="34" charset="0"/>
+                <a:ea typeface="Meiryo" pitchFamily="34" charset="-122"/>
+                <a:cs typeface="Meiryo" pitchFamily="34" charset="-120"/>
+              </a:rPr>
+              <a:t>ドメイン専門家との</a:t>
+            </a:r>
+            <a:endParaRPr lang="en-US" sz="1100" dirty="0"/>
+          </a:p>
+          <a:p>
+            <a:pPr indent="0" marL="0">
+              <a:buNone/>
+            </a:pPr>
+            <a:r>
+              <a:rPr lang="en-US" sz="1100" b="1" dirty="0">
+                <a:solidFill>
+                  <a:srgbClr val="1E2761"/>
+                </a:solidFill>
+                <a:latin typeface="Meiryo" pitchFamily="34" charset="0"/>
+                <a:ea typeface="Meiryo" pitchFamily="34" charset="-122"/>
+                <a:cs typeface="Meiryo" pitchFamily="34" charset="-120"/>
+              </a:rPr>
+              <a:t>コラボレーション</a:t>
+            </a:r>
+            <a:endParaRPr lang="en-US" sz="1100" dirty="0"/>
+          </a:p>
+        </p:txBody>
+      </p:sp>
+      <p:sp>
+        <p:nvSpPr>
+          <p:cNvPr id="19" name="Text 14"/>
+          <p:cNvSpPr/>
+          <p:nvPr/>
+        </p:nvSpPr>
+        <p:spPr>
+          <a:xfrm>
+            <a:off x="6080760" y="2103120"/>
+            <a:ext cx="2331720" cy="1645920"/>
+          </a:xfrm>
+          <a:prstGeom prst="rect">
+            <a:avLst/>
+          </a:prstGeom>
+          <a:noFill/>
+          <a:ln/>
+        </p:spPr>
+        <p:txBody>
+          <a:bodyPr wrap="square" lIns="0" tIns="0" rIns="0" bIns="0" rtlCol="0" anchor="t"/>
+          <a:lstStyle/>
+          <a:p>
+            <a:pPr marL="342900" indent="-342900">
+              <a:spcAft>
+                <a:spcPts val="300"/>
+              </a:spcAft>
+              <a:buSzPct val="100000"/>
+              <a:buChar char="•"/>
+            </a:pPr>
+            <a:r>
+              <a:rPr lang="en-US" sz="900" dirty="0">
+                <a:solidFill>
+                  <a:srgbClr val="2D3748"/>
+                </a:solidFill>
+                <a:latin typeface="Meiryo" pitchFamily="34" charset="0"/>
+                <a:ea typeface="Meiryo" pitchFamily="34" charset="-122"/>
+                <a:cs typeface="Meiryo" pitchFamily="34" charset="-120"/>
+              </a:rPr>
+              <a:t>金融専門家・コンプライアンス担当者がUIで直接テスト</a:t>
+            </a:r>
+            <a:endParaRPr lang="en-US" sz="900" dirty="0"/>
+          </a:p>
+          <a:p>
+            <a:pPr marL="342900" indent="-342900">
+              <a:spcAft>
+                <a:spcPts val="300"/>
+              </a:spcAft>
+              <a:buSzPct val="100000"/>
+              <a:buChar char="•"/>
+            </a:pPr>
+            <a:r>
+              <a:rPr lang="en-US" sz="900" dirty="0">
+                <a:solidFill>
+                  <a:srgbClr val="2D3748"/>
+                </a:solidFill>
+                <a:latin typeface="Meiryo" pitchFamily="34" charset="0"/>
+                <a:ea typeface="Meiryo" pitchFamily="34" charset="-122"/>
+                <a:cs typeface="Meiryo" pitchFamily="34" charset="-120"/>
+              </a:rPr>
+              <a:t>Playgroundで試行→比較→本番反映</a:t>
+            </a:r>
+            <a:endParaRPr lang="en-US" sz="900" dirty="0"/>
+          </a:p>
+          <a:p>
+            <a:pPr marL="342900" indent="-342900">
+              <a:spcAft>
+                <a:spcPts val="300"/>
+              </a:spcAft>
+              <a:buSzPct val="100000"/>
+              <a:buChar char="•"/>
+            </a:pPr>
+            <a:r>
+              <a:rPr lang="en-US" sz="900" dirty="0">
+                <a:solidFill>
+                  <a:srgbClr val="2D3748"/>
+                </a:solidFill>
+                <a:latin typeface="Meiryo" pitchFamily="34" charset="0"/>
+                <a:ea typeface="Meiryo" pitchFamily="34" charset="-122"/>
+                <a:cs typeface="Meiryo" pitchFamily="34" charset="-120"/>
+              </a:rPr>
+              <a:t>調整サイクルを日→分単位に短縮</a:t>
+            </a:r>
+            <a:endParaRPr lang="en-US" sz="900" dirty="0"/>
+          </a:p>
+        </p:txBody>
+      </p:sp>
+      <p:sp>
+        <p:nvSpPr>
+          <p:cNvPr id="20" name="Shape 15"/>
+          <p:cNvSpPr/>
+          <p:nvPr/>
+        </p:nvSpPr>
+        <p:spPr>
+          <a:xfrm>
+            <a:off x="457200" y="4114800"/>
+            <a:ext cx="8229600" cy="365760"/>
+          </a:xfrm>
+          <a:prstGeom prst="rect">
+            <a:avLst/>
+          </a:prstGeom>
+          <a:solidFill>
+            <a:srgbClr val="151B47"/>
+          </a:solidFill>
+          <a:ln w="12700">
+            <a:solidFill>
+              <a:srgbClr val="151B47"/>
+            </a:solidFill>
+            <a:prstDash val="solid"/>
+          </a:ln>
+        </p:spPr>
+        <p:txBody>
+          <a:bodyPr/>
+          <a:p/>
+        </p:txBody>
+      </p:sp>
+      <p:sp>
+        <p:nvSpPr>
+          <p:cNvPr id="21" name="Text 16"/>
+          <p:cNvSpPr/>
+          <p:nvPr/>
+        </p:nvSpPr>
+        <p:spPr>
+          <a:xfrm>
+            <a:off x="594360" y="4114800"/>
+            <a:ext cx="7955280" cy="365760"/>
+          </a:xfrm>
+          <a:prstGeom prst="rect">
+            <a:avLst/>
+          </a:prstGeom>
+          <a:noFill/>
+          <a:ln/>
+        </p:spPr>
+        <p:txBody>
+          <a:bodyPr wrap="square" lIns="0" tIns="0" rIns="0" bIns="0" rtlCol="0" anchor="ctr"/>
+          <a:lstStyle/>
+          <a:p>
+            <a:pPr indent="0" marL="0">
+              <a:buNone/>
+            </a:pPr>
+            <a:r>
+              <a:rPr lang="en-US" sz="1200" dirty="0">
+                <a:solidFill>
+                  <a:srgbClr val="FFFFFF"/>
+                </a:solidFill>
+                <a:latin typeface="Meiryo" pitchFamily="34" charset="0"/>
+                <a:ea typeface="Meiryo" pitchFamily="34" charset="-122"/>
+                <a:cs typeface="Meiryo" pitchFamily="34" charset="-120"/>
+              </a:rPr>
+              <a:t>→ Prompt CMS と CLAUDE.md の違いは FAQ Q2-4 / 本番運用は FAQ Q3-3</a:t>
+            </a:r>
+            <a:pPr indent="0" marL="0">
+              <a:buNone/>
+            </a:pPr>
+            <a:r>
+              <a:rPr lang="en-US" sz="1000" b="1" dirty="0">
+                <a:solidFill>
+                  <a:srgbClr val="FFFFFF"/>
+                </a:solidFill>
+                <a:latin typeface="Meiryo" pitchFamily="34" charset="0"/>
+                <a:ea typeface="Meiryo" pitchFamily="34" charset="-122"/>
+                <a:cs typeface="Meiryo" pitchFamily="34" charset="-120"/>
+              </a:rPr>
+              <a:t/>
+            </a:r>
+            <a:pPr indent="0" marL="0">
+              <a:buNone/>
+            </a:pPr>
+            <a:r>
+              <a:rPr lang="en-US" sz="1000" dirty="0">
+                <a:solidFill>
+                  <a:srgbClr val="CADCFC"/>
+                </a:solidFill>
+                <a:latin typeface="Meiryo" pitchFamily="34" charset="0"/>
+                <a:ea typeface="Meiryo" pitchFamily="34" charset="-122"/>
+                <a:cs typeface="Meiryo" pitchFamily="34" charset="-120"/>
+              </a:rPr>
+              <a:t/>
+            </a:r>
+            <a:endParaRPr lang="en-US" sz="1100" dirty="0"/>
+          </a:p>
+        </p:txBody>
+      </p:sp>
+      <p:sp>
+        <p:nvSpPr>
+          <p:cNvPr id="22" name="Text 17"/>
+          <p:cNvSpPr/>
+          <p:nvPr/>
+        </p:nvSpPr>
+        <p:spPr>
+          <a:xfrm>
+            <a:off x="5486400" y="4828032"/>
+            <a:ext cx="3474720" cy="228600"/>
+          </a:xfrm>
+          <a:prstGeom prst="rect">
+            <a:avLst/>
+          </a:prstGeom>
+          <a:noFill/>
+          <a:ln/>
+        </p:spPr>
+        <p:txBody>
+          <a:bodyPr wrap="square" rtlCol="0" anchor="ctr"/>
+          <a:lstStyle/>
+          <a:p>
+            <a:pPr algn="r" indent="0" marL="0">
+              <a:buNone/>
+            </a:pPr>
+            <a:r>
+              <a:rPr lang="en-US" sz="1000" spc="100" kern="0" dirty="0">
+                <a:solidFill>
+                  <a:srgbClr val="64748B"/>
+                </a:solidFill>
+                <a:latin typeface="Arial" pitchFamily="34" charset="0"/>
+                <a:ea typeface="Arial" pitchFamily="34" charset="-122"/>
+                <a:cs typeface="Arial" pitchFamily="34" charset="-120"/>
+              </a:rPr>
+              <a:t>○ ○ ○ ○ ○ ● ○ ○ ○ ○</a:t>
+            </a:r>
+            <a:endParaRPr lang="en-US" sz="1000" dirty="0"/>
+          </a:p>
+        </p:txBody>
+      </p:sp>
+    </p:spTree>
+  </p:cSld>
+  <p:clrMapOvr>
+    <a:masterClrMapping/>
+  </p:clrMapOvr>
+</p:sld>
+</file>
+
+<file path=ppt/slides/slide13.xml><?xml version="1.0" encoding="utf-8"?>
 <p:sld xmlns:a="http://schemas.openxmlformats.org/drawingml/2006/main" xmlns:r="http://schemas.openxmlformats.org/officeDocument/2006/relationships" xmlns:p="http://schemas.openxmlformats.org/presentationml/2006/main">
   <p:cSld name="Slide 10">
     <p:bg>
@@ -2338,6 +4715,10 @@
             <a:prstDash val="solid"/>
           </a:ln>
         </p:spPr>
+        <p:txBody>
+          <a:bodyPr/>
+          <a:p/>
+        </p:txBody>
       </p:sp>
       <p:sp>
         <p:nvSpPr>
@@ -2480,6 +4861,10 @@
             <a:prstDash val="solid"/>
           </a:ln>
         </p:spPr>
+        <p:txBody>
+          <a:bodyPr/>
+          <a:p/>
+        </p:txBody>
       </p:sp>
       <p:sp>
         <p:nvSpPr>
@@ -2622,6 +5007,10 @@
             <a:prstDash val="solid"/>
           </a:ln>
         </p:spPr>
+        <p:txBody>
+          <a:bodyPr/>
+          <a:p/>
+        </p:txBody>
       </p:sp>
       <p:sp>
         <p:nvSpPr>
@@ -2787,7 +5176,7 @@
 </p:sld>
 </file>
 
-<file path=ppt/slides/slide11.xml><?xml version="1.0" encoding="utf-8"?>
+<file path=ppt/slides/slide14.xml><?xml version="1.0" encoding="utf-8"?>
 <p:sld xmlns:a="http://schemas.openxmlformats.org/drawingml/2006/main" xmlns:r="http://schemas.openxmlformats.org/officeDocument/2006/relationships" xmlns:p="http://schemas.openxmlformats.org/presentationml/2006/main">
   <p:cSld name="Slide 11">
     <p:bg>
@@ -2874,6 +5263,10 @@
             <a:prstDash val="solid"/>
           </a:ln>
         </p:spPr>
+        <p:txBody>
+          <a:bodyPr/>
+          <a:p/>
+        </p:txBody>
       </p:sp>
       <p:sp>
         <p:nvSpPr>
@@ -2899,6 +5292,10 @@
             <a:prstDash val="solid"/>
           </a:ln>
         </p:spPr>
+        <p:txBody>
+          <a:bodyPr/>
+          <a:p/>
+        </p:txBody>
       </p:sp>
       <p:sp>
         <p:nvSpPr>
@@ -2920,6 +5317,21 @@
         <p:txBody>
           <a:bodyPr wrap="square" lIns="0" tIns="0" rIns="0" bIns="0" rtlCol="0" anchor="ctr"/>
           <a:lstStyle/>
+          <a:p>
+            <a:pPr algn="ctr"/>
+            <a:r>
+              <a:rPr lang="ja-JP" sz="2200" b="1">
+                <a:solidFill>
+                  <a:srgbClr val="FFC800"/>
+                </a:solidFill>
+                <a:latin typeface="+mj-lt"/>
+              </a:rPr>
+              <a:t>★ 「計器なしで本番に飛ばさない」</a:t>
+            </a:r>
+          </a:p>
+          <a:p>
+            <a:endParaRPr lang="ja-JP" sz="800"/>
+          </a:p>
           <a:p>
             <a:pPr indent="0" marL="0">
               <a:spcAft>
@@ -3396,6 +5808,10 @@
             <a:prstDash val="solid"/>
           </a:ln>
         </p:spPr>
+        <p:txBody>
+          <a:bodyPr/>
+          <a:p/>
+        </p:txBody>
       </p:sp>
       <p:sp>
         <p:nvSpPr>
@@ -3567,7 +5983,7 @@
 </p:sld>
 </file>
 
-<file path=ppt/slides/slide12.xml><?xml version="1.0" encoding="utf-8"?>
+<file path=ppt/slides/slide15.xml><?xml version="1.0" encoding="utf-8"?>
 <p:sld xmlns:a="http://schemas.openxmlformats.org/drawingml/2006/main" xmlns:r="http://schemas.openxmlformats.org/officeDocument/2006/relationships" xmlns:p="http://schemas.openxmlformats.org/presentationml/2006/main">
   <p:cSld name="Slide 12">
     <p:bg>
@@ -3966,6 +6382,264 @@
 </file>
 
 <file path=ppt/slides/slide2.xml><?xml version="1.0" encoding="utf-8"?>
+<p:sld xmlns:a="http://schemas.openxmlformats.org/drawingml/2006/main" xmlns:p="http://schemas.openxmlformats.org/presentationml/2006/main" xmlns:r="http://schemas.openxmlformats.org/officeDocument/2006/relationships">
+  <p:cSld>
+    <p:bg>
+      <p:bgPr>
+        <a:solidFill>
+          <a:srgbClr val="FFFFFF"/>
+        </a:solidFill>
+        <a:effectLst/>
+      </p:bgPr>
+    </p:bg>
+    <p:spTree>
+      <p:nvGrpSpPr>
+        <p:cNvPr id="1" name=""/>
+        <p:cNvGrpSpPr/>
+        <p:nvPr/>
+      </p:nvGrpSpPr>
+      <p:grpSpPr/>
+      <p:sp>
+        <p:nvSpPr>
+          <p:cNvPr id="2" name="TextBox 1"/>
+          <p:cNvSpPr txBox="1"/>
+          <p:nvPr/>
+        </p:nvSpPr>
+        <p:spPr>
+          <a:xfrm>
+            <a:off x="457200" y="320040"/>
+            <a:ext cx="8229600" cy="548640"/>
+          </a:xfrm>
+          <a:prstGeom prst="rect">
+            <a:avLst/>
+          </a:prstGeom>
+          <a:noFill/>
+        </p:spPr>
+        <p:txBody>
+          <a:bodyPr wrap="square" lIns="0" rIns="0" tIns="0" bIns="0">
+            <a:spAutoFit/>
+          </a:bodyPr>
+          <a:lstStyle/>
+          <a:p>
+            <a:r>
+              <a:rPr sz="2600" b="1" i="0">
+                <a:solidFill>
+                  <a:srgbClr val="1E2761"/>
+                </a:solidFill>
+              </a:rPr>
+              <a:t>今日の用語ミニ辞典 ― 迷ったらここに戻る</a:t>
+            </a:r>
+          </a:p>
+        </p:txBody>
+      </p:sp>
+      <p:sp>
+        <p:nvSpPr>
+          <p:cNvPr id="3" name="TextBox 2"/>
+          <p:cNvSpPr txBox="1"/>
+          <p:nvPr/>
+        </p:nvSpPr>
+        <p:spPr>
+          <a:xfrm>
+            <a:off x="457200" y="960000"/>
+            <a:ext cx="8229600" cy="330000"/>
+          </a:xfrm>
+          <a:prstGeom prst="rect">
+            <a:avLst/>
+          </a:prstGeom>
+          <a:noFill/>
+        </p:spPr>
+        <p:txBody>
+          <a:bodyPr wrap="square" lIns="0" rIns="0" tIns="0" bIns="0">
+            <a:spAutoFit/>
+          </a:bodyPr>
+          <a:lstStyle/>
+          <a:p>
+            <a:r>
+              <a:rPr sz="1300" b="0" i="1">
+                <a:solidFill>
+                  <a:srgbClr val="64748B"/>
+                </a:solidFill>
+              </a:rPr>
+              <a:t>今日のスライドで初めて出てくるカタカナ語を1行で説明</a:t>
+            </a:r>
+          </a:p>
+        </p:txBody>
+      </p:sp>
+      <p:sp>
+        <p:nvSpPr>
+          <p:cNvPr id="4" name="TextBox 3"/>
+          <p:cNvSpPr txBox="1"/>
+          <p:nvPr/>
+        </p:nvSpPr>
+        <p:spPr>
+          <a:xfrm>
+            <a:off x="457200" y="1450000"/>
+            <a:ext cx="8229600" cy="3500000"/>
+          </a:xfrm>
+          <a:prstGeom prst="rect">
+            <a:avLst/>
+          </a:prstGeom>
+          <a:noFill/>
+        </p:spPr>
+        <p:txBody>
+          <a:bodyPr wrap="square" lIns="0" rIns="0" tIns="0" bIns="0">
+            <a:spAutoFit/>
+          </a:bodyPr>
+          <a:lstStyle/>
+          <a:p>
+            <a:r>
+              <a:rPr sz="1600" b="1">
+                <a:solidFill>
+                  <a:srgbClr val="1E2761"/>
+                </a:solidFill>
+              </a:rPr>
+              <a:t>●  LLM Observability</a:t>
+            </a:r>
+            <a:r>
+              <a:rPr sz="1400" b="0">
+                <a:solidFill>
+                  <a:srgbClr val="2D3748"/>
+                </a:solidFill>
+              </a:rPr>
+              <a:t>　＝　AIの中で何が起きているかを観測する仕組み</a:t>
+            </a:r>
+          </a:p>
+          <a:p>
+            <a:pPr>
+              <a:spcBef>
+                <a:spcPts val="800"/>
+              </a:spcBef>
+            </a:pPr>
+            <a:r>
+              <a:rPr sz="1600" b="1">
+                <a:solidFill>
+                  <a:srgbClr val="1E2761"/>
+                </a:solidFill>
+              </a:rPr>
+              <a:t>●  Trace</a:t>
+            </a:r>
+            <a:r>
+              <a:rPr sz="1400" b="0">
+                <a:solidFill>
+                  <a:srgbClr val="2D3748"/>
+                </a:solidFill>
+              </a:rPr>
+              <a:t>　＝　1回の処理を「誰が何をしたか」の連なりで残す記録</a:t>
+            </a:r>
+          </a:p>
+          <a:p>
+            <a:pPr>
+              <a:spcBef>
+                <a:spcPts val="800"/>
+              </a:spcBef>
+            </a:pPr>
+            <a:r>
+              <a:rPr sz="1600" b="1">
+                <a:solidFill>
+                  <a:srgbClr val="1E2761"/>
+                </a:solidFill>
+              </a:rPr>
+              <a:t>●  LLM-as-a-Judge</a:t>
+            </a:r>
+            <a:r>
+              <a:rPr sz="1400" b="0">
+                <a:solidFill>
+                  <a:srgbClr val="2D3748"/>
+                </a:solidFill>
+              </a:rPr>
+              <a:t>　＝　LLMに採点役をやらせる手法</a:t>
+            </a:r>
+          </a:p>
+          <a:p>
+            <a:pPr>
+              <a:spcBef>
+                <a:spcPts val="800"/>
+              </a:spcBef>
+            </a:pPr>
+            <a:r>
+              <a:rPr sz="1600" b="1">
+                <a:solidFill>
+                  <a:srgbClr val="1E2761"/>
+                </a:solidFill>
+              </a:rPr>
+              <a:t>●  Prompt CMS</a:t>
+            </a:r>
+            <a:r>
+              <a:rPr sz="1400" b="0">
+                <a:solidFill>
+                  <a:srgbClr val="2D3748"/>
+                </a:solidFill>
+              </a:rPr>
+              <a:t>　＝　プロンプトをコードと分けて管理する仕組み</a:t>
+            </a:r>
+          </a:p>
+          <a:p>
+            <a:pPr>
+              <a:spcBef>
+                <a:spcPts val="800"/>
+              </a:spcBef>
+            </a:pPr>
+            <a:r>
+              <a:rPr sz="1600" b="1">
+                <a:solidFill>
+                  <a:srgbClr val="1E2761"/>
+                </a:solidFill>
+              </a:rPr>
+              <a:t>●  ハルシネーション</a:t>
+            </a:r>
+            <a:r>
+              <a:rPr sz="1400" b="0">
+                <a:solidFill>
+                  <a:srgbClr val="2D3748"/>
+                </a:solidFill>
+              </a:rPr>
+              <a:t>　＝　AIがもっともらしい嘘を返す現象</a:t>
+            </a:r>
+          </a:p>
+        </p:txBody>
+      </p:sp>
+      <p:sp>
+        <p:nvSpPr>
+          <p:cNvPr id="5" name="TextBox 4"/>
+          <p:cNvSpPr txBox="1"/>
+          <p:nvPr/>
+        </p:nvSpPr>
+        <p:spPr>
+          <a:xfrm>
+            <a:off x="457200" y="4828032"/>
+            <a:ext cx="8229600" cy="228600"/>
+          </a:xfrm>
+          <a:prstGeom prst="rect">
+            <a:avLst/>
+          </a:prstGeom>
+          <a:noFill/>
+        </p:spPr>
+        <p:txBody>
+          <a:bodyPr wrap="square" lIns="0" rIns="0" tIns="0" bIns="0">
+            <a:spAutoFit/>
+          </a:bodyPr>
+          <a:lstStyle/>
+          <a:p>
+            <a:r>
+              <a:rPr sz="1000" b="0" i="1">
+                <a:solidFill>
+                  <a:srgbClr val="64748B"/>
+                </a:solidFill>
+              </a:rPr>
+              <a:t>★ 用語が分からなくなったらここへ戻ってください</a:t>
+            </a:r>
+          </a:p>
+        </p:txBody>
+      </p:sp>
+    </p:spTree>
+  </p:cSld>
+  <p:clrMapOvr>
+    <a:masterClrMapping/>
+  </p:clrMapOvr>
+</p:sld>
+</file>
+
+<file path=ppt/slides/slide3.xml><?xml version="1.0" encoding="utf-8"?>
 <p:sld xmlns:a="http://schemas.openxmlformats.org/drawingml/2006/main" xmlns:r="http://schemas.openxmlformats.org/officeDocument/2006/relationships" xmlns:p="http://schemas.openxmlformats.org/presentationml/2006/main">
   <p:cSld name="Slide 2">
     <p:bg>
@@ -4052,6 +6726,10 @@
             <a:prstDash val="solid"/>
           </a:ln>
         </p:spPr>
+        <p:txBody>
+          <a:bodyPr/>
+          <a:p/>
+        </p:txBody>
       </p:sp>
       <p:sp>
         <p:nvSpPr>
@@ -4116,6 +6794,10 @@
             <a:prstDash val="solid"/>
           </a:ln>
         </p:spPr>
+        <p:txBody>
+          <a:bodyPr/>
+          <a:p/>
+        </p:txBody>
       </p:sp>
       <p:sp>
         <p:nvSpPr>
@@ -4141,6 +6823,10 @@
             <a:prstDash val="solid"/>
           </a:ln>
         </p:spPr>
+        <p:txBody>
+          <a:bodyPr/>
+          <a:p/>
+        </p:txBody>
       </p:sp>
       <p:sp>
         <p:nvSpPr>
@@ -4287,6 +6973,10 @@
             <a:prstDash val="solid"/>
           </a:ln>
         </p:spPr>
+        <p:txBody>
+          <a:bodyPr/>
+          <a:p/>
+        </p:txBody>
       </p:sp>
       <p:sp>
         <p:nvSpPr>
@@ -4442,6 +7132,10 @@
             <a:prstDash val="solid"/>
           </a:ln>
         </p:spPr>
+        <p:txBody>
+          <a:bodyPr/>
+          <a:p/>
+        </p:txBody>
       </p:sp>
       <p:sp>
         <p:nvSpPr>
@@ -4552,7 +7246,7 @@
 </p:sld>
 </file>
 
-<file path=ppt/slides/slide3.xml><?xml version="1.0" encoding="utf-8"?>
+<file path=ppt/slides/slide4.xml><?xml version="1.0" encoding="utf-8"?>
 <p:sld xmlns:a="http://schemas.openxmlformats.org/drawingml/2006/main" xmlns:r="http://schemas.openxmlformats.org/officeDocument/2006/relationships" xmlns:p="http://schemas.openxmlformats.org/presentationml/2006/main">
   <p:cSld name="Slide 3">
     <p:bg>
@@ -4639,6 +7333,10 @@
             <a:prstDash val="solid"/>
           </a:ln>
         </p:spPr>
+        <p:txBody>
+          <a:bodyPr/>
+          <a:p/>
+        </p:txBody>
       </p:sp>
       <p:sp>
         <p:nvSpPr>
@@ -4703,6 +7401,10 @@
             <a:prstDash val="solid"/>
           </a:ln>
         </p:spPr>
+        <p:txBody>
+          <a:bodyPr/>
+          <a:p/>
+        </p:txBody>
       </p:sp>
       <p:sp>
         <p:nvSpPr>
@@ -4728,6 +7430,10 @@
             <a:prstDash val="solid"/>
           </a:ln>
         </p:spPr>
+        <p:txBody>
+          <a:bodyPr/>
+          <a:p/>
+        </p:txBody>
       </p:sp>
       <p:sp>
         <p:nvSpPr>
@@ -4955,6 +7661,10 @@
             <a:prstDash val="solid"/>
           </a:ln>
         </p:spPr>
+        <p:txBody>
+          <a:bodyPr/>
+          <a:p/>
+        </p:txBody>
       </p:sp>
       <p:sp>
         <p:nvSpPr>
@@ -4980,6 +7690,10 @@
             <a:prstDash val="solid"/>
           </a:ln>
         </p:spPr>
+        <p:txBody>
+          <a:bodyPr/>
+          <a:p/>
+        </p:txBody>
       </p:sp>
       <p:sp>
         <p:nvSpPr>
@@ -5207,6 +7921,10 @@
             <a:prstDash val="solid"/>
           </a:ln>
         </p:spPr>
+        <p:txBody>
+          <a:bodyPr/>
+          <a:p/>
+        </p:txBody>
       </p:sp>
       <p:sp>
         <p:nvSpPr>
@@ -5308,7 +8026,433 @@
 </p:sld>
 </file>
 
-<file path=ppt/slides/slide4.xml><?xml version="1.0" encoding="utf-8"?>
+<file path=ppt/slides/slide5.xml><?xml version="1.0" encoding="utf-8"?>
+<p:sld xmlns:a="http://schemas.openxmlformats.org/drawingml/2006/main" xmlns:p="http://schemas.openxmlformats.org/presentationml/2006/main" xmlns:r="http://schemas.openxmlformats.org/officeDocument/2006/relationships">
+  <p:cSld>
+    <p:bg>
+      <p:bgPr>
+        <a:solidFill>
+          <a:srgbClr val="FFFFFF"/>
+        </a:solidFill>
+        <a:effectLst/>
+      </p:bgPr>
+    </p:bg>
+    <p:spTree>
+      <p:nvGrpSpPr>
+        <p:cNvPr id="1" name=""/>
+        <p:cNvGrpSpPr/>
+        <p:nvPr/>
+      </p:nvGrpSpPr>
+      <p:grpSpPr/>
+      <p:sp>
+        <p:nvSpPr>
+          <p:cNvPr id="2" name="TextBox 1"/>
+          <p:cNvSpPr txBox="1"/>
+          <p:nvPr/>
+        </p:nvSpPr>
+        <p:spPr>
+          <a:xfrm>
+            <a:off x="457200" y="320040"/>
+            <a:ext cx="8229600" cy="548640"/>
+          </a:xfrm>
+          <a:prstGeom prst="rect">
+            <a:avLst/>
+          </a:prstGeom>
+          <a:noFill/>
+        </p:spPr>
+        <p:txBody>
+          <a:bodyPr wrap="square" lIns="0" rIns="0" tIns="0" bIns="0">
+            <a:spAutoFit/>
+          </a:bodyPr>
+          <a:lstStyle/>
+          <a:p>
+            <a:r>
+              <a:rPr sz="2400" b="1" i="0">
+                <a:solidFill>
+                  <a:srgbClr val="1E2761"/>
+                </a:solidFill>
+              </a:rPr>
+              <a:t>あれ、なんで？  ―  Claude Code『あるある』困った経験</a:t>
+            </a:r>
+          </a:p>
+        </p:txBody>
+      </p:sp>
+      <p:sp>
+        <p:nvSpPr>
+          <p:cNvPr id="3" name="TextBox 2"/>
+          <p:cNvSpPr txBox="1"/>
+          <p:nvPr/>
+        </p:nvSpPr>
+        <p:spPr>
+          <a:xfrm>
+            <a:off x="457200" y="960000"/>
+            <a:ext cx="8229600" cy="330000"/>
+          </a:xfrm>
+          <a:prstGeom prst="rect">
+            <a:avLst/>
+          </a:prstGeom>
+          <a:noFill/>
+        </p:spPr>
+        <p:txBody>
+          <a:bodyPr wrap="square" lIns="0" rIns="0" tIns="0" bIns="0">
+            <a:spAutoFit/>
+          </a:bodyPr>
+          <a:lstStyle/>
+          <a:p>
+            <a:r>
+              <a:rPr sz="1300" b="0" i="1">
+                <a:solidFill>
+                  <a:srgbClr val="64748B"/>
+                </a:solidFill>
+              </a:rPr>
+              <a:t>LLM Observability の話に行く前に ― 誰もが経験する「見えない」問題を整理する</a:t>
+            </a:r>
+          </a:p>
+        </p:txBody>
+      </p:sp>
+      <p:sp>
+        <p:nvSpPr>
+          <p:cNvPr id="4" name="TextBox 3"/>
+          <p:cNvSpPr txBox="1"/>
+          <p:nvPr/>
+        </p:nvSpPr>
+        <p:spPr>
+          <a:xfrm>
+            <a:off x="457200" y="1500000"/>
+            <a:ext cx="4011552" cy="380000"/>
+          </a:xfrm>
+          <a:prstGeom prst="rect">
+            <a:avLst/>
+          </a:prstGeom>
+          <a:noFill/>
+        </p:spPr>
+        <p:txBody>
+          <a:bodyPr wrap="square" lIns="0" rIns="0" tIns="0" bIns="0">
+            <a:spAutoFit/>
+          </a:bodyPr>
+          <a:lstStyle/>
+          <a:p>
+            <a:r>
+              <a:rPr sz="1500" b="1" i="0">
+                <a:solidFill>
+                  <a:srgbClr val="1E2761"/>
+                </a:solidFill>
+              </a:rPr>
+              <a:t>❓ なんでこのファイルを読んだ？</a:t>
+            </a:r>
+          </a:p>
+        </p:txBody>
+      </p:sp>
+      <p:sp>
+        <p:nvSpPr>
+          <p:cNvPr id="5" name="TextBox 4"/>
+          <p:cNvSpPr txBox="1"/>
+          <p:nvPr/>
+        </p:nvSpPr>
+        <p:spPr>
+          <a:xfrm>
+            <a:off x="457200" y="1880000"/>
+            <a:ext cx="4011552" cy="920000"/>
+          </a:xfrm>
+          <a:prstGeom prst="rect">
+            <a:avLst/>
+          </a:prstGeom>
+          <a:noFill/>
+        </p:spPr>
+        <p:txBody>
+          <a:bodyPr wrap="square" lIns="0" rIns="0" tIns="0" bIns="0">
+            <a:spAutoFit/>
+          </a:bodyPr>
+          <a:lstStyle/>
+          <a:p>
+            <a:r>
+              <a:rPr sz="1200" b="0" i="0">
+                <a:solidFill>
+                  <a:srgbClr val="2D3748"/>
+                </a:solidFill>
+              </a:rPr>
+              <a:t>意図しないファイルを参照して結果が崩れた経験。
+コンテキスト汚染。</a:t>
+            </a:r>
+          </a:p>
+        </p:txBody>
+      </p:sp>
+      <p:sp>
+        <p:nvSpPr>
+          <p:cNvPr id="6" name="TextBox 5"/>
+          <p:cNvSpPr txBox="1"/>
+          <p:nvPr/>
+        </p:nvSpPr>
+        <p:spPr>
+          <a:xfrm>
+            <a:off x="4675248" y="1500000"/>
+            <a:ext cx="4011552" cy="380000"/>
+          </a:xfrm>
+          <a:prstGeom prst="rect">
+            <a:avLst/>
+          </a:prstGeom>
+          <a:noFill/>
+        </p:spPr>
+        <p:txBody>
+          <a:bodyPr wrap="square" lIns="0" rIns="0" tIns="0" bIns="0">
+            <a:spAutoFit/>
+          </a:bodyPr>
+          <a:lstStyle/>
+          <a:p>
+            <a:r>
+              <a:rPr sz="1500" b="1" i="0">
+                <a:solidFill>
+                  <a:srgbClr val="1E2761"/>
+                </a:solidFill>
+              </a:rPr>
+              <a:t>💸 なんでこんなにトークン消費？</a:t>
+            </a:r>
+          </a:p>
+        </p:txBody>
+      </p:sp>
+      <p:sp>
+        <p:nvSpPr>
+          <p:cNvPr id="7" name="TextBox 6"/>
+          <p:cNvSpPr txBox="1"/>
+          <p:nvPr/>
+        </p:nvSpPr>
+        <p:spPr>
+          <a:xfrm>
+            <a:off x="4675248" y="1880000"/>
+            <a:ext cx="4011552" cy="920000"/>
+          </a:xfrm>
+          <a:prstGeom prst="rect">
+            <a:avLst/>
+          </a:prstGeom>
+          <a:noFill/>
+        </p:spPr>
+        <p:txBody>
+          <a:bodyPr wrap="square" lIns="0" rIns="0" tIns="0" bIns="0">
+            <a:spAutoFit/>
+          </a:bodyPr>
+          <a:lstStyle/>
+          <a:p>
+            <a:r>
+              <a:rPr sz="1200" b="0" i="0">
+                <a:solidFill>
+                  <a:srgbClr val="2D3748"/>
+                </a:solidFill>
+              </a:rPr>
+              <a:t>気づいたら$5消えてた。
+どのステップで何に使ったか不明。コスト爆発。</a:t>
+            </a:r>
+          </a:p>
+        </p:txBody>
+      </p:sp>
+      <p:sp>
+        <p:nvSpPr>
+          <p:cNvPr id="8" name="TextBox 7"/>
+          <p:cNvSpPr txBox="1"/>
+          <p:nvPr/>
+        </p:nvSpPr>
+        <p:spPr>
+          <a:xfrm>
+            <a:off x="457200" y="2900000"/>
+            <a:ext cx="4011552" cy="380000"/>
+          </a:xfrm>
+          <a:prstGeom prst="rect">
+            <a:avLst/>
+          </a:prstGeom>
+          <a:noFill/>
+        </p:spPr>
+        <p:txBody>
+          <a:bodyPr wrap="square" lIns="0" rIns="0" tIns="0" bIns="0">
+            <a:spAutoFit/>
+          </a:bodyPr>
+          <a:lstStyle/>
+          <a:p>
+            <a:r>
+              <a:rPr sz="1500" b="1" i="0">
+                <a:solidFill>
+                  <a:srgbClr val="1E2761"/>
+                </a:solidFill>
+              </a:rPr>
+              <a:t>🔁 同じ修正を3回繰り返した…</a:t>
+            </a:r>
+          </a:p>
+        </p:txBody>
+      </p:sp>
+      <p:sp>
+        <p:nvSpPr>
+          <p:cNvPr id="9" name="TextBox 8"/>
+          <p:cNvSpPr txBox="1"/>
+          <p:nvPr/>
+        </p:nvSpPr>
+        <p:spPr>
+          <a:xfrm>
+            <a:off x="457200" y="3280000"/>
+            <a:ext cx="4011552" cy="920000"/>
+          </a:xfrm>
+          <a:prstGeom prst="rect">
+            <a:avLst/>
+          </a:prstGeom>
+          <a:noFill/>
+        </p:spPr>
+        <p:txBody>
+          <a:bodyPr wrap="square" lIns="0" rIns="0" tIns="0" bIns="0">
+            <a:spAutoFit/>
+          </a:bodyPr>
+          <a:lstStyle/>
+          <a:p>
+            <a:r>
+              <a:rPr sz="1200" b="0" i="0">
+                <a:solidFill>
+                  <a:srgbClr val="2D3748"/>
+                </a:solidFill>
+              </a:rPr>
+              <a:t>テスト失敗→直す→失敗→直す…。
+似た失敗のループに気づけない。</a:t>
+            </a:r>
+          </a:p>
+        </p:txBody>
+      </p:sp>
+      <p:sp>
+        <p:nvSpPr>
+          <p:cNvPr id="10" name="TextBox 9"/>
+          <p:cNvSpPr txBox="1"/>
+          <p:nvPr/>
+        </p:nvSpPr>
+        <p:spPr>
+          <a:xfrm>
+            <a:off x="4675248" y="2900000"/>
+            <a:ext cx="4011552" cy="380000"/>
+          </a:xfrm>
+          <a:prstGeom prst="rect">
+            <a:avLst/>
+          </a:prstGeom>
+          <a:noFill/>
+        </p:spPr>
+        <p:txBody>
+          <a:bodyPr wrap="square" lIns="0" rIns="0" tIns="0" bIns="0">
+            <a:spAutoFit/>
+          </a:bodyPr>
+          <a:lstStyle/>
+          <a:p>
+            <a:r>
+              <a:rPr sz="1500" b="1" i="0">
+                <a:solidFill>
+                  <a:srgbClr val="1E2761"/>
+                </a:solidFill>
+              </a:rPr>
+              <a:t>📝 前のCLAUDE.mdの指示、どこいった？</a:t>
+            </a:r>
+          </a:p>
+        </p:txBody>
+      </p:sp>
+      <p:sp>
+        <p:nvSpPr>
+          <p:cNvPr id="11" name="TextBox 10"/>
+          <p:cNvSpPr txBox="1"/>
+          <p:nvPr/>
+        </p:nvSpPr>
+        <p:spPr>
+          <a:xfrm>
+            <a:off x="4675248" y="3280000"/>
+            <a:ext cx="4011552" cy="920000"/>
+          </a:xfrm>
+          <a:prstGeom prst="rect">
+            <a:avLst/>
+          </a:prstGeom>
+          <a:noFill/>
+        </p:spPr>
+        <p:txBody>
+          <a:bodyPr wrap="square" lIns="0" rIns="0" tIns="0" bIns="0">
+            <a:spAutoFit/>
+          </a:bodyPr>
+          <a:lstStyle/>
+          <a:p>
+            <a:r>
+              <a:rPr sz="1200" b="0" i="0">
+                <a:solidFill>
+                  <a:srgbClr val="2D3748"/>
+                </a:solidFill>
+              </a:rPr>
+              <a:t>途中から指示が無視された。
+長いセッションで起きるコンテキスト溢れ。</a:t>
+            </a:r>
+          </a:p>
+        </p:txBody>
+      </p:sp>
+      <p:sp>
+        <p:nvSpPr>
+          <p:cNvPr id="12" name="TextBox 11"/>
+          <p:cNvSpPr txBox="1"/>
+          <p:nvPr/>
+        </p:nvSpPr>
+        <p:spPr>
+          <a:xfrm>
+            <a:off x="457200" y="4400000"/>
+            <a:ext cx="8229600" cy="320000"/>
+          </a:xfrm>
+          <a:prstGeom prst="rect">
+            <a:avLst/>
+          </a:prstGeom>
+          <a:noFill/>
+        </p:spPr>
+        <p:txBody>
+          <a:bodyPr wrap="square" lIns="0" rIns="0" tIns="0" bIns="0">
+            <a:spAutoFit/>
+          </a:bodyPr>
+          <a:lstStyle/>
+          <a:p>
+            <a:r>
+              <a:rPr sz="1400" b="1" i="0">
+                <a:solidFill>
+                  <a:srgbClr val="1E2761"/>
+                </a:solidFill>
+              </a:rPr>
+              <a:t>→ ターミナルのログだけでは追えない。 だから次の『LLM Observability』が要る。</a:t>
+            </a:r>
+          </a:p>
+        </p:txBody>
+      </p:sp>
+      <p:sp>
+        <p:nvSpPr>
+          <p:cNvPr id="13" name="TextBox 12"/>
+          <p:cNvSpPr txBox="1"/>
+          <p:nvPr/>
+        </p:nvSpPr>
+        <p:spPr>
+          <a:xfrm>
+            <a:off x="5486400" y="4828032"/>
+            <a:ext cx="3474720" cy="228600"/>
+          </a:xfrm>
+          <a:prstGeom prst="rect">
+            <a:avLst/>
+          </a:prstGeom>
+          <a:noFill/>
+        </p:spPr>
+        <p:txBody>
+          <a:bodyPr wrap="square" lIns="0" rIns="0" tIns="0" bIns="0">
+            <a:spAutoFit/>
+          </a:bodyPr>
+          <a:lstStyle/>
+          <a:p>
+            <a:r>
+              <a:rPr sz="1000" b="0" i="0">
+                <a:solidFill>
+                  <a:srgbClr val="64748B"/>
+                </a:solidFill>
+              </a:rPr>
+              <a:t>○ ○ ○ ○ ○ ● ○ ○ ○ ○</a:t>
+            </a:r>
+          </a:p>
+        </p:txBody>
+      </p:sp>
+    </p:spTree>
+  </p:cSld>
+  <p:clrMapOvr>
+    <a:masterClrMapping/>
+  </p:clrMapOvr>
+</p:sld>
+</file>
+
+<file path=ppt/slides/slide6.xml><?xml version="1.0" encoding="utf-8"?>
 <p:sld xmlns:a="http://schemas.openxmlformats.org/drawingml/2006/main" xmlns:r="http://schemas.openxmlformats.org/officeDocument/2006/relationships" xmlns:p="http://schemas.openxmlformats.org/presentationml/2006/main">
   <p:cSld name="Slide 4">
     <p:bg>
@@ -5395,6 +8539,10 @@
             <a:prstDash val="solid"/>
           </a:ln>
         </p:spPr>
+        <p:txBody>
+          <a:bodyPr/>
+          <a:p/>
+        </p:txBody>
       </p:sp>
       <p:sp>
         <p:nvSpPr>
@@ -5466,6 +8614,10 @@
             </a:outerShdw>
           </a:effectLst>
         </p:spPr>
+        <p:txBody>
+          <a:bodyPr/>
+          <a:p/>
+        </p:txBody>
       </p:sp>
       <p:sp>
         <p:nvSpPr>
@@ -5530,6 +8682,10 @@
             <a:prstDash val="solid"/>
           </a:ln>
         </p:spPr>
+        <p:txBody>
+          <a:bodyPr/>
+          <a:p/>
+        </p:txBody>
       </p:sp>
       <p:sp>
         <p:nvSpPr>
@@ -5640,6 +8796,10 @@
             </a:outerShdw>
           </a:effectLst>
         </p:spPr>
+        <p:txBody>
+          <a:bodyPr/>
+          <a:p/>
+        </p:txBody>
       </p:sp>
       <p:sp>
         <p:nvSpPr>
@@ -5704,6 +8864,10 @@
             <a:prstDash val="solid"/>
           </a:ln>
         </p:spPr>
+        <p:txBody>
+          <a:bodyPr/>
+          <a:p/>
+        </p:txBody>
       </p:sp>
       <p:sp>
         <p:nvSpPr>
@@ -5814,6 +8978,10 @@
             </a:outerShdw>
           </a:effectLst>
         </p:spPr>
+        <p:txBody>
+          <a:bodyPr/>
+          <a:p/>
+        </p:txBody>
       </p:sp>
       <p:sp>
         <p:nvSpPr>
@@ -5878,6 +9046,10 @@
             <a:prstDash val="solid"/>
           </a:ln>
         </p:spPr>
+        <p:txBody>
+          <a:bodyPr/>
+          <a:p/>
+        </p:txBody>
       </p:sp>
       <p:sp>
         <p:nvSpPr>
@@ -7783,6 +10955,10 @@
             <a:prstDash val="solid"/>
           </a:ln>
         </p:spPr>
+        <p:txBody>
+          <a:bodyPr/>
+          <a:p/>
+        </p:txBody>
       </p:sp>
       <p:sp>
         <p:nvSpPr>
@@ -7817,7 +10993,7 @@
                 <a:ea typeface="Meiryo" pitchFamily="34" charset="-122"/>
                 <a:cs typeface="Meiryo" pitchFamily="34" charset="-120"/>
               </a:rPr>
-              <a:t>💡 </a:t>
+              <a:t>→ 4ツールの選び方は FAQ Q2-6 / セルフホストの利点は FAQ Q1-2</a:t>
             </a:r>
             <a:pPr indent="0" marL="0">
               <a:buNone/>
@@ -7831,7 +11007,7 @@
                 <a:ea typeface="Meiryo" pitchFamily="34" charset="-122"/>
                 <a:cs typeface="Meiryo" pitchFamily="34" charset="-120"/>
               </a:rPr>
-              <a:t>この3要件を全て満たし、かつセルフホストできるのはLangfuseだけ → 次スライドで詳しく</a:t>
+              <a:t/>
             </a:r>
             <a:endParaRPr lang="en-US" sz="1100" dirty="0"/>
           </a:p>
@@ -7884,7 +11060,7 @@
 </p:sld>
 </file>
 
-<file path=ppt/slides/slide5.xml><?xml version="1.0" encoding="utf-8"?>
+<file path=ppt/slides/slide7.xml><?xml version="1.0" encoding="utf-8"?>
 <p:sld xmlns:a="http://schemas.openxmlformats.org/drawingml/2006/main" xmlns:r="http://schemas.openxmlformats.org/officeDocument/2006/relationships" xmlns:p="http://schemas.openxmlformats.org/presentationml/2006/main">
   <p:cSld name="Slide 5">
     <p:bg>
@@ -7971,6 +11147,10 @@
             <a:prstDash val="solid"/>
           </a:ln>
         </p:spPr>
+        <p:txBody>
+          <a:bodyPr/>
+          <a:p/>
+        </p:txBody>
       </p:sp>
       <p:sp>
         <p:nvSpPr>
@@ -8035,6 +11215,10 @@
             <a:prstDash val="solid"/>
           </a:ln>
         </p:spPr>
+        <p:txBody>
+          <a:bodyPr/>
+          <a:p/>
+        </p:txBody>
       </p:sp>
       <p:sp>
         <p:nvSpPr>
@@ -8060,6 +11244,10 @@
             <a:prstDash val="solid"/>
           </a:ln>
         </p:spPr>
+        <p:txBody>
+          <a:bodyPr/>
+          <a:p/>
+        </p:txBody>
       </p:sp>
       <p:pic>
         <p:nvPicPr>
@@ -8187,6 +11375,10 @@
             <a:prstDash val="solid"/>
           </a:ln>
         </p:spPr>
+        <p:txBody>
+          <a:bodyPr/>
+          <a:p/>
+        </p:txBody>
       </p:sp>
       <p:sp>
         <p:nvSpPr>
@@ -8212,6 +11404,10 @@
             <a:prstDash val="solid"/>
           </a:ln>
         </p:spPr>
+        <p:txBody>
+          <a:bodyPr/>
+          <a:p/>
+        </p:txBody>
       </p:sp>
       <p:pic>
         <p:nvPicPr>
@@ -8339,6 +11535,10 @@
             <a:prstDash val="solid"/>
           </a:ln>
         </p:spPr>
+        <p:txBody>
+          <a:bodyPr/>
+          <a:p/>
+        </p:txBody>
       </p:sp>
       <p:sp>
         <p:nvSpPr>
@@ -8364,6 +11564,10 @@
             <a:prstDash val="solid"/>
           </a:ln>
         </p:spPr>
+        <p:txBody>
+          <a:bodyPr/>
+          <a:p/>
+        </p:txBody>
       </p:sp>
       <p:pic>
         <p:nvPicPr>
@@ -8498,6 +11702,10 @@
             </a:outerShdw>
           </a:effectLst>
         </p:spPr>
+        <p:txBody>
+          <a:bodyPr/>
+          <a:p/>
+        </p:txBody>
       </p:sp>
       <p:sp>
         <p:nvSpPr>
@@ -8562,6 +11770,10 @@
             <a:prstDash val="solid"/>
           </a:ln>
         </p:spPr>
+        <p:txBody>
+          <a:bodyPr/>
+          <a:p/>
+        </p:txBody>
       </p:sp>
       <p:sp>
         <p:nvSpPr>
@@ -8672,6 +11884,10 @@
             </a:outerShdw>
           </a:effectLst>
         </p:spPr>
+        <p:txBody>
+          <a:bodyPr/>
+          <a:p/>
+        </p:txBody>
       </p:sp>
       <p:sp>
         <p:nvSpPr>
@@ -8736,6 +11952,10 @@
             <a:prstDash val="solid"/>
           </a:ln>
         </p:spPr>
+        <p:txBody>
+          <a:bodyPr/>
+          <a:p/>
+        </p:txBody>
       </p:sp>
       <p:sp>
         <p:nvSpPr>
@@ -8846,6 +12066,10 @@
             </a:outerShdw>
           </a:effectLst>
         </p:spPr>
+        <p:txBody>
+          <a:bodyPr/>
+          <a:p/>
+        </p:txBody>
       </p:sp>
       <p:sp>
         <p:nvSpPr>
@@ -8910,6 +12134,10 @@
             <a:prstDash val="solid"/>
           </a:ln>
         </p:spPr>
+        <p:txBody>
+          <a:bodyPr/>
+          <a:p/>
+        </p:txBody>
       </p:sp>
       <p:sp>
         <p:nvSpPr>
@@ -8974,6 +12202,10 @@
             <a:prstDash val="solid"/>
           </a:ln>
         </p:spPr>
+        <p:txBody>
+          <a:bodyPr/>
+          <a:p/>
+        </p:txBody>
       </p:sp>
       <p:sp>
         <p:nvSpPr>
@@ -9089,7 +12321,7 @@
 </p:sld>
 </file>
 
-<file path=ppt/slides/slide6.xml><?xml version="1.0" encoding="utf-8"?>
+<file path=ppt/slides/slide8.xml><?xml version="1.0" encoding="utf-8"?>
 <p:sld xmlns:a="http://schemas.openxmlformats.org/drawingml/2006/main" xmlns:r="http://schemas.openxmlformats.org/officeDocument/2006/relationships" xmlns:p="http://schemas.openxmlformats.org/presentationml/2006/main">
   <p:cSld name="Slide 6">
     <p:bg>
@@ -9176,6 +12408,10 @@
             <a:prstDash val="solid"/>
           </a:ln>
         </p:spPr>
+        <p:txBody>
+          <a:bodyPr/>
+          <a:p/>
+        </p:txBody>
       </p:sp>
       <p:sp>
         <p:nvSpPr>
@@ -9240,6 +12476,10 @@
             <a:prstDash val="solid"/>
           </a:ln>
         </p:spPr>
+        <p:txBody>
+          <a:bodyPr/>
+          <a:p/>
+        </p:txBody>
       </p:sp>
       <p:sp>
         <p:nvSpPr>
@@ -9446,6 +12686,10 @@
             <a:prstDash val="solid"/>
           </a:ln>
         </p:spPr>
+        <p:txBody>
+          <a:bodyPr/>
+          <a:p/>
+        </p:txBody>
       </p:sp>
       <p:sp>
         <p:nvSpPr>
@@ -9471,6 +12715,10 @@
             <a:prstDash val="solid"/>
           </a:ln>
         </p:spPr>
+        <p:txBody>
+          <a:bodyPr/>
+          <a:p/>
+        </p:txBody>
       </p:sp>
       <p:pic>
         <p:nvPicPr>
@@ -9623,6 +12871,10 @@
             <a:prstDash val="solid"/>
           </a:ln>
         </p:spPr>
+        <p:txBody>
+          <a:bodyPr/>
+          <a:p/>
+        </p:txBody>
       </p:sp>
       <p:sp>
         <p:nvSpPr>
@@ -9648,6 +12900,10 @@
             <a:prstDash val="solid"/>
           </a:ln>
         </p:spPr>
+        <p:txBody>
+          <a:bodyPr/>
+          <a:p/>
+        </p:txBody>
       </p:sp>
       <p:pic>
         <p:nvPicPr>
@@ -9800,6 +13056,10 @@
             <a:prstDash val="solid"/>
           </a:ln>
         </p:spPr>
+        <p:txBody>
+          <a:bodyPr/>
+          <a:p/>
+        </p:txBody>
       </p:sp>
       <p:sp>
         <p:nvSpPr>
@@ -9825,6 +13085,10 @@
             <a:prstDash val="solid"/>
           </a:ln>
         </p:spPr>
+        <p:txBody>
+          <a:bodyPr/>
+          <a:p/>
+        </p:txBody>
       </p:sp>
       <p:pic>
         <p:nvPicPr>
@@ -9977,6 +13241,10 @@
             <a:prstDash val="solid"/>
           </a:ln>
         </p:spPr>
+        <p:txBody>
+          <a:bodyPr/>
+          <a:p/>
+        </p:txBody>
       </p:sp>
       <p:sp>
         <p:nvSpPr>
@@ -10011,7 +13279,7 @@
                 <a:ea typeface="Meiryo" pitchFamily="34" charset="-122"/>
                 <a:cs typeface="Meiryo" pitchFamily="34" charset="-120"/>
               </a:rPr>
-              <a:t>💡 </a:t>
+              <a:t>→ トレースの送信方法は FAQ Q2-1 / オーバーヘッドは FAQ Q2-2</a:t>
             </a:r>
             <a:pPr indent="0" marL="0">
               <a:buNone/>
@@ -10025,7 +13293,7 @@
                 <a:ea typeface="Meiryo" pitchFamily="34" charset="-122"/>
                 <a:cs typeface="Meiryo" pitchFamily="34" charset="-120"/>
               </a:rPr>
-              <a:t>これが一般的なLLMトレース。</a:t>
+              <a:t/>
             </a:r>
             <a:pPr indent="0" marL="0">
               <a:buNone/>
@@ -10039,7 +13307,7 @@
                 <a:ea typeface="Meiryo" pitchFamily="34" charset="-122"/>
                 <a:cs typeface="Meiryo" pitchFamily="34" charset="-120"/>
               </a:rPr>
-              <a:t>次のスライドでClaude Codeに適用するとどうなるかを見る</a:t>
+              <a:t/>
             </a:r>
             <a:endParaRPr lang="en-US" sz="1100" dirty="0"/>
           </a:p>
@@ -10092,7 +13360,7 @@
 </p:sld>
 </file>
 
-<file path=ppt/slides/slide7.xml><?xml version="1.0" encoding="utf-8"?>
+<file path=ppt/slides/slide9.xml><?xml version="1.0" encoding="utf-8"?>
 <p:sld xmlns:a="http://schemas.openxmlformats.org/drawingml/2006/main" xmlns:r="http://schemas.openxmlformats.org/officeDocument/2006/relationships" xmlns:p="http://schemas.openxmlformats.org/presentationml/2006/main">
   <p:cSld name="Slide 7">
     <p:bg>
@@ -10100,6 +13368,7 @@
         <a:solidFill>
           <a:srgbClr val="FFFFFF"/>
         </a:solidFill>
+        <a:effectLst/>
       </p:bgPr>
     </p:bg>
     <p:spTree>
@@ -10118,8 +13387,8 @@
       </p:grpSpPr>
       <p:sp>
         <p:nvSpPr>
-          <p:cNvPr id="2" name="Text 0"/>
-          <p:cNvSpPr/>
+          <p:cNvPr id="2" name="TextBox 1"/>
+          <p:cNvSpPr txBox="1"/>
           <p:nvPr/>
         </p:nvSpPr>
         <p:spPr>
@@ -10131,801 +13400,328 @@
             <a:avLst/>
           </a:prstGeom>
           <a:noFill/>
-          <a:ln/>
-        </p:spPr>
-        <p:txBody>
-          <a:bodyPr wrap="square" lIns="0" tIns="0" rIns="0" bIns="0" rtlCol="0" anchor="ctr"/>
-          <a:lstStyle/>
-          <a:p>
-            <a:pPr indent="0" marL="0">
-              <a:buNone/>
-            </a:pPr>
-            <a:r>
-              <a:rPr lang="en-US" sz="2600" b="1" dirty="0">
+        </p:spPr>
+        <p:txBody>
+          <a:bodyPr wrap="square" lIns="0" rIns="0" tIns="0" bIns="0">
+            <a:spAutoFit/>
+          </a:bodyPr>
+          <a:lstStyle/>
+          <a:p>
+            <a:r>
+              <a:rPr sz="2600" b="1" i="0">
                 <a:solidFill>
                   <a:srgbClr val="1E2761"/>
                 </a:solidFill>
-                <a:latin typeface="Arial Black" pitchFamily="34" charset="0"/>
-                <a:ea typeface="Arial Black" pitchFamily="34" charset="-122"/>
-                <a:cs typeface="Arial Black" pitchFamily="34" charset="-120"/>
               </a:rPr>
               <a:t>Claude Code のトレースを取る</a:t>
             </a:r>
-            <a:endParaRPr lang="en-US" sz="2600" dirty="0"/>
-          </a:p>
-        </p:txBody>
-      </p:sp>
-      <p:sp>
-        <p:nvSpPr>
-          <p:cNvPr id="3" name="Shape 1"/>
-          <p:cNvSpPr/>
-          <p:nvPr/>
-        </p:nvSpPr>
-        <p:spPr>
-          <a:xfrm>
-            <a:off x="457200" y="932688"/>
-            <a:ext cx="548640" cy="45720"/>
-          </a:xfrm>
-          <a:prstGeom prst="rect">
-            <a:avLst/>
-          </a:prstGeom>
-          <a:solidFill>
-            <a:srgbClr val="F96167"/>
-          </a:solidFill>
-          <a:ln w="12700">
-            <a:solidFill>
-              <a:srgbClr val="F96167"/>
-            </a:solidFill>
-            <a:prstDash val="solid"/>
-          </a:ln>
-        </p:spPr>
-      </p:sp>
-      <p:sp>
-        <p:nvSpPr>
-          <p:cNvPr id="4" name="Text 2"/>
-          <p:cNvSpPr/>
-          <p:nvPr/>
-        </p:nvSpPr>
-        <p:spPr>
-          <a:xfrm>
-            <a:off x="457200" y="1051560"/>
-            <a:ext cx="8229600" cy="274320"/>
-          </a:xfrm>
-          <a:prstGeom prst="rect">
-            <a:avLst/>
-          </a:prstGeom>
-          <a:noFill/>
-          <a:ln/>
-        </p:spPr>
-        <p:txBody>
-          <a:bodyPr wrap="square" lIns="0" tIns="0" rIns="0" bIns="0" rtlCol="0" anchor="ctr"/>
-          <a:lstStyle/>
-          <a:p>
-            <a:pPr indent="0" marL="0">
-              <a:buNone/>
-            </a:pPr>
-            <a:r>
-              <a:rPr lang="en-US" sz="1300" i="1" dirty="0">
+          </a:p>
+        </p:txBody>
+      </p:sp>
+      <p:sp>
+        <p:nvSpPr>
+          <p:cNvPr id="3" name="TextBox 2"/>
+          <p:cNvSpPr txBox="1"/>
+          <p:nvPr/>
+        </p:nvSpPr>
+        <p:spPr>
+          <a:xfrm>
+            <a:off x="457200" y="960000"/>
+            <a:ext cx="8229600" cy="330000"/>
+          </a:xfrm>
+          <a:prstGeom prst="rect">
+            <a:avLst/>
+          </a:prstGeom>
+          <a:noFill/>
+        </p:spPr>
+        <p:txBody>
+          <a:bodyPr wrap="square" lIns="0" rIns="0" tIns="0" bIns="0">
+            <a:spAutoFit/>
+          </a:bodyPr>
+          <a:lstStyle/>
+          <a:p>
+            <a:r>
+              <a:rPr sz="1300" b="0" i="1">
                 <a:solidFill>
                   <a:srgbClr val="64748B"/>
                 </a:solidFill>
-                <a:latin typeface="Meiryo" pitchFamily="34" charset="0"/>
-                <a:ea typeface="Meiryo" pitchFamily="34" charset="-122"/>
-                <a:cs typeface="Meiryo" pitchFamily="34" charset="-120"/>
-              </a:rPr>
-              <a:t>「コードを書くエージェント」の振る舞いこそ、可視化しないと改善できない</a:t>
-            </a:r>
-            <a:endParaRPr lang="en-US" sz="1300" dirty="0"/>
-          </a:p>
-        </p:txBody>
-      </p:sp>
-      <p:sp>
-        <p:nvSpPr>
-          <p:cNvPr id="5" name="Shape 3"/>
-          <p:cNvSpPr/>
-          <p:nvPr/>
-        </p:nvSpPr>
-        <p:spPr>
-          <a:xfrm>
-            <a:off x="457200" y="1417320"/>
-            <a:ext cx="4114800" cy="1463040"/>
-          </a:xfrm>
-          <a:prstGeom prst="rect">
-            <a:avLst/>
-          </a:prstGeom>
-          <a:solidFill>
-            <a:srgbClr val="FDECEC"/>
-          </a:solidFill>
-          <a:ln w="12700">
-            <a:solidFill>
-              <a:srgbClr val="F96167"/>
-            </a:solidFill>
-            <a:prstDash val="solid"/>
-          </a:ln>
-        </p:spPr>
-      </p:sp>
-      <p:sp>
-        <p:nvSpPr>
-          <p:cNvPr id="6" name="Shape 4"/>
-          <p:cNvSpPr/>
-          <p:nvPr/>
-        </p:nvSpPr>
-        <p:spPr>
-          <a:xfrm>
-            <a:off x="457200" y="1417320"/>
-            <a:ext cx="4114800" cy="64008"/>
-          </a:xfrm>
-          <a:prstGeom prst="rect">
-            <a:avLst/>
-          </a:prstGeom>
-          <a:solidFill>
-            <a:srgbClr val="F96167"/>
-          </a:solidFill>
-          <a:ln w="12700">
-            <a:solidFill>
-              <a:srgbClr val="F96167"/>
-            </a:solidFill>
-            <a:prstDash val="solid"/>
-          </a:ln>
-        </p:spPr>
-      </p:sp>
-      <p:sp>
-        <p:nvSpPr>
-          <p:cNvPr id="7" name="Text 5"/>
-          <p:cNvSpPr/>
-          <p:nvPr/>
-        </p:nvSpPr>
-        <p:spPr>
-          <a:xfrm>
-            <a:off x="594360" y="1554480"/>
-            <a:ext cx="3840480" cy="228600"/>
-          </a:xfrm>
-          <a:prstGeom prst="rect">
-            <a:avLst/>
-          </a:prstGeom>
-          <a:noFill/>
-          <a:ln/>
-        </p:spPr>
-        <p:txBody>
-          <a:bodyPr wrap="square" lIns="0" tIns="0" rIns="0" bIns="0" rtlCol="0" anchor="ctr"/>
-          <a:lstStyle/>
-          <a:p>
-            <a:pPr indent="0" marL="0">
-              <a:buNone/>
-            </a:pPr>
-            <a:r>
-              <a:rPr lang="en-US" sz="1200" b="1" dirty="0">
-                <a:solidFill>
-                  <a:srgbClr val="F96167"/>
-                </a:solidFill>
-                <a:latin typeface="Meiryo" pitchFamily="34" charset="0"/>
-                <a:ea typeface="Meiryo" pitchFamily="34" charset="-122"/>
-                <a:cs typeface="Meiryo" pitchFamily="34" charset="-120"/>
-              </a:rPr>
-              <a:t>Claude Code特有の課題</a:t>
-            </a:r>
-            <a:endParaRPr lang="en-US" sz="1200" dirty="0"/>
-          </a:p>
-        </p:txBody>
-      </p:sp>
-      <p:sp>
-        <p:nvSpPr>
-          <p:cNvPr id="8" name="Text 6"/>
-          <p:cNvSpPr/>
-          <p:nvPr/>
-        </p:nvSpPr>
-        <p:spPr>
-          <a:xfrm>
-            <a:off x="594360" y="1828800"/>
-            <a:ext cx="3840480" cy="960120"/>
-          </a:xfrm>
-          <a:prstGeom prst="rect">
-            <a:avLst/>
-          </a:prstGeom>
-          <a:noFill/>
-          <a:ln/>
-        </p:spPr>
-        <p:txBody>
-          <a:bodyPr wrap="square" lIns="0" tIns="0" rIns="0" bIns="0" rtlCol="0" anchor="ctr"/>
-          <a:lstStyle/>
-          <a:p>
-            <a:pPr marL="342900" indent="-342900">
-              <a:spcAft>
-                <a:spcPts val="100"/>
-              </a:spcAft>
-              <a:buSzPct val="100000"/>
-              <a:buChar char="•"/>
-            </a:pPr>
-            <a:r>
-              <a:rPr lang="en-US" sz="900" dirty="0">
+              </a:rPr>
+              <a:t>ターミナルログだけでは追えない『見えない』3つの問題</a:t>
+            </a:r>
+          </a:p>
+        </p:txBody>
+      </p:sp>
+      <p:sp>
+        <p:nvSpPr>
+          <p:cNvPr id="4" name="TextBox 3"/>
+          <p:cNvSpPr txBox="1"/>
+          <p:nvPr/>
+        </p:nvSpPr>
+        <p:spPr>
+          <a:xfrm>
+            <a:off x="422000" y="1450000"/>
+            <a:ext cx="2700000" cy="380000"/>
+          </a:xfrm>
+          <a:prstGeom prst="rect">
+            <a:avLst/>
+          </a:prstGeom>
+          <a:noFill/>
+        </p:spPr>
+        <p:txBody>
+          <a:bodyPr wrap="square" lIns="0" rIns="0" tIns="0" bIns="0">
+            <a:spAutoFit/>
+          </a:bodyPr>
+          <a:lstStyle/>
+          <a:p>
+            <a:r>
+              <a:rPr sz="1600" b="1" i="0">
+                <a:solidFill>
+                  <a:srgbClr val="1E2761"/>
+                </a:solidFill>
+              </a:rPr>
+              <a:t>🌀  無限ループ</a:t>
+            </a:r>
+          </a:p>
+        </p:txBody>
+      </p:sp>
+      <p:sp>
+        <p:nvSpPr>
+          <p:cNvPr id="5" name="TextBox 4"/>
+          <p:cNvSpPr txBox="1"/>
+          <p:nvPr/>
+        </p:nvSpPr>
+        <p:spPr>
+          <a:xfrm>
+            <a:off x="422000" y="1850000"/>
+            <a:ext cx="2700000" cy="1500000"/>
+          </a:xfrm>
+          <a:prstGeom prst="rect">
+            <a:avLst/>
+          </a:prstGeom>
+          <a:noFill/>
+        </p:spPr>
+        <p:txBody>
+          <a:bodyPr wrap="square" lIns="0" rIns="0" tIns="0" bIns="0">
+            <a:spAutoFit/>
+          </a:bodyPr>
+          <a:lstStyle/>
+          <a:p>
+            <a:r>
+              <a:rPr sz="1200" b="0" i="0">
                 <a:solidFill>
                   <a:srgbClr val="2D3748"/>
                 </a:solidFill>
-                <a:latin typeface="Meiryo" pitchFamily="34" charset="0"/>
-                <a:ea typeface="Meiryo" pitchFamily="34" charset="-122"/>
-                <a:cs typeface="Meiryo" pitchFamily="34" charset="-120"/>
-              </a:rPr>
-              <a:t>ターミナルログだけではどのステップで判断を間違えたか不明</a:t>
-            </a:r>
-            <a:endParaRPr lang="en-US" sz="900" dirty="0"/>
-          </a:p>
-          <a:p>
-            <a:pPr marL="342900" indent="-342900">
-              <a:spcAft>
-                <a:spcPts val="100"/>
-              </a:spcAft>
-              <a:buSzPct val="100000"/>
-              <a:buChar char="•"/>
-            </a:pPr>
-            <a:r>
-              <a:rPr lang="en-US" sz="900" dirty="0">
+              </a:rPr>
+              <a:t>生成 → テスト失敗 → 修正 → テスト失敗 …
+似た失敗を繰り返してることに気づけない。</a:t>
+            </a:r>
+          </a:p>
+        </p:txBody>
+      </p:sp>
+      <p:sp>
+        <p:nvSpPr>
+          <p:cNvPr id="6" name="TextBox 5"/>
+          <p:cNvSpPr txBox="1"/>
+          <p:nvPr/>
+        </p:nvSpPr>
+        <p:spPr>
+          <a:xfrm>
+            <a:off x="3222000" y="1450000"/>
+            <a:ext cx="2700000" cy="380000"/>
+          </a:xfrm>
+          <a:prstGeom prst="rect">
+            <a:avLst/>
+          </a:prstGeom>
+          <a:noFill/>
+        </p:spPr>
+        <p:txBody>
+          <a:bodyPr wrap="square" lIns="0" rIns="0" tIns="0" bIns="0">
+            <a:spAutoFit/>
+          </a:bodyPr>
+          <a:lstStyle/>
+          <a:p>
+            <a:r>
+              <a:rPr sz="1600" b="1" i="0">
+                <a:solidFill>
+                  <a:srgbClr val="1E2761"/>
+                </a:solidFill>
+              </a:rPr>
+              <a:t>💰  コスト爆発</a:t>
+            </a:r>
+          </a:p>
+        </p:txBody>
+      </p:sp>
+      <p:sp>
+        <p:nvSpPr>
+          <p:cNvPr id="7" name="TextBox 6"/>
+          <p:cNvSpPr txBox="1"/>
+          <p:nvPr/>
+        </p:nvSpPr>
+        <p:spPr>
+          <a:xfrm>
+            <a:off x="3222000" y="1850000"/>
+            <a:ext cx="2700000" cy="1500000"/>
+          </a:xfrm>
+          <a:prstGeom prst="rect">
+            <a:avLst/>
+          </a:prstGeom>
+          <a:noFill/>
+        </p:spPr>
+        <p:txBody>
+          <a:bodyPr wrap="square" lIns="0" rIns="0" tIns="0" bIns="0">
+            <a:spAutoFit/>
+          </a:bodyPr>
+          <a:lstStyle/>
+          <a:p>
+            <a:r>
+              <a:rPr sz="1200" b="0" i="0">
                 <a:solidFill>
                   <a:srgbClr val="2D3748"/>
                 </a:solidFill>
-                <a:latin typeface="Meiryo" pitchFamily="34" charset="0"/>
-                <a:ea typeface="Meiryo" pitchFamily="34" charset="-122"/>
-                <a:cs typeface="Meiryo" pitchFamily="34" charset="-120"/>
-              </a:rPr>
-              <a:t>間違ったファイルを読んで前提を誤った（コンテキスト汚染）</a:t>
-            </a:r>
-            <a:endParaRPr lang="en-US" sz="900" dirty="0"/>
-          </a:p>
-          <a:p>
-            <a:pPr marL="342900" indent="-342900">
-              <a:spcAft>
-                <a:spcPts val="100"/>
-              </a:spcAft>
-              <a:buSzPct val="100000"/>
-              <a:buChar char="•"/>
-            </a:pPr>
-            <a:r>
-              <a:rPr lang="en-US" sz="900" dirty="0">
+              </a:rPr>
+              <a:t>気づいたら$5消えてた。
+どのステップで何に使ったかが追えない。</a:t>
+            </a:r>
+          </a:p>
+        </p:txBody>
+      </p:sp>
+      <p:sp>
+        <p:nvSpPr>
+          <p:cNvPr id="8" name="TextBox 7"/>
+          <p:cNvSpPr txBox="1"/>
+          <p:nvPr/>
+        </p:nvSpPr>
+        <p:spPr>
+          <a:xfrm>
+            <a:off x="6022000" y="1450000"/>
+            <a:ext cx="2700000" cy="380000"/>
+          </a:xfrm>
+          <a:prstGeom prst="rect">
+            <a:avLst/>
+          </a:prstGeom>
+          <a:noFill/>
+        </p:spPr>
+        <p:txBody>
+          <a:bodyPr wrap="square" lIns="0" rIns="0" tIns="0" bIns="0">
+            <a:spAutoFit/>
+          </a:bodyPr>
+          <a:lstStyle/>
+          <a:p>
+            <a:r>
+              <a:rPr sz="1600" b="1" i="0">
+                <a:solidFill>
+                  <a:srgbClr val="1E2761"/>
+                </a:solidFill>
+              </a:rPr>
+              <a:t>🧹  コンテキスト汚染</a:t>
+            </a:r>
+          </a:p>
+        </p:txBody>
+      </p:sp>
+      <p:sp>
+        <p:nvSpPr>
+          <p:cNvPr id="9" name="TextBox 8"/>
+          <p:cNvSpPr txBox="1"/>
+          <p:nvPr/>
+        </p:nvSpPr>
+        <p:spPr>
+          <a:xfrm>
+            <a:off x="6022000" y="1850000"/>
+            <a:ext cx="2700000" cy="1500000"/>
+          </a:xfrm>
+          <a:prstGeom prst="rect">
+            <a:avLst/>
+          </a:prstGeom>
+          <a:noFill/>
+        </p:spPr>
+        <p:txBody>
+          <a:bodyPr wrap="square" lIns="0" rIns="0" tIns="0" bIns="0">
+            <a:spAutoFit/>
+          </a:bodyPr>
+          <a:lstStyle/>
+          <a:p>
+            <a:r>
+              <a:rPr sz="1200" b="0" i="0">
                 <a:solidFill>
                   <a:srgbClr val="2D3748"/>
                 </a:solidFill>
-                <a:latin typeface="Meiryo" pitchFamily="34" charset="0"/>
-                <a:ea typeface="Meiryo" pitchFamily="34" charset="-122"/>
-                <a:cs typeface="Meiryo" pitchFamily="34" charset="-120"/>
-              </a:rPr>
-              <a:t>不要なツールを呼んでトークンを浪費（コスト爆発）</a:t>
-            </a:r>
-            <a:endParaRPr lang="en-US" sz="900" dirty="0"/>
-          </a:p>
-          <a:p>
-            <a:pPr marL="342900" indent="-342900">
-              <a:spcAft>
-                <a:spcPts val="100"/>
-              </a:spcAft>
-              <a:buSzPct val="100000"/>
-              <a:buChar char="•"/>
-            </a:pPr>
-            <a:r>
-              <a:rPr lang="en-US" sz="900" dirty="0">
-                <a:solidFill>
-                  <a:srgbClr val="2D3748"/>
-                </a:solidFill>
-                <a:latin typeface="Meiryo" pitchFamily="34" charset="0"/>
-                <a:ea typeface="Meiryo" pitchFamily="34" charset="-122"/>
-                <a:cs typeface="Meiryo" pitchFamily="34" charset="-120"/>
-              </a:rPr>
-              <a:t>生成→テスト→修正のループが無限に回った（無限ループ）</a:t>
-            </a:r>
-            <a:endParaRPr lang="en-US" sz="900" dirty="0"/>
-          </a:p>
-          <a:p>
-            <a:pPr marL="342900" indent="-342900">
-              <a:spcAft>
-                <a:spcPts val="100"/>
-              </a:spcAft>
-              <a:buSzPct val="100000"/>
-              <a:buChar char="•"/>
-            </a:pPr>
-            <a:r>
-              <a:rPr lang="en-US" sz="900" dirty="0">
-                <a:solidFill>
-                  <a:srgbClr val="2D3748"/>
-                </a:solidFill>
-                <a:latin typeface="Meiryo" pitchFamily="34" charset="0"/>
-                <a:ea typeface="Meiryo" pitchFamily="34" charset="-122"/>
-                <a:cs typeface="Meiryo" pitchFamily="34" charset="-120"/>
-              </a:rPr>
-              <a:t>CLAUDE.mdの指示を途中で忘れた（コンテキスト溢れ）</a:t>
-            </a:r>
-            <a:endParaRPr lang="en-US" sz="900" dirty="0"/>
-          </a:p>
-        </p:txBody>
-      </p:sp>
-      <p:sp>
-        <p:nvSpPr>
-          <p:cNvPr id="9" name="Shape 7"/>
-          <p:cNvSpPr/>
-          <p:nvPr/>
-        </p:nvSpPr>
-        <p:spPr>
-          <a:xfrm>
-            <a:off x="4754880" y="1417320"/>
-            <a:ext cx="3931920" cy="1463040"/>
-          </a:xfrm>
-          <a:prstGeom prst="rect">
-            <a:avLst/>
-          </a:prstGeom>
-          <a:solidFill>
-            <a:srgbClr val="F8F9FC"/>
-          </a:solidFill>
-          <a:ln w="9525">
-            <a:solidFill>
-              <a:srgbClr val="E5E9F2"/>
-            </a:solidFill>
-            <a:prstDash val="solid"/>
-          </a:ln>
-          <a:effectLst>
-            <a:outerShdw sx="100000" sy="100000" kx="0" ky="0" algn="bl" rotWithShape="0" blurRad="50800" dist="12700" dir="8100000">
-              <a:srgbClr val="000000">
-                <a:alpha val="10000"/>
-              </a:srgbClr>
-            </a:outerShdw>
-          </a:effectLst>
-        </p:spPr>
-      </p:sp>
-      <p:sp>
-        <p:nvSpPr>
-          <p:cNvPr id="10" name="Shape 8"/>
-          <p:cNvSpPr/>
-          <p:nvPr/>
-        </p:nvSpPr>
-        <p:spPr>
-          <a:xfrm>
-            <a:off x="4754880" y="1417320"/>
-            <a:ext cx="3931920" cy="64008"/>
-          </a:xfrm>
-          <a:prstGeom prst="rect">
-            <a:avLst/>
-          </a:prstGeom>
-          <a:solidFill>
-            <a:srgbClr val="1E2761"/>
-          </a:solidFill>
-          <a:ln w="12700">
-            <a:solidFill>
-              <a:srgbClr val="1E2761"/>
-            </a:solidFill>
-            <a:prstDash val="solid"/>
-          </a:ln>
-        </p:spPr>
-      </p:sp>
-      <p:sp>
-        <p:nvSpPr>
-          <p:cNvPr id="11" name="Text 9"/>
-          <p:cNvSpPr/>
-          <p:nvPr/>
-        </p:nvSpPr>
-        <p:spPr>
-          <a:xfrm>
-            <a:off x="4892040" y="1554480"/>
-            <a:ext cx="3657600" cy="228600"/>
-          </a:xfrm>
-          <a:prstGeom prst="rect">
-            <a:avLst/>
-          </a:prstGeom>
-          <a:noFill/>
-          <a:ln/>
-        </p:spPr>
-        <p:txBody>
-          <a:bodyPr wrap="square" lIns="0" tIns="0" rIns="0" bIns="0" rtlCol="0" anchor="ctr"/>
-          <a:lstStyle/>
-          <a:p>
-            <a:pPr indent="0" marL="0">
-              <a:buNone/>
-            </a:pPr>
-            <a:r>
-              <a:rPr lang="en-US" sz="1200" b="1" dirty="0">
+              </a:rPr>
+              <a:t>間違ったファイルを読んで前提を誤った。
+CLAUDE.md の指示も途中で忘れがち。</a:t>
+            </a:r>
+          </a:p>
+        </p:txBody>
+      </p:sp>
+      <p:sp>
+        <p:nvSpPr>
+          <p:cNvPr id="10" name="TextBox 9"/>
+          <p:cNvSpPr txBox="1"/>
+          <p:nvPr/>
+        </p:nvSpPr>
+        <p:spPr>
+          <a:xfrm>
+            <a:off x="457200" y="3500000"/>
+            <a:ext cx="8229600" cy="380000"/>
+          </a:xfrm>
+          <a:prstGeom prst="rect">
+            <a:avLst/>
+          </a:prstGeom>
+          <a:noFill/>
+        </p:spPr>
+        <p:txBody>
+          <a:bodyPr wrap="square" lIns="0" rIns="0" tIns="0" bIns="0">
+            <a:spAutoFit/>
+          </a:bodyPr>
+          <a:lstStyle/>
+          <a:p>
+            <a:r>
+              <a:rPr sz="1400" b="1" i="0">
                 <a:solidFill>
                   <a:srgbClr val="1E2761"/>
                 </a:solidFill>
-                <a:latin typeface="Meiryo" pitchFamily="34" charset="0"/>
-                <a:ea typeface="Meiryo" pitchFamily="34" charset="-122"/>
-                <a:cs typeface="Meiryo" pitchFamily="34" charset="-120"/>
-              </a:rPr>
-              <a:t>Langfuseで解決できること</a:t>
-            </a:r>
-            <a:endParaRPr lang="en-US" sz="1200" dirty="0"/>
-          </a:p>
-        </p:txBody>
-      </p:sp>
-      <p:sp>
-        <p:nvSpPr>
-          <p:cNvPr id="12" name="Text 10"/>
-          <p:cNvSpPr/>
-          <p:nvPr/>
-        </p:nvSpPr>
-        <p:spPr>
-          <a:xfrm>
-            <a:off x="4892040" y="1828800"/>
-            <a:ext cx="3657600" cy="960120"/>
-          </a:xfrm>
-          <a:prstGeom prst="rect">
-            <a:avLst/>
-          </a:prstGeom>
-          <a:noFill/>
-          <a:ln/>
-        </p:spPr>
-        <p:txBody>
-          <a:bodyPr wrap="square" lIns="0" tIns="0" rIns="0" bIns="0" rtlCol="0" anchor="ctr"/>
-          <a:lstStyle/>
-          <a:p>
-            <a:pPr marL="342900" indent="-342900">
-              <a:spcAft>
-                <a:spcPts val="100"/>
-              </a:spcAft>
-              <a:buSzPct val="100000"/>
-              <a:buChar char="•"/>
-            </a:pPr>
-            <a:r>
-              <a:rPr lang="en-US" sz="900" dirty="0">
-                <a:solidFill>
-                  <a:srgbClr val="2D3748"/>
-                </a:solidFill>
-                <a:latin typeface="Meiryo" pitchFamily="34" charset="0"/>
-                <a:ea typeface="Meiryo" pitchFamily="34" charset="-122"/>
-                <a:cs typeface="Meiryo" pitchFamily="34" charset="-120"/>
-              </a:rPr>
-              <a:t>全ステップの入力・出力・トークン数・コスト・レイテンシを自動記録</a:t>
-            </a:r>
-            <a:endParaRPr lang="en-US" sz="900" dirty="0"/>
-          </a:p>
-          <a:p>
-            <a:pPr marL="342900" indent="-342900">
-              <a:spcAft>
-                <a:spcPts val="100"/>
-              </a:spcAft>
-              <a:buSzPct val="100000"/>
-              <a:buChar char="•"/>
-            </a:pPr>
-            <a:r>
-              <a:rPr lang="en-US" sz="900" dirty="0">
-                <a:solidFill>
-                  <a:srgbClr val="2D3748"/>
-                </a:solidFill>
-                <a:latin typeface="Meiryo" pitchFamily="34" charset="0"/>
-                <a:ea typeface="Meiryo" pitchFamily="34" charset="-122"/>
-                <a:cs typeface="Meiryo" pitchFamily="34" charset="-120"/>
-              </a:rPr>
-              <a:t>どのファイルを読み、どのコマンドを実行したかの履歴</a:t>
-            </a:r>
-            <a:endParaRPr lang="en-US" sz="900" dirty="0"/>
-          </a:p>
-          <a:p>
-            <a:pPr marL="342900" indent="-342900">
-              <a:spcAft>
-                <a:spcPts val="100"/>
-              </a:spcAft>
-              <a:buSzPct val="100000"/>
-              <a:buChar char="•"/>
-            </a:pPr>
-            <a:r>
-              <a:rPr lang="en-US" sz="900" dirty="0">
-                <a:solidFill>
-                  <a:srgbClr val="2D3748"/>
-                </a:solidFill>
-                <a:latin typeface="Meiryo" pitchFamily="34" charset="0"/>
-                <a:ea typeface="Meiryo" pitchFamily="34" charset="-122"/>
-                <a:cs typeface="Meiryo" pitchFamily="34" charset="-120"/>
-              </a:rPr>
-              <a:t>セッション単位の累計コスト把握</a:t>
-            </a:r>
-            <a:endParaRPr lang="en-US" sz="900" dirty="0"/>
-          </a:p>
-          <a:p>
-            <a:pPr marL="342900" indent="-342900">
-              <a:spcAft>
-                <a:spcPts val="100"/>
-              </a:spcAft>
-              <a:buSzPct val="100000"/>
-              <a:buChar char="•"/>
-            </a:pPr>
-            <a:r>
-              <a:rPr lang="en-US" sz="900" dirty="0">
-                <a:solidFill>
-                  <a:srgbClr val="2D3748"/>
-                </a:solidFill>
-                <a:latin typeface="Meiryo" pitchFamily="34" charset="0"/>
-                <a:ea typeface="Meiryo" pitchFamily="34" charset="-122"/>
-                <a:cs typeface="Meiryo" pitchFamily="34" charset="-120"/>
-              </a:rPr>
-              <a:t>第3回のHooksでブロックしたコマンドもトレースに残る</a:t>
-            </a:r>
-            <a:endParaRPr lang="en-US" sz="900" dirty="0"/>
-          </a:p>
-          <a:p>
-            <a:pPr marL="342900" indent="-342900">
-              <a:spcAft>
-                <a:spcPts val="100"/>
-              </a:spcAft>
-              <a:buSzPct val="100000"/>
-              <a:buChar char="•"/>
-            </a:pPr>
-            <a:r>
-              <a:rPr lang="en-US" sz="900" b="1" dirty="0">
-                <a:solidFill>
-                  <a:srgbClr val="2D3748"/>
-                </a:solidFill>
-                <a:latin typeface="Meiryo" pitchFamily="34" charset="0"/>
-                <a:ea typeface="Meiryo" pitchFamily="34" charset="-122"/>
-                <a:cs typeface="Meiryo" pitchFamily="34" charset="-120"/>
-              </a:rPr>
-              <a:t>「防ぐ（Hooks）」と「残す（Trace）」が連動</a:t>
-            </a:r>
-            <a:endParaRPr lang="en-US" sz="900" dirty="0"/>
-          </a:p>
-        </p:txBody>
-      </p:sp>
-      <p:sp>
-        <p:nvSpPr>
-          <p:cNvPr id="13" name="Shape 11"/>
-          <p:cNvSpPr/>
-          <p:nvPr/>
-        </p:nvSpPr>
-        <p:spPr>
-          <a:xfrm>
-            <a:off x="457200" y="3017520"/>
-            <a:ext cx="8229600" cy="1371600"/>
-          </a:xfrm>
-          <a:prstGeom prst="rect">
-            <a:avLst/>
-          </a:prstGeom>
-          <a:solidFill>
-            <a:srgbClr val="0F1434"/>
-          </a:solidFill>
-          <a:ln w="9525">
-            <a:solidFill>
-              <a:srgbClr val="2A2F5A"/>
-            </a:solidFill>
-            <a:prstDash val="solid"/>
-          </a:ln>
-        </p:spPr>
-      </p:sp>
-      <p:sp>
-        <p:nvSpPr>
-          <p:cNvPr id="14" name="Text 12"/>
-          <p:cNvSpPr/>
-          <p:nvPr/>
-        </p:nvSpPr>
-        <p:spPr>
-          <a:xfrm>
-            <a:off x="594360" y="3072384"/>
-            <a:ext cx="7955280" cy="182880"/>
-          </a:xfrm>
-          <a:prstGeom prst="rect">
-            <a:avLst/>
-          </a:prstGeom>
-          <a:noFill/>
-          <a:ln/>
-        </p:spPr>
-        <p:txBody>
-          <a:bodyPr wrap="square" lIns="0" tIns="0" rIns="0" bIns="0" rtlCol="0" anchor="ctr"/>
-          <a:lstStyle/>
-          <a:p>
-            <a:pPr indent="0" marL="0">
-              <a:buNone/>
-            </a:pPr>
-            <a:r>
-              <a:rPr lang="en-US" sz="1000" b="1" dirty="0">
-                <a:solidFill>
-                  <a:srgbClr val="CADCFC"/>
-                </a:solidFill>
-                <a:latin typeface="Consolas" pitchFamily="34" charset="0"/>
-                <a:ea typeface="Consolas" pitchFamily="34" charset="-122"/>
-                <a:cs typeface="Consolas" pitchFamily="34" charset="-120"/>
-              </a:rPr>
-              <a:t>Claude Code Session: 「認証機能を実装して」</a:t>
-            </a:r>
-            <a:endParaRPr lang="en-US" sz="1000" dirty="0"/>
-          </a:p>
-        </p:txBody>
-      </p:sp>
-      <p:sp>
-        <p:nvSpPr>
-          <p:cNvPr id="15" name="Text 13"/>
-          <p:cNvSpPr/>
-          <p:nvPr/>
-        </p:nvSpPr>
-        <p:spPr>
-          <a:xfrm>
-            <a:off x="594360" y="3291840"/>
-            <a:ext cx="7955280" cy="1005840"/>
-          </a:xfrm>
-          <a:prstGeom prst="rect">
-            <a:avLst/>
-          </a:prstGeom>
-          <a:noFill/>
-          <a:ln/>
-        </p:spPr>
-        <p:txBody>
-          <a:bodyPr wrap="square" lIns="0" tIns="0" rIns="0" bIns="0" rtlCol="0" anchor="t"/>
-          <a:lstStyle/>
-          <a:p>
-            <a:pPr indent="0" marL="0">
-              <a:spcAft>
-                <a:spcPts val="50"/>
-              </a:spcAft>
-              <a:buNone/>
-            </a:pPr>
-            <a:r>
-              <a:rPr lang="en-US" sz="750" dirty="0">
-                <a:solidFill>
-                  <a:srgbClr val="CADCFC"/>
-                </a:solidFill>
-                <a:latin typeface="Consolas" pitchFamily="34" charset="0"/>
-                <a:ea typeface="Consolas" pitchFamily="34" charset="-122"/>
-                <a:cs typeface="Consolas" pitchFamily="34" charset="-120"/>
-              </a:rPr>
-              <a:t>├─ Read: src/auth/login.ts   0.3s   120 tok       ├─ Planning (retry)        1.2s   800 tok  $0.02</a:t>
-            </a:r>
-            <a:endParaRPr lang="en-US" sz="750" dirty="0"/>
-          </a:p>
-          <a:p>
-            <a:pPr indent="0" marL="0">
-              <a:spcAft>
-                <a:spcPts val="50"/>
-              </a:spcAft>
-              <a:buNone/>
-            </a:pPr>
-            <a:r>
-              <a:rPr lang="en-US" sz="750" dirty="0">
-                <a:solidFill>
-                  <a:srgbClr val="CADCFC"/>
-                </a:solidFill>
-                <a:latin typeface="Consolas" pitchFamily="34" charset="0"/>
-                <a:ea typeface="Consolas" pitchFamily="34" charset="-122"/>
-                <a:cs typeface="Consolas" pitchFamily="34" charset="-120"/>
-              </a:rPr>
-              <a:t>├─ Read: CLAUDE.md           0.1s    80 tok       ├─ Edit: src/auth/login.ts  0.6s   450 tok  $0.01</a:t>
-            </a:r>
-            <a:endParaRPr lang="en-US" sz="750" dirty="0"/>
-          </a:p>
-          <a:p>
-            <a:pPr indent="0" marL="0">
-              <a:spcAft>
-                <a:spcPts val="50"/>
-              </a:spcAft>
-              <a:buNone/>
-            </a:pPr>
-            <a:r>
-              <a:rPr lang="en-US" sz="750" dirty="0">
-                <a:solidFill>
-                  <a:srgbClr val="2E8B57"/>
-                </a:solidFill>
-                <a:latin typeface="Consolas" pitchFamily="34" charset="0"/>
-                <a:ea typeface="Consolas" pitchFamily="34" charset="-122"/>
-                <a:cs typeface="Consolas" pitchFamily="34" charset="-120"/>
-              </a:rPr>
-              <a:t>├─ Planning                  1.5s   950 tok $0.03 ├─ Bash: npm run test       2.8s   ← PASS ✓</a:t>
-            </a:r>
-            <a:endParaRPr lang="en-US" sz="750" dirty="0"/>
-          </a:p>
-          <a:p>
-            <a:pPr indent="0" marL="0">
-              <a:spcAft>
-                <a:spcPts val="50"/>
-              </a:spcAft>
-              <a:buNone/>
-            </a:pPr>
-            <a:r>
-              <a:rPr lang="en-US" sz="750" dirty="0">
-                <a:solidFill>
-                  <a:srgbClr val="CADCFC"/>
-                </a:solidFill>
-                <a:latin typeface="Consolas" pitchFamily="34" charset="0"/>
-                <a:ea typeface="Consolas" pitchFamily="34" charset="-122"/>
-                <a:cs typeface="Consolas" pitchFamily="34" charset="-120"/>
-              </a:rPr>
-              <a:t>├─ Edit: src/auth/login.ts   0.8s   600 tok $0.02 │</a:t>
-            </a:r>
-            <a:endParaRPr lang="en-US" sz="750" dirty="0"/>
-          </a:p>
-          <a:p>
-            <a:pPr indent="0" marL="0">
-              <a:spcAft>
-                <a:spcPts val="50"/>
-              </a:spcAft>
-              <a:buNone/>
-            </a:pPr>
-            <a:r>
-              <a:rPr lang="en-US" sz="750" dirty="0">
-                <a:solidFill>
-                  <a:srgbClr val="F96167"/>
-                </a:solidFill>
-                <a:latin typeface="Consolas" pitchFamily="34" charset="0"/>
-                <a:ea typeface="Consolas" pitchFamily="34" charset="-122"/>
-                <a:cs typeface="Consolas" pitchFamily="34" charset="-120"/>
-              </a:rPr>
-              <a:t>├─ Bash: npm run test        3.2s   ← FAIL       └─ Total: 10.7s / 3,350 tokens / $0.08</a:t>
-            </a:r>
-            <a:endParaRPr lang="en-US" sz="750" dirty="0"/>
-          </a:p>
-        </p:txBody>
-      </p:sp>
-      <p:sp>
-        <p:nvSpPr>
-          <p:cNvPr id="16" name="Shape 14"/>
-          <p:cNvSpPr/>
-          <p:nvPr/>
-        </p:nvSpPr>
-        <p:spPr>
-          <a:xfrm>
-            <a:off x="457200" y="4572000"/>
+              </a:rPr>
+              <a:t>→ 全ステップを記録すれば、上の3つに後から気づける。それが Trace（記録）。</a:t>
+            </a:r>
+          </a:p>
+        </p:txBody>
+      </p:sp>
+      <p:sp>
+        <p:nvSpPr>
+          <p:cNvPr id="11" name="TextBox 10"/>
+          <p:cNvSpPr txBox="1"/>
+          <p:nvPr/>
+        </p:nvSpPr>
+        <p:spPr>
+          <a:xfrm>
+            <a:off x="457200" y="3950000"/>
             <a:ext cx="8229600" cy="365760"/>
           </a:xfrm>
           <a:prstGeom prst="rect">
             <a:avLst/>
           </a:prstGeom>
-          <a:solidFill>
-            <a:srgbClr val="151B47"/>
-          </a:solidFill>
-          <a:ln w="12700">
-            <a:solidFill>
-              <a:srgbClr val="151B47"/>
-            </a:solidFill>
-            <a:prstDash val="solid"/>
-          </a:ln>
-        </p:spPr>
-      </p:sp>
-      <p:sp>
-        <p:nvSpPr>
-          <p:cNvPr id="17" name="Text 15"/>
-          <p:cNvSpPr/>
-          <p:nvPr/>
-        </p:nvSpPr>
-        <p:spPr>
-          <a:xfrm>
-            <a:off x="594360" y="4572000"/>
-            <a:ext cx="7955280" cy="365760"/>
-          </a:xfrm>
-          <a:prstGeom prst="rect">
-            <a:avLst/>
-          </a:prstGeom>
-          <a:noFill/>
-          <a:ln/>
-        </p:spPr>
-        <p:txBody>
-          <a:bodyPr wrap="square" lIns="0" tIns="0" rIns="0" bIns="0" rtlCol="0" anchor="ctr"/>
-          <a:lstStyle/>
-          <a:p>
-            <a:pPr indent="0" marL="0">
-              <a:buNone/>
-            </a:pPr>
-            <a:r>
-              <a:rPr lang="en-US" sz="1200" dirty="0">
-                <a:solidFill>
-                  <a:srgbClr val="F96167"/>
-                </a:solidFill>
-                <a:latin typeface="Meiryo" pitchFamily="34" charset="0"/>
-                <a:ea typeface="Meiryo" pitchFamily="34" charset="-122"/>
-                <a:cs typeface="Meiryo" pitchFamily="34" charset="-120"/>
-              </a:rPr>
-              <a:t>⚠️ </a:t>
-            </a:r>
-            <a:pPr indent="0" marL="0">
-              <a:buNone/>
-            </a:pPr>
-            <a:r>
-              <a:rPr lang="en-US" sz="1100" b="1" dirty="0">
-                <a:solidFill>
-                  <a:srgbClr val="FFFFFF"/>
-                </a:solidFill>
-                <a:latin typeface="Meiryo" pitchFamily="34" charset="0"/>
-                <a:ea typeface="Meiryo" pitchFamily="34" charset="-122"/>
-                <a:cs typeface="Meiryo" pitchFamily="34" charset="-120"/>
-              </a:rPr>
-              <a:t>Claude Codeを業務で使うなら、トレースなしの運用は計器なしの飛行と同じ</a:t>
-            </a:r>
-            <a:endParaRPr lang="en-US" sz="1100" dirty="0"/>
-          </a:p>
-        </p:txBody>
-      </p:sp>
-      <p:sp>
-        <p:nvSpPr>
-          <p:cNvPr id="18" name="Text 16"/>
-          <p:cNvSpPr/>
+          <a:noFill/>
+        </p:spPr>
+        <p:txBody>
+          <a:bodyPr wrap="square" lIns="0" rIns="0" tIns="0" bIns="0">
+            <a:spAutoFit/>
+          </a:bodyPr>
+          <a:lstStyle/>
+          <a:p>
+            <a:r>
+              <a:rPr sz="1200" b="1" i="0">
+                <a:solidFill>
+                  <a:srgbClr val="FFC800"/>
+                </a:solidFill>
+              </a:rPr>
+              <a:t>⚠️ Claude Code を業務で使うなら、トレースなしの運用は計器なしの飛行と同じ</a:t>
+            </a:r>
+          </a:p>
+        </p:txBody>
+      </p:sp>
+      <p:sp>
+        <p:nvSpPr>
+          <p:cNvPr id="12" name="TextBox 11"/>
+          <p:cNvSpPr txBox="1"/>
           <p:nvPr/>
         </p:nvSpPr>
         <p:spPr>
@@ -10937,1954 +13733,21 @@
             <a:avLst/>
           </a:prstGeom>
           <a:noFill/>
-          <a:ln/>
-        </p:spPr>
-        <p:txBody>
-          <a:bodyPr wrap="square" rtlCol="0" anchor="ctr"/>
-          <a:lstStyle/>
-          <a:p>
-            <a:pPr algn="r" indent="0" marL="0">
-              <a:buNone/>
-            </a:pPr>
-            <a:r>
-              <a:rPr lang="en-US" sz="1000" spc="100" kern="0" dirty="0">
+        </p:spPr>
+        <p:txBody>
+          <a:bodyPr wrap="square" lIns="0" rIns="0" tIns="0" bIns="0">
+            <a:spAutoFit/>
+          </a:bodyPr>
+          <a:lstStyle/>
+          <a:p>
+            <a:r>
+              <a:rPr sz="1000" b="0" i="0">
                 <a:solidFill>
                   <a:srgbClr val="64748B"/>
                 </a:solidFill>
-                <a:latin typeface="Arial" pitchFamily="34" charset="0"/>
-                <a:ea typeface="Arial" pitchFamily="34" charset="-122"/>
-                <a:cs typeface="Arial" pitchFamily="34" charset="-120"/>
               </a:rPr>
               <a:t>○ ○ ○ ○ ○ ● ○ ○ ○ ○</a:t>
             </a:r>
-            <a:endParaRPr lang="en-US" sz="1000" dirty="0"/>
-          </a:p>
-        </p:txBody>
-      </p:sp>
-    </p:spTree>
-  </p:cSld>
-  <p:clrMapOvr>
-    <a:masterClrMapping/>
-  </p:clrMapOvr>
-</p:sld>
-</file>
-
-<file path=ppt/slides/slide8.xml><?xml version="1.0" encoding="utf-8"?>
-<p:sld xmlns:a="http://schemas.openxmlformats.org/drawingml/2006/main" xmlns:r="http://schemas.openxmlformats.org/officeDocument/2006/relationships" xmlns:p="http://schemas.openxmlformats.org/presentationml/2006/main">
-  <p:cSld name="Slide 8">
-    <p:bg>
-      <p:bgPr>
-        <a:solidFill>
-          <a:srgbClr val="FFFFFF"/>
-        </a:solidFill>
-      </p:bgPr>
-    </p:bg>
-    <p:spTree>
-      <p:nvGrpSpPr>
-        <p:cNvPr id="1" name=""/>
-        <p:cNvGrpSpPr/>
-        <p:nvPr/>
-      </p:nvGrpSpPr>
-      <p:grpSpPr>
-        <a:xfrm>
-          <a:off x="0" y="0"/>
-          <a:ext cx="0" cy="0"/>
-          <a:chOff x="0" y="0"/>
-          <a:chExt cx="0" cy="0"/>
-        </a:xfrm>
-      </p:grpSpPr>
-      <p:sp>
-        <p:nvSpPr>
-          <p:cNvPr id="2" name="Text 0"/>
-          <p:cNvSpPr/>
-          <p:nvPr/>
-        </p:nvSpPr>
-        <p:spPr>
-          <a:xfrm>
-            <a:off x="457200" y="320040"/>
-            <a:ext cx="8229600" cy="548640"/>
-          </a:xfrm>
-          <a:prstGeom prst="rect">
-            <a:avLst/>
-          </a:prstGeom>
-          <a:noFill/>
-          <a:ln/>
-        </p:spPr>
-        <p:txBody>
-          <a:bodyPr wrap="square" lIns="0" tIns="0" rIns="0" bIns="0" rtlCol="0" anchor="ctr"/>
-          <a:lstStyle/>
-          <a:p>
-            <a:pPr indent="0" marL="0">
-              <a:buNone/>
-            </a:pPr>
-            <a:r>
-              <a:rPr lang="en-US" sz="2200" b="1" dirty="0">
-                <a:solidFill>
-                  <a:srgbClr val="1E2761"/>
-                </a:solidFill>
-                <a:latin typeface="Arial Black" pitchFamily="34" charset="0"/>
-                <a:ea typeface="Arial Black" pitchFamily="34" charset="-122"/>
-                <a:cs typeface="Arial Black" pitchFamily="34" charset="-120"/>
-              </a:rPr>
-              <a:t>機能②: 評価（LLM-as-a-Judge）</a:t>
-            </a:r>
-            <a:endParaRPr lang="en-US" sz="2200" dirty="0"/>
-          </a:p>
-        </p:txBody>
-      </p:sp>
-      <p:sp>
-        <p:nvSpPr>
-          <p:cNvPr id="3" name="Shape 1"/>
-          <p:cNvSpPr/>
-          <p:nvPr/>
-        </p:nvSpPr>
-        <p:spPr>
-          <a:xfrm>
-            <a:off x="457200" y="932688"/>
-            <a:ext cx="548640" cy="45720"/>
-          </a:xfrm>
-          <a:prstGeom prst="rect">
-            <a:avLst/>
-          </a:prstGeom>
-          <a:solidFill>
-            <a:srgbClr val="F96167"/>
-          </a:solidFill>
-          <a:ln w="12700">
-            <a:solidFill>
-              <a:srgbClr val="F96167"/>
-            </a:solidFill>
-            <a:prstDash val="solid"/>
-          </a:ln>
-        </p:spPr>
-      </p:sp>
-      <p:sp>
-        <p:nvSpPr>
-          <p:cNvPr id="4" name="Text 2"/>
-          <p:cNvSpPr/>
-          <p:nvPr/>
-        </p:nvSpPr>
-        <p:spPr>
-          <a:xfrm>
-            <a:off x="457200" y="1051560"/>
-            <a:ext cx="8229600" cy="274320"/>
-          </a:xfrm>
-          <a:prstGeom prst="rect">
-            <a:avLst/>
-          </a:prstGeom>
-          <a:noFill/>
-          <a:ln/>
-        </p:spPr>
-        <p:txBody>
-          <a:bodyPr wrap="square" lIns="0" tIns="0" rIns="0" bIns="0" rtlCol="0" anchor="ctr"/>
-          <a:lstStyle/>
-          <a:p>
-            <a:pPr indent="0" marL="0">
-              <a:buNone/>
-            </a:pPr>
-            <a:r>
-              <a:rPr lang="en-US" sz="1300" i="1" dirty="0">
-                <a:solidFill>
-                  <a:srgbClr val="64748B"/>
-                </a:solidFill>
-                <a:latin typeface="Meiryo" pitchFamily="34" charset="0"/>
-                <a:ea typeface="Meiryo" pitchFamily="34" charset="-122"/>
-                <a:cs typeface="Meiryo" pitchFamily="34" charset="-120"/>
-              </a:rPr>
-              <a:t>Claude Codeの出力品質を定量的に評価する ― 変化にデータで気づく</a:t>
-            </a:r>
-            <a:endParaRPr lang="en-US" sz="1300" dirty="0"/>
-          </a:p>
-        </p:txBody>
-      </p:sp>
-      <p:sp>
-        <p:nvSpPr>
-          <p:cNvPr id="5" name="Shape 3"/>
-          <p:cNvSpPr/>
-          <p:nvPr/>
-        </p:nvSpPr>
-        <p:spPr>
-          <a:xfrm>
-            <a:off x="457200" y="1417320"/>
-            <a:ext cx="2606040" cy="2468880"/>
-          </a:xfrm>
-          <a:prstGeom prst="rect">
-            <a:avLst/>
-          </a:prstGeom>
-          <a:solidFill>
-            <a:srgbClr val="F8F9FC"/>
-          </a:solidFill>
-          <a:ln w="9525">
-            <a:solidFill>
-              <a:srgbClr val="E5E9F2"/>
-            </a:solidFill>
-            <a:prstDash val="solid"/>
-          </a:ln>
-          <a:effectLst>
-            <a:outerShdw sx="100000" sy="100000" kx="0" ky="0" algn="bl" rotWithShape="0" blurRad="50800" dist="12700" dir="8100000">
-              <a:srgbClr val="000000">
-                <a:alpha val="10000"/>
-              </a:srgbClr>
-            </a:outerShdw>
-          </a:effectLst>
-        </p:spPr>
-      </p:sp>
-      <p:sp>
-        <p:nvSpPr>
-          <p:cNvPr id="6" name="Shape 4"/>
-          <p:cNvSpPr/>
-          <p:nvPr/>
-        </p:nvSpPr>
-        <p:spPr>
-          <a:xfrm>
-            <a:off x="457200" y="1417320"/>
-            <a:ext cx="2606040" cy="64008"/>
-          </a:xfrm>
-          <a:prstGeom prst="rect">
-            <a:avLst/>
-          </a:prstGeom>
-          <a:solidFill>
-            <a:srgbClr val="F96167"/>
-          </a:solidFill>
-          <a:ln w="12700">
-            <a:solidFill>
-              <a:srgbClr val="F96167"/>
-            </a:solidFill>
-            <a:prstDash val="solid"/>
-          </a:ln>
-        </p:spPr>
-      </p:sp>
-      <p:pic>
-        <p:nvPicPr>
-          <p:cNvPr id="7" name="Image 0" descr="preencoded.png">    </p:cNvPr>
-          <p:cNvPicPr>
-            <a:picLocks noChangeAspect="1"/>
-          </p:cNvPicPr>
-          <p:nvPr/>
-        </p:nvPicPr>
-        <p:blipFill>
-          <a:blip r:embed="rId1"/>
-          <a:stretch>
-            <a:fillRect/>
-          </a:stretch>
-        </p:blipFill>
-        <p:spPr>
-          <a:xfrm>
-            <a:off x="594360" y="1600200"/>
-            <a:ext cx="274320" cy="274320"/>
-          </a:xfrm>
-          <a:prstGeom prst="rect">
-            <a:avLst/>
-          </a:prstGeom>
-        </p:spPr>
-      </p:pic>
-      <p:sp>
-        <p:nvSpPr>
-          <p:cNvPr id="8" name="Text 5"/>
-          <p:cNvSpPr/>
-          <p:nvPr/>
-        </p:nvSpPr>
-        <p:spPr>
-          <a:xfrm>
-            <a:off x="960120" y="1554480"/>
-            <a:ext cx="1965960" cy="457200"/>
-          </a:xfrm>
-          <a:prstGeom prst="rect">
-            <a:avLst/>
-          </a:prstGeom>
-          <a:noFill/>
-          <a:ln/>
-        </p:spPr>
-        <p:txBody>
-          <a:bodyPr wrap="square" lIns="0" tIns="0" rIns="0" bIns="0" rtlCol="0" anchor="ctr"/>
-          <a:lstStyle/>
-          <a:p>
-            <a:pPr indent="0" marL="0">
-              <a:buNone/>
-            </a:pPr>
-            <a:r>
-              <a:rPr lang="en-US" sz="1100" b="1" dirty="0">
-                <a:solidFill>
-                  <a:srgbClr val="1E2761"/>
-                </a:solidFill>
-                <a:latin typeface="Meiryo" pitchFamily="34" charset="0"/>
-                <a:ea typeface="Meiryo" pitchFamily="34" charset="-122"/>
-                <a:cs typeface="Meiryo" pitchFamily="34" charset="-120"/>
-              </a:rPr>
-              <a:t>LLM-as-a-Judge</a:t>
-            </a:r>
-            <a:endParaRPr lang="en-US" sz="1100" dirty="0"/>
-          </a:p>
-          <a:p>
-            <a:pPr indent="0" marL="0">
-              <a:buNone/>
-            </a:pPr>
-            <a:r>
-              <a:rPr lang="en-US" sz="1100" b="1" dirty="0">
-                <a:solidFill>
-                  <a:srgbClr val="1E2761"/>
-                </a:solidFill>
-                <a:latin typeface="Meiryo" pitchFamily="34" charset="0"/>
-                <a:ea typeface="Meiryo" pitchFamily="34" charset="-122"/>
-                <a:cs typeface="Meiryo" pitchFamily="34" charset="-120"/>
-              </a:rPr>
-              <a:t>自動スコアリング</a:t>
-            </a:r>
-            <a:endParaRPr lang="en-US" sz="1100" dirty="0"/>
-          </a:p>
-        </p:txBody>
-      </p:sp>
-      <p:sp>
-        <p:nvSpPr>
-          <p:cNvPr id="9" name="Text 6"/>
-          <p:cNvSpPr/>
-          <p:nvPr/>
-        </p:nvSpPr>
-        <p:spPr>
-          <a:xfrm>
-            <a:off x="594360" y="2103120"/>
-            <a:ext cx="2331720" cy="1645920"/>
-          </a:xfrm>
-          <a:prstGeom prst="rect">
-            <a:avLst/>
-          </a:prstGeom>
-          <a:noFill/>
-          <a:ln/>
-        </p:spPr>
-        <p:txBody>
-          <a:bodyPr wrap="square" lIns="0" tIns="0" rIns="0" bIns="0" rtlCol="0" anchor="t"/>
-          <a:lstStyle/>
-          <a:p>
-            <a:pPr marL="342900" indent="-342900">
-              <a:spcAft>
-                <a:spcPts val="300"/>
-              </a:spcAft>
-              <a:buSzPct val="100000"/>
-              <a:buChar char="•"/>
-            </a:pPr>
-            <a:r>
-              <a:rPr lang="en-US" sz="900" dirty="0">
-                <a:solidFill>
-                  <a:srgbClr val="2D3748"/>
-                </a:solidFill>
-                <a:latin typeface="Meiryo" pitchFamily="34" charset="0"/>
-                <a:ea typeface="Meiryo" pitchFamily="34" charset="-122"/>
-                <a:cs typeface="Meiryo" pitchFamily="34" charset="-120"/>
-              </a:rPr>
-              <a:t>高性能LLMを「審査員」として定義</a:t>
-            </a:r>
-            <a:endParaRPr lang="en-US" sz="900" dirty="0"/>
-          </a:p>
-          <a:p>
-            <a:pPr marL="342900" indent="-342900">
-              <a:spcAft>
-                <a:spcPts val="300"/>
-              </a:spcAft>
-              <a:buSzPct val="100000"/>
-              <a:buChar char="•"/>
-            </a:pPr>
-            <a:r>
-              <a:rPr lang="en-US" sz="900" dirty="0">
-                <a:solidFill>
-                  <a:srgbClr val="2D3748"/>
-                </a:solidFill>
-                <a:latin typeface="Meiryo" pitchFamily="34" charset="0"/>
-                <a:ea typeface="Meiryo" pitchFamily="34" charset="-122"/>
-                <a:cs typeface="Meiryo" pitchFamily="34" charset="-120"/>
-              </a:rPr>
-              <a:t>本番トレースに自動スコアリング</a:t>
-            </a:r>
-            <a:endParaRPr lang="en-US" sz="900" dirty="0"/>
-          </a:p>
-          <a:p>
-            <a:pPr marL="342900" indent="-342900">
-              <a:spcAft>
-                <a:spcPts val="300"/>
-              </a:spcAft>
-              <a:buSzPct val="100000"/>
-              <a:buChar char="•"/>
-            </a:pPr>
-            <a:r>
-              <a:rPr lang="en-US" sz="900" dirty="0">
-                <a:solidFill>
-                  <a:srgbClr val="2D3748"/>
-                </a:solidFill>
-                <a:latin typeface="Meiryo" pitchFamily="34" charset="0"/>
-                <a:ea typeface="Meiryo" pitchFamily="34" charset="-122"/>
-                <a:cs typeface="Meiryo" pitchFamily="34" charset="-120"/>
-              </a:rPr>
-              <a:t>指標: 正確性 / 関連性 / ハルシネーション</a:t>
-            </a:r>
-            <a:endParaRPr lang="en-US" sz="900" dirty="0"/>
-          </a:p>
-          <a:p>
-            <a:pPr marL="342900" indent="-342900">
-              <a:spcAft>
-                <a:spcPts val="300"/>
-              </a:spcAft>
-              <a:buSzPct val="100000"/>
-              <a:buChar char="•"/>
-            </a:pPr>
-            <a:r>
-              <a:rPr lang="en-US" sz="900" dirty="0">
-                <a:solidFill>
-                  <a:srgbClr val="2D3748"/>
-                </a:solidFill>
-                <a:latin typeface="Meiryo" pitchFamily="34" charset="0"/>
-                <a:ea typeface="Meiryo" pitchFamily="34" charset="-122"/>
-                <a:cs typeface="Meiryo" pitchFamily="34" charset="-120"/>
-              </a:rPr>
-              <a:t>Claude Codeの生成コードの品質評価にも応用可</a:t>
-            </a:r>
-            <a:endParaRPr lang="en-US" sz="900" dirty="0"/>
-          </a:p>
-        </p:txBody>
-      </p:sp>
-      <p:sp>
-        <p:nvSpPr>
-          <p:cNvPr id="10" name="Shape 7"/>
-          <p:cNvSpPr/>
-          <p:nvPr/>
-        </p:nvSpPr>
-        <p:spPr>
-          <a:xfrm>
-            <a:off x="3200400" y="1417320"/>
-            <a:ext cx="2606040" cy="2468880"/>
-          </a:xfrm>
-          <a:prstGeom prst="rect">
-            <a:avLst/>
-          </a:prstGeom>
-          <a:solidFill>
-            <a:srgbClr val="F8F9FC"/>
-          </a:solidFill>
-          <a:ln w="9525">
-            <a:solidFill>
-              <a:srgbClr val="E5E9F2"/>
-            </a:solidFill>
-            <a:prstDash val="solid"/>
-          </a:ln>
-          <a:effectLst>
-            <a:outerShdw sx="100000" sy="100000" kx="0" ky="0" algn="bl" rotWithShape="0" blurRad="50800" dist="12700" dir="8100000">
-              <a:srgbClr val="000000">
-                <a:alpha val="10000"/>
-              </a:srgbClr>
-            </a:outerShdw>
-          </a:effectLst>
-        </p:spPr>
-      </p:sp>
-      <p:sp>
-        <p:nvSpPr>
-          <p:cNvPr id="11" name="Shape 8"/>
-          <p:cNvSpPr/>
-          <p:nvPr/>
-        </p:nvSpPr>
-        <p:spPr>
-          <a:xfrm>
-            <a:off x="3200400" y="1417320"/>
-            <a:ext cx="2606040" cy="64008"/>
-          </a:xfrm>
-          <a:prstGeom prst="rect">
-            <a:avLst/>
-          </a:prstGeom>
-          <a:solidFill>
-            <a:srgbClr val="1E2761"/>
-          </a:solidFill>
-          <a:ln w="12700">
-            <a:solidFill>
-              <a:srgbClr val="1E2761"/>
-            </a:solidFill>
-            <a:prstDash val="solid"/>
-          </a:ln>
-        </p:spPr>
-      </p:sp>
-      <p:pic>
-        <p:nvPicPr>
-          <p:cNvPr id="12" name="Image 1" descr="preencoded.png">    </p:cNvPr>
-          <p:cNvPicPr>
-            <a:picLocks noChangeAspect="1"/>
-          </p:cNvPicPr>
-          <p:nvPr/>
-        </p:nvPicPr>
-        <p:blipFill>
-          <a:blip r:embed="rId2"/>
-          <a:stretch>
-            <a:fillRect/>
-          </a:stretch>
-        </p:blipFill>
-        <p:spPr>
-          <a:xfrm>
-            <a:off x="3337560" y="1600200"/>
-            <a:ext cx="274320" cy="274320"/>
-          </a:xfrm>
-          <a:prstGeom prst="rect">
-            <a:avLst/>
-          </a:prstGeom>
-        </p:spPr>
-      </p:pic>
-      <p:sp>
-        <p:nvSpPr>
-          <p:cNvPr id="13" name="Text 9"/>
-          <p:cNvSpPr/>
-          <p:nvPr/>
-        </p:nvSpPr>
-        <p:spPr>
-          <a:xfrm>
-            <a:off x="3703320" y="1554480"/>
-            <a:ext cx="1965960" cy="457200"/>
-          </a:xfrm>
-          <a:prstGeom prst="rect">
-            <a:avLst/>
-          </a:prstGeom>
-          <a:noFill/>
-          <a:ln/>
-        </p:spPr>
-        <p:txBody>
-          <a:bodyPr wrap="square" lIns="0" tIns="0" rIns="0" bIns="0" rtlCol="0" anchor="ctr"/>
-          <a:lstStyle/>
-          <a:p>
-            <a:pPr indent="0" marL="0">
-              <a:buNone/>
-            </a:pPr>
-            <a:r>
-              <a:rPr lang="en-US" sz="1100" b="1" dirty="0">
-                <a:solidFill>
-                  <a:srgbClr val="1E2761"/>
-                </a:solidFill>
-                <a:latin typeface="Meiryo" pitchFamily="34" charset="0"/>
-                <a:ea typeface="Meiryo" pitchFamily="34" charset="-122"/>
-                <a:cs typeface="Meiryo" pitchFamily="34" charset="-120"/>
-              </a:rPr>
-              <a:t>多様な評価手法</a:t>
-            </a:r>
-            <a:endParaRPr lang="en-US" sz="1100" dirty="0"/>
-          </a:p>
-          <a:p>
-            <a:pPr indent="0" marL="0">
-              <a:buNone/>
-            </a:pPr>
-            <a:r>
-              <a:rPr lang="en-US" sz="1100" b="1" dirty="0">
-                <a:solidFill>
-                  <a:srgbClr val="1E2761"/>
-                </a:solidFill>
-                <a:latin typeface="Meiryo" pitchFamily="34" charset="0"/>
-                <a:ea typeface="Meiryo" pitchFamily="34" charset="-122"/>
-                <a:cs typeface="Meiryo" pitchFamily="34" charset="-120"/>
-              </a:rPr>
-              <a:t>の統合</a:t>
-            </a:r>
-            <a:endParaRPr lang="en-US" sz="1100" dirty="0"/>
-          </a:p>
-        </p:txBody>
-      </p:sp>
-      <p:sp>
-        <p:nvSpPr>
-          <p:cNvPr id="14" name="Text 10"/>
-          <p:cNvSpPr/>
-          <p:nvPr/>
-        </p:nvSpPr>
-        <p:spPr>
-          <a:xfrm>
-            <a:off x="3337560" y="2103120"/>
-            <a:ext cx="2331720" cy="1645920"/>
-          </a:xfrm>
-          <a:prstGeom prst="rect">
-            <a:avLst/>
-          </a:prstGeom>
-          <a:noFill/>
-          <a:ln/>
-        </p:spPr>
-        <p:txBody>
-          <a:bodyPr wrap="square" lIns="0" tIns="0" rIns="0" bIns="0" rtlCol="0" anchor="t"/>
-          <a:lstStyle/>
-          <a:p>
-            <a:pPr marL="342900" indent="-342900">
-              <a:spcAft>
-                <a:spcPts val="300"/>
-              </a:spcAft>
-              <a:buSzPct val="100000"/>
-              <a:buChar char="•"/>
-            </a:pPr>
-            <a:r>
-              <a:rPr lang="en-US" sz="900" dirty="0">
-                <a:solidFill>
-                  <a:srgbClr val="2D3748"/>
-                </a:solidFill>
-                <a:latin typeface="Meiryo" pitchFamily="34" charset="0"/>
-                <a:ea typeface="Meiryo" pitchFamily="34" charset="-122"/>
-                <a:cs typeface="Meiryo" pitchFamily="34" charset="-120"/>
-              </a:rPr>
-              <a:t>AI自動評価（LLM-as-a-Judge）</a:t>
-            </a:r>
-            <a:endParaRPr lang="en-US" sz="900" dirty="0"/>
-          </a:p>
-          <a:p>
-            <a:pPr marL="342900" indent="-342900">
-              <a:spcAft>
-                <a:spcPts val="300"/>
-              </a:spcAft>
-              <a:buSzPct val="100000"/>
-              <a:buChar char="•"/>
-            </a:pPr>
-            <a:r>
-              <a:rPr lang="en-US" sz="900" dirty="0">
-                <a:solidFill>
-                  <a:srgbClr val="2D3748"/>
-                </a:solidFill>
-                <a:latin typeface="Meiryo" pitchFamily="34" charset="0"/>
-                <a:ea typeface="Meiryo" pitchFamily="34" charset="-122"/>
-                <a:cs typeface="Meiryo" pitchFamily="34" charset="-120"/>
-              </a:rPr>
-              <a:t>エンドユーザーフィードバック（👍👎）</a:t>
-            </a:r>
-            <a:endParaRPr lang="en-US" sz="900" dirty="0"/>
-          </a:p>
-          <a:p>
-            <a:pPr marL="342900" indent="-342900">
-              <a:spcAft>
-                <a:spcPts val="300"/>
-              </a:spcAft>
-              <a:buSzPct val="100000"/>
-              <a:buChar char="•"/>
-            </a:pPr>
-            <a:r>
-              <a:rPr lang="en-US" sz="900" dirty="0">
-                <a:solidFill>
-                  <a:srgbClr val="2D3748"/>
-                </a:solidFill>
-                <a:latin typeface="Meiryo" pitchFamily="34" charset="0"/>
-                <a:ea typeface="Meiryo" pitchFamily="34" charset="-122"/>
-                <a:cs typeface="Meiryo" pitchFamily="34" charset="-120"/>
-              </a:rPr>
-              <a:t>ドメイン専門家の手動アノテーション</a:t>
-            </a:r>
-            <a:endParaRPr lang="en-US" sz="900" dirty="0"/>
-          </a:p>
-          <a:p>
-            <a:pPr marL="342900" indent="-342900">
-              <a:spcAft>
-                <a:spcPts val="300"/>
-              </a:spcAft>
-              <a:buSzPct val="100000"/>
-              <a:buChar char="•"/>
-            </a:pPr>
-            <a:r>
-              <a:rPr lang="en-US" sz="900" dirty="0">
-                <a:solidFill>
-                  <a:srgbClr val="2D3748"/>
-                </a:solidFill>
-                <a:latin typeface="Meiryo" pitchFamily="34" charset="0"/>
-                <a:ea typeface="Meiryo" pitchFamily="34" charset="-122"/>
-                <a:cs typeface="Meiryo" pitchFamily="34" charset="-120"/>
-              </a:rPr>
-              <a:t>Claude Codeのレビュー結果を評価データに蓄積</a:t>
-            </a:r>
-            <a:endParaRPr lang="en-US" sz="900" dirty="0"/>
-          </a:p>
-        </p:txBody>
-      </p:sp>
-      <p:sp>
-        <p:nvSpPr>
-          <p:cNvPr id="15" name="Shape 11"/>
-          <p:cNvSpPr/>
-          <p:nvPr/>
-        </p:nvSpPr>
-        <p:spPr>
-          <a:xfrm>
-            <a:off x="5943600" y="1417320"/>
-            <a:ext cx="2606040" cy="2468880"/>
-          </a:xfrm>
-          <a:prstGeom prst="rect">
-            <a:avLst/>
-          </a:prstGeom>
-          <a:solidFill>
-            <a:srgbClr val="F8F9FC"/>
-          </a:solidFill>
-          <a:ln w="9525">
-            <a:solidFill>
-              <a:srgbClr val="E5E9F2"/>
-            </a:solidFill>
-            <a:prstDash val="solid"/>
-          </a:ln>
-          <a:effectLst>
-            <a:outerShdw sx="100000" sy="100000" kx="0" ky="0" algn="bl" rotWithShape="0" blurRad="50800" dist="12700" dir="8100000">
-              <a:srgbClr val="000000">
-                <a:alpha val="10000"/>
-              </a:srgbClr>
-            </a:outerShdw>
-          </a:effectLst>
-        </p:spPr>
-      </p:sp>
-      <p:sp>
-        <p:nvSpPr>
-          <p:cNvPr id="16" name="Shape 12"/>
-          <p:cNvSpPr/>
-          <p:nvPr/>
-        </p:nvSpPr>
-        <p:spPr>
-          <a:xfrm>
-            <a:off x="5943600" y="1417320"/>
-            <a:ext cx="2606040" cy="64008"/>
-          </a:xfrm>
-          <a:prstGeom prst="rect">
-            <a:avLst/>
-          </a:prstGeom>
-          <a:solidFill>
-            <a:srgbClr val="1E2761"/>
-          </a:solidFill>
-          <a:ln w="12700">
-            <a:solidFill>
-              <a:srgbClr val="1E2761"/>
-            </a:solidFill>
-            <a:prstDash val="solid"/>
-          </a:ln>
-        </p:spPr>
-      </p:sp>
-      <p:pic>
-        <p:nvPicPr>
-          <p:cNvPr id="17" name="Image 2" descr="preencoded.png">    </p:cNvPr>
-          <p:cNvPicPr>
-            <a:picLocks noChangeAspect="1"/>
-          </p:cNvPicPr>
-          <p:nvPr/>
-        </p:nvPicPr>
-        <p:blipFill>
-          <a:blip r:embed="rId3"/>
-          <a:stretch>
-            <a:fillRect/>
-          </a:stretch>
-        </p:blipFill>
-        <p:spPr>
-          <a:xfrm>
-            <a:off x="6080760" y="1600200"/>
-            <a:ext cx="274320" cy="274320"/>
-          </a:xfrm>
-          <a:prstGeom prst="rect">
-            <a:avLst/>
-          </a:prstGeom>
-        </p:spPr>
-      </p:pic>
-      <p:sp>
-        <p:nvSpPr>
-          <p:cNvPr id="18" name="Text 13"/>
-          <p:cNvSpPr/>
-          <p:nvPr/>
-        </p:nvSpPr>
-        <p:spPr>
-          <a:xfrm>
-            <a:off x="6446520" y="1554480"/>
-            <a:ext cx="1965960" cy="457200"/>
-          </a:xfrm>
-          <a:prstGeom prst="rect">
-            <a:avLst/>
-          </a:prstGeom>
-          <a:noFill/>
-          <a:ln/>
-        </p:spPr>
-        <p:txBody>
-          <a:bodyPr wrap="square" lIns="0" tIns="0" rIns="0" bIns="0" rtlCol="0" anchor="ctr"/>
-          <a:lstStyle/>
-          <a:p>
-            <a:pPr indent="0" marL="0">
-              <a:buNone/>
-            </a:pPr>
-            <a:r>
-              <a:rPr lang="en-US" sz="1100" b="1" dirty="0">
-                <a:solidFill>
-                  <a:srgbClr val="1E2761"/>
-                </a:solidFill>
-                <a:latin typeface="Meiryo" pitchFamily="34" charset="0"/>
-                <a:ea typeface="Meiryo" pitchFamily="34" charset="-122"/>
-                <a:cs typeface="Meiryo" pitchFamily="34" charset="-120"/>
-              </a:rPr>
-              <a:t>RAGパイプライン</a:t>
-            </a:r>
-            <a:endParaRPr lang="en-US" sz="1100" dirty="0"/>
-          </a:p>
-          <a:p>
-            <a:pPr indent="0" marL="0">
-              <a:buNone/>
-            </a:pPr>
-            <a:r>
-              <a:rPr lang="en-US" sz="1100" b="1" dirty="0">
-                <a:solidFill>
-                  <a:srgbClr val="1E2761"/>
-                </a:solidFill>
-                <a:latin typeface="Meiryo" pitchFamily="34" charset="0"/>
-                <a:ea typeface="Meiryo" pitchFamily="34" charset="-122"/>
-                <a:cs typeface="Meiryo" pitchFamily="34" charset="-120"/>
-              </a:rPr>
-              <a:t>の診断</a:t>
-            </a:r>
-            <a:endParaRPr lang="en-US" sz="1100" dirty="0"/>
-          </a:p>
-        </p:txBody>
-      </p:sp>
-      <p:sp>
-        <p:nvSpPr>
-          <p:cNvPr id="19" name="Text 14"/>
-          <p:cNvSpPr/>
-          <p:nvPr/>
-        </p:nvSpPr>
-        <p:spPr>
-          <a:xfrm>
-            <a:off x="6080760" y="2103120"/>
-            <a:ext cx="2331720" cy="1645920"/>
-          </a:xfrm>
-          <a:prstGeom prst="rect">
-            <a:avLst/>
-          </a:prstGeom>
-          <a:noFill/>
-          <a:ln/>
-        </p:spPr>
-        <p:txBody>
-          <a:bodyPr wrap="square" lIns="0" tIns="0" rIns="0" bIns="0" rtlCol="0" anchor="t"/>
-          <a:lstStyle/>
-          <a:p>
-            <a:pPr marL="342900" indent="-342900">
-              <a:spcAft>
-                <a:spcPts val="300"/>
-              </a:spcAft>
-              <a:buSzPct val="100000"/>
-              <a:buChar char="•"/>
-            </a:pPr>
-            <a:r>
-              <a:rPr lang="en-US" sz="900" dirty="0">
-                <a:solidFill>
-                  <a:srgbClr val="2D3748"/>
-                </a:solidFill>
-                <a:latin typeface="Meiryo" pitchFamily="34" charset="0"/>
-                <a:ea typeface="Meiryo" pitchFamily="34" charset="-122"/>
-                <a:cs typeface="Meiryo" pitchFamily="34" charset="-120"/>
-              </a:rPr>
-              <a:t>検索精度と回答忠実性を定量化</a:t>
-            </a:r>
-            <a:endParaRPr lang="en-US" sz="900" dirty="0"/>
-          </a:p>
-          <a:p>
-            <a:pPr marL="342900" indent="-342900">
-              <a:spcAft>
-                <a:spcPts val="300"/>
-              </a:spcAft>
-              <a:buSzPct val="100000"/>
-              <a:buChar char="•"/>
-            </a:pPr>
-            <a:r>
-              <a:rPr lang="en-US" sz="900" dirty="0">
-                <a:solidFill>
-                  <a:srgbClr val="2D3748"/>
-                </a:solidFill>
-                <a:latin typeface="Meiryo" pitchFamily="34" charset="0"/>
-                <a:ea typeface="Meiryo" pitchFamily="34" charset="-122"/>
-                <a:cs typeface="Meiryo" pitchFamily="34" charset="-120"/>
-              </a:rPr>
-              <a:t>検索の問題 vs 生成の問題を切り分け</a:t>
-            </a:r>
-            <a:endParaRPr lang="en-US" sz="900" dirty="0"/>
-          </a:p>
-          <a:p>
-            <a:pPr marL="342900" indent="-342900">
-              <a:spcAft>
-                <a:spcPts val="300"/>
-              </a:spcAft>
-              <a:buSzPct val="100000"/>
-              <a:buChar char="•"/>
-            </a:pPr>
-            <a:r>
-              <a:rPr lang="en-US" sz="900" dirty="0">
-                <a:solidFill>
-                  <a:srgbClr val="2D3748"/>
-                </a:solidFill>
-                <a:latin typeface="Meiryo" pitchFamily="34" charset="0"/>
-                <a:ea typeface="Meiryo" pitchFamily="34" charset="-122"/>
-                <a:cs typeface="Meiryo" pitchFamily="34" charset="-120"/>
-              </a:rPr>
-              <a:t>金融クエリ:「古い文書を検索した」のか</a:t>
-            </a:r>
-            <a:endParaRPr lang="en-US" sz="900" dirty="0"/>
-          </a:p>
-          <a:p>
-            <a:pPr marL="342900" indent="-342900">
-              <a:spcAft>
-                <a:spcPts val="300"/>
-              </a:spcAft>
-              <a:buSzPct val="100000"/>
-              <a:buChar char="•"/>
-            </a:pPr>
-            <a:r>
-              <a:rPr lang="en-US" sz="900" dirty="0">
-                <a:solidFill>
-                  <a:srgbClr val="2D3748"/>
-                </a:solidFill>
-                <a:latin typeface="Meiryo" pitchFamily="34" charset="0"/>
-                <a:ea typeface="Meiryo" pitchFamily="34" charset="-122"/>
-                <a:cs typeface="Meiryo" pitchFamily="34" charset="-120"/>
-              </a:rPr>
-              <a:t>「正しい文書から誤回答を生成した」のか</a:t>
-            </a:r>
-            <a:endParaRPr lang="en-US" sz="900" dirty="0"/>
-          </a:p>
-        </p:txBody>
-      </p:sp>
-      <p:sp>
-        <p:nvSpPr>
-          <p:cNvPr id="20" name="Shape 15"/>
-          <p:cNvSpPr/>
-          <p:nvPr/>
-        </p:nvSpPr>
-        <p:spPr>
-          <a:xfrm>
-            <a:off x="457200" y="4114800"/>
-            <a:ext cx="8229600" cy="365760"/>
-          </a:xfrm>
-          <a:prstGeom prst="rect">
-            <a:avLst/>
-          </a:prstGeom>
-          <a:solidFill>
-            <a:srgbClr val="151B47"/>
-          </a:solidFill>
-          <a:ln w="12700">
-            <a:solidFill>
-              <a:srgbClr val="151B47"/>
-            </a:solidFill>
-            <a:prstDash val="solid"/>
-          </a:ln>
-        </p:spPr>
-      </p:sp>
-      <p:sp>
-        <p:nvSpPr>
-          <p:cNvPr id="21" name="Text 16"/>
-          <p:cNvSpPr/>
-          <p:nvPr/>
-        </p:nvSpPr>
-        <p:spPr>
-          <a:xfrm>
-            <a:off x="594360" y="4114800"/>
-            <a:ext cx="7955280" cy="365760"/>
-          </a:xfrm>
-          <a:prstGeom prst="rect">
-            <a:avLst/>
-          </a:prstGeom>
-          <a:noFill/>
-          <a:ln/>
-        </p:spPr>
-        <p:txBody>
-          <a:bodyPr wrap="square" lIns="0" tIns="0" rIns="0" bIns="0" rtlCol="0" anchor="ctr"/>
-          <a:lstStyle/>
-          <a:p>
-            <a:pPr indent="0" marL="0">
-              <a:buNone/>
-            </a:pPr>
-            <a:r>
-              <a:rPr lang="en-US" sz="1200" dirty="0">
-                <a:solidFill>
-                  <a:srgbClr val="FFFFFF"/>
-                </a:solidFill>
-                <a:latin typeface="Meiryo" pitchFamily="34" charset="0"/>
-                <a:ea typeface="Meiryo" pitchFamily="34" charset="-122"/>
-                <a:cs typeface="Meiryo" pitchFamily="34" charset="-120"/>
-              </a:rPr>
-              <a:t>💡 </a:t>
-            </a:r>
-            <a:pPr indent="0" marL="0">
-              <a:buNone/>
-            </a:pPr>
-            <a:r>
-              <a:rPr lang="en-US" sz="1100" b="1" dirty="0">
-                <a:solidFill>
-                  <a:srgbClr val="FFFFFF"/>
-                </a:solidFill>
-                <a:latin typeface="Meiryo" pitchFamily="34" charset="0"/>
-                <a:ea typeface="Meiryo" pitchFamily="34" charset="-122"/>
-                <a:cs typeface="Meiryo" pitchFamily="34" charset="-120"/>
-              </a:rPr>
-              <a:t>品質の変化にデータで気づける。</a:t>
-            </a:r>
-            <a:pPr indent="0" marL="0">
-              <a:buNone/>
-            </a:pPr>
-            <a:r>
-              <a:rPr lang="en-US" sz="1100" dirty="0">
-                <a:solidFill>
-                  <a:srgbClr val="CADCFC"/>
-                </a:solidFill>
-                <a:latin typeface="Meiryo" pitchFamily="34" charset="0"/>
-                <a:ea typeface="Meiryo" pitchFamily="34" charset="-122"/>
-                <a:cs typeface="Meiryo" pitchFamily="34" charset="-120"/>
-              </a:rPr>
-              <a:t>Claude Codeの出力品質を定量的に評価・追跡できる</a:t>
-            </a:r>
-            <a:endParaRPr lang="en-US" sz="1100" dirty="0"/>
-          </a:p>
-        </p:txBody>
-      </p:sp>
-      <p:sp>
-        <p:nvSpPr>
-          <p:cNvPr id="22" name="Text 17"/>
-          <p:cNvSpPr/>
-          <p:nvPr/>
-        </p:nvSpPr>
-        <p:spPr>
-          <a:xfrm>
-            <a:off x="5486400" y="4828032"/>
-            <a:ext cx="3474720" cy="228600"/>
-          </a:xfrm>
-          <a:prstGeom prst="rect">
-            <a:avLst/>
-          </a:prstGeom>
-          <a:noFill/>
-          <a:ln/>
-        </p:spPr>
-        <p:txBody>
-          <a:bodyPr wrap="square" rtlCol="0" anchor="ctr"/>
-          <a:lstStyle/>
-          <a:p>
-            <a:pPr algn="r" indent="0" marL="0">
-              <a:buNone/>
-            </a:pPr>
-            <a:r>
-              <a:rPr lang="en-US" sz="1000" spc="100" kern="0" dirty="0">
-                <a:solidFill>
-                  <a:srgbClr val="64748B"/>
-                </a:solidFill>
-                <a:latin typeface="Arial" pitchFamily="34" charset="0"/>
-                <a:ea typeface="Arial" pitchFamily="34" charset="-122"/>
-                <a:cs typeface="Arial" pitchFamily="34" charset="-120"/>
-              </a:rPr>
-              <a:t>○ ○ ○ ○ ○ ● ○ ○ ○ ○</a:t>
-            </a:r>
-            <a:endParaRPr lang="en-US" sz="1000" dirty="0"/>
-          </a:p>
-        </p:txBody>
-      </p:sp>
-    </p:spTree>
-  </p:cSld>
-  <p:clrMapOvr>
-    <a:masterClrMapping/>
-  </p:clrMapOvr>
-</p:sld>
-</file>
-
-<file path=ppt/slides/slide9.xml><?xml version="1.0" encoding="utf-8"?>
-<p:sld xmlns:a="http://schemas.openxmlformats.org/drawingml/2006/main" xmlns:r="http://schemas.openxmlformats.org/officeDocument/2006/relationships" xmlns:p="http://schemas.openxmlformats.org/presentationml/2006/main">
-  <p:cSld name="Slide 9">
-    <p:bg>
-      <p:bgPr>
-        <a:solidFill>
-          <a:srgbClr val="FFFFFF"/>
-        </a:solidFill>
-      </p:bgPr>
-    </p:bg>
-    <p:spTree>
-      <p:nvGrpSpPr>
-        <p:cNvPr id="1" name=""/>
-        <p:cNvGrpSpPr/>
-        <p:nvPr/>
-      </p:nvGrpSpPr>
-      <p:grpSpPr>
-        <a:xfrm>
-          <a:off x="0" y="0"/>
-          <a:ext cx="0" cy="0"/>
-          <a:chOff x="0" y="0"/>
-          <a:chExt cx="0" cy="0"/>
-        </a:xfrm>
-      </p:grpSpPr>
-      <p:sp>
-        <p:nvSpPr>
-          <p:cNvPr id="2" name="Text 0"/>
-          <p:cNvSpPr/>
-          <p:nvPr/>
-        </p:nvSpPr>
-        <p:spPr>
-          <a:xfrm>
-            <a:off x="457200" y="320040"/>
-            <a:ext cx="8229600" cy="548640"/>
-          </a:xfrm>
-          <a:prstGeom prst="rect">
-            <a:avLst/>
-          </a:prstGeom>
-          <a:noFill/>
-          <a:ln/>
-        </p:spPr>
-        <p:txBody>
-          <a:bodyPr wrap="square" lIns="0" tIns="0" rIns="0" bIns="0" rtlCol="0" anchor="ctr"/>
-          <a:lstStyle/>
-          <a:p>
-            <a:pPr indent="0" marL="0">
-              <a:buNone/>
-            </a:pPr>
-            <a:r>
-              <a:rPr lang="en-US" sz="2200" b="1" dirty="0">
-                <a:solidFill>
-                  <a:srgbClr val="1E2761"/>
-                </a:solidFill>
-                <a:latin typeface="Arial Black" pitchFamily="34" charset="0"/>
-                <a:ea typeface="Arial Black" pitchFamily="34" charset="-122"/>
-                <a:cs typeface="Arial Black" pitchFamily="34" charset="-120"/>
-              </a:rPr>
-              <a:t>機能③: プロンプト管理（Prompt CMS）</a:t>
-            </a:r>
-            <a:endParaRPr lang="en-US" sz="2200" dirty="0"/>
-          </a:p>
-        </p:txBody>
-      </p:sp>
-      <p:sp>
-        <p:nvSpPr>
-          <p:cNvPr id="3" name="Shape 1"/>
-          <p:cNvSpPr/>
-          <p:nvPr/>
-        </p:nvSpPr>
-        <p:spPr>
-          <a:xfrm>
-            <a:off x="457200" y="932688"/>
-            <a:ext cx="548640" cy="45720"/>
-          </a:xfrm>
-          <a:prstGeom prst="rect">
-            <a:avLst/>
-          </a:prstGeom>
-          <a:solidFill>
-            <a:srgbClr val="F96167"/>
-          </a:solidFill>
-          <a:ln w="12700">
-            <a:solidFill>
-              <a:srgbClr val="F96167"/>
-            </a:solidFill>
-            <a:prstDash val="solid"/>
-          </a:ln>
-        </p:spPr>
-      </p:sp>
-      <p:sp>
-        <p:nvSpPr>
-          <p:cNvPr id="4" name="Text 2"/>
-          <p:cNvSpPr/>
-          <p:nvPr/>
-        </p:nvSpPr>
-        <p:spPr>
-          <a:xfrm>
-            <a:off x="457200" y="1051560"/>
-            <a:ext cx="8229600" cy="274320"/>
-          </a:xfrm>
-          <a:prstGeom prst="rect">
-            <a:avLst/>
-          </a:prstGeom>
-          <a:noFill/>
-          <a:ln/>
-        </p:spPr>
-        <p:txBody>
-          <a:bodyPr wrap="square" lIns="0" tIns="0" rIns="0" bIns="0" rtlCol="0" anchor="ctr"/>
-          <a:lstStyle/>
-          <a:p>
-            <a:pPr indent="0" marL="0">
-              <a:buNone/>
-            </a:pPr>
-            <a:r>
-              <a:rPr lang="en-US" sz="1300" i="1" dirty="0">
-                <a:solidFill>
-                  <a:srgbClr val="64748B"/>
-                </a:solidFill>
-                <a:latin typeface="Meiryo" pitchFamily="34" charset="0"/>
-                <a:ea typeface="Meiryo" pitchFamily="34" charset="-122"/>
-                <a:cs typeface="Meiryo" pitchFamily="34" charset="-120"/>
-              </a:rPr>
-              <a:t>CLAUDE.mdとは別レイヤーで、LLMアプリのプロンプトをバージョン管理する</a:t>
-            </a:r>
-            <a:endParaRPr lang="en-US" sz="1300" dirty="0"/>
-          </a:p>
-        </p:txBody>
-      </p:sp>
-      <p:sp>
-        <p:nvSpPr>
-          <p:cNvPr id="5" name="Shape 3"/>
-          <p:cNvSpPr/>
-          <p:nvPr/>
-        </p:nvSpPr>
-        <p:spPr>
-          <a:xfrm>
-            <a:off x="457200" y="1417320"/>
-            <a:ext cx="2606040" cy="2468880"/>
-          </a:xfrm>
-          <a:prstGeom prst="rect">
-            <a:avLst/>
-          </a:prstGeom>
-          <a:solidFill>
-            <a:srgbClr val="F8F9FC"/>
-          </a:solidFill>
-          <a:ln w="9525">
-            <a:solidFill>
-              <a:srgbClr val="E5E9F2"/>
-            </a:solidFill>
-            <a:prstDash val="solid"/>
-          </a:ln>
-          <a:effectLst>
-            <a:outerShdw sx="100000" sy="100000" kx="0" ky="0" algn="bl" rotWithShape="0" blurRad="50800" dist="12700" dir="8100000">
-              <a:srgbClr val="000000">
-                <a:alpha val="10000"/>
-              </a:srgbClr>
-            </a:outerShdw>
-          </a:effectLst>
-        </p:spPr>
-      </p:sp>
-      <p:sp>
-        <p:nvSpPr>
-          <p:cNvPr id="6" name="Shape 4"/>
-          <p:cNvSpPr/>
-          <p:nvPr/>
-        </p:nvSpPr>
-        <p:spPr>
-          <a:xfrm>
-            <a:off x="457200" y="1417320"/>
-            <a:ext cx="2606040" cy="64008"/>
-          </a:xfrm>
-          <a:prstGeom prst="rect">
-            <a:avLst/>
-          </a:prstGeom>
-          <a:solidFill>
-            <a:srgbClr val="1E2761"/>
-          </a:solidFill>
-          <a:ln w="12700">
-            <a:solidFill>
-              <a:srgbClr val="1E2761"/>
-            </a:solidFill>
-            <a:prstDash val="solid"/>
-          </a:ln>
-        </p:spPr>
-      </p:sp>
-      <p:pic>
-        <p:nvPicPr>
-          <p:cNvPr id="7" name="Image 0" descr="preencoded.png">    </p:cNvPr>
-          <p:cNvPicPr>
-            <a:picLocks noChangeAspect="1"/>
-          </p:cNvPicPr>
-          <p:nvPr/>
-        </p:nvPicPr>
-        <p:blipFill>
-          <a:blip r:embed="rId1"/>
-          <a:stretch>
-            <a:fillRect/>
-          </a:stretch>
-        </p:blipFill>
-        <p:spPr>
-          <a:xfrm>
-            <a:off x="594360" y="1600200"/>
-            <a:ext cx="274320" cy="274320"/>
-          </a:xfrm>
-          <a:prstGeom prst="rect">
-            <a:avLst/>
-          </a:prstGeom>
-        </p:spPr>
-      </p:pic>
-      <p:sp>
-        <p:nvSpPr>
-          <p:cNvPr id="8" name="Text 5"/>
-          <p:cNvSpPr/>
-          <p:nvPr/>
-        </p:nvSpPr>
-        <p:spPr>
-          <a:xfrm>
-            <a:off x="960120" y="1554480"/>
-            <a:ext cx="1965960" cy="457200"/>
-          </a:xfrm>
-          <a:prstGeom prst="rect">
-            <a:avLst/>
-          </a:prstGeom>
-          <a:noFill/>
-          <a:ln/>
-        </p:spPr>
-        <p:txBody>
-          <a:bodyPr wrap="square" lIns="0" tIns="0" rIns="0" bIns="0" rtlCol="0" anchor="ctr"/>
-          <a:lstStyle/>
-          <a:p>
-            <a:pPr indent="0" marL="0">
-              <a:buNone/>
-            </a:pPr>
-            <a:r>
-              <a:rPr lang="en-US" sz="1100" b="1" dirty="0">
-                <a:solidFill>
-                  <a:srgbClr val="1E2761"/>
-                </a:solidFill>
-                <a:latin typeface="Meiryo" pitchFamily="34" charset="0"/>
-                <a:ea typeface="Meiryo" pitchFamily="34" charset="-122"/>
-                <a:cs typeface="Meiryo" pitchFamily="34" charset="-120"/>
-              </a:rPr>
-              <a:t>コードベースからの</a:t>
-            </a:r>
-            <a:endParaRPr lang="en-US" sz="1100" dirty="0"/>
-          </a:p>
-          <a:p>
-            <a:pPr indent="0" marL="0">
-              <a:buNone/>
-            </a:pPr>
-            <a:r>
-              <a:rPr lang="en-US" sz="1100" b="1" dirty="0">
-                <a:solidFill>
-                  <a:srgbClr val="1E2761"/>
-                </a:solidFill>
-                <a:latin typeface="Meiryo" pitchFamily="34" charset="0"/>
-                <a:ea typeface="Meiryo" pitchFamily="34" charset="-122"/>
-                <a:cs typeface="Meiryo" pitchFamily="34" charset="-120"/>
-              </a:rPr>
-              <a:t>完全な分離</a:t>
-            </a:r>
-            <a:endParaRPr lang="en-US" sz="1100" dirty="0"/>
-          </a:p>
-        </p:txBody>
-      </p:sp>
-      <p:sp>
-        <p:nvSpPr>
-          <p:cNvPr id="9" name="Text 6"/>
-          <p:cNvSpPr/>
-          <p:nvPr/>
-        </p:nvSpPr>
-        <p:spPr>
-          <a:xfrm>
-            <a:off x="594360" y="2103120"/>
-            <a:ext cx="2331720" cy="1645920"/>
-          </a:xfrm>
-          <a:prstGeom prst="rect">
-            <a:avLst/>
-          </a:prstGeom>
-          <a:noFill/>
-          <a:ln/>
-        </p:spPr>
-        <p:txBody>
-          <a:bodyPr wrap="square" lIns="0" tIns="0" rIns="0" bIns="0" rtlCol="0" anchor="t"/>
-          <a:lstStyle/>
-          <a:p>
-            <a:pPr marL="342900" indent="-342900">
-              <a:spcAft>
-                <a:spcPts val="300"/>
-              </a:spcAft>
-              <a:buSzPct val="100000"/>
-              <a:buChar char="•"/>
-            </a:pPr>
-            <a:r>
-              <a:rPr lang="en-US" sz="900" dirty="0">
-                <a:solidFill>
-                  <a:srgbClr val="2D3748"/>
-                </a:solidFill>
-                <a:latin typeface="Meiryo" pitchFamily="34" charset="0"/>
-                <a:ea typeface="Meiryo" pitchFamily="34" charset="-122"/>
-                <a:cs typeface="Meiryo" pitchFamily="34" charset="-120"/>
-              </a:rPr>
-              <a:t>「コード変更・再デプロイ」サイクルを排除</a:t>
-            </a:r>
-            <a:endParaRPr lang="en-US" sz="900" dirty="0"/>
-          </a:p>
-          <a:p>
-            <a:pPr marL="342900" indent="-342900">
-              <a:spcAft>
-                <a:spcPts val="300"/>
-              </a:spcAft>
-              <a:buSzPct val="100000"/>
-              <a:buChar char="•"/>
-            </a:pPr>
-            <a:r>
-              <a:rPr lang="en-US" sz="900" dirty="0">
-                <a:solidFill>
-                  <a:srgbClr val="2D3748"/>
-                </a:solidFill>
-                <a:latin typeface="Meiryo" pitchFamily="34" charset="0"/>
-                <a:ea typeface="Meiryo" pitchFamily="34" charset="-122"/>
-                <a:cs typeface="Meiryo" pitchFamily="34" charset="-120"/>
-              </a:rPr>
-              <a:t>API経由でミリ秒単位の低遅延取得</a:t>
-            </a:r>
-            <a:endParaRPr lang="en-US" sz="900" dirty="0"/>
-          </a:p>
-          <a:p>
-            <a:pPr marL="342900" indent="-342900">
-              <a:spcAft>
-                <a:spcPts val="300"/>
-              </a:spcAft>
-              <a:buSzPct val="100000"/>
-              <a:buChar char="•"/>
-            </a:pPr>
-            <a:r>
-              <a:rPr lang="en-US" sz="900" dirty="0">
-                <a:solidFill>
-                  <a:srgbClr val="2D3748"/>
-                </a:solidFill>
-                <a:latin typeface="Meiryo" pitchFamily="34" charset="0"/>
-                <a:ea typeface="Meiryo" pitchFamily="34" charset="-122"/>
-                <a:cs typeface="Meiryo" pitchFamily="34" charset="-120"/>
-              </a:rPr>
-              <a:t>Claude Code用CLAUDE.mdとは別レイヤーのプロンプト管理</a:t>
-            </a:r>
-            <a:endParaRPr lang="en-US" sz="900" dirty="0"/>
-          </a:p>
-        </p:txBody>
-      </p:sp>
-      <p:sp>
-        <p:nvSpPr>
-          <p:cNvPr id="10" name="Shape 7"/>
-          <p:cNvSpPr/>
-          <p:nvPr/>
-        </p:nvSpPr>
-        <p:spPr>
-          <a:xfrm>
-            <a:off x="3200400" y="1417320"/>
-            <a:ext cx="2606040" cy="2468880"/>
-          </a:xfrm>
-          <a:prstGeom prst="rect">
-            <a:avLst/>
-          </a:prstGeom>
-          <a:solidFill>
-            <a:srgbClr val="F8F9FC"/>
-          </a:solidFill>
-          <a:ln w="9525">
-            <a:solidFill>
-              <a:srgbClr val="E5E9F2"/>
-            </a:solidFill>
-            <a:prstDash val="solid"/>
-          </a:ln>
-          <a:effectLst>
-            <a:outerShdw sx="100000" sy="100000" kx="0" ky="0" algn="bl" rotWithShape="0" blurRad="50800" dist="12700" dir="8100000">
-              <a:srgbClr val="000000">
-                <a:alpha val="10000"/>
-              </a:srgbClr>
-            </a:outerShdw>
-          </a:effectLst>
-        </p:spPr>
-      </p:sp>
-      <p:sp>
-        <p:nvSpPr>
-          <p:cNvPr id="11" name="Shape 8"/>
-          <p:cNvSpPr/>
-          <p:nvPr/>
-        </p:nvSpPr>
-        <p:spPr>
-          <a:xfrm>
-            <a:off x="3200400" y="1417320"/>
-            <a:ext cx="2606040" cy="64008"/>
-          </a:xfrm>
-          <a:prstGeom prst="rect">
-            <a:avLst/>
-          </a:prstGeom>
-          <a:solidFill>
-            <a:srgbClr val="1E2761"/>
-          </a:solidFill>
-          <a:ln w="12700">
-            <a:solidFill>
-              <a:srgbClr val="1E2761"/>
-            </a:solidFill>
-            <a:prstDash val="solid"/>
-          </a:ln>
-        </p:spPr>
-      </p:sp>
-      <p:pic>
-        <p:nvPicPr>
-          <p:cNvPr id="12" name="Image 1" descr="preencoded.png">    </p:cNvPr>
-          <p:cNvPicPr>
-            <a:picLocks noChangeAspect="1"/>
-          </p:cNvPicPr>
-          <p:nvPr/>
-        </p:nvPicPr>
-        <p:blipFill>
-          <a:blip r:embed="rId2"/>
-          <a:stretch>
-            <a:fillRect/>
-          </a:stretch>
-        </p:blipFill>
-        <p:spPr>
-          <a:xfrm>
-            <a:off x="3337560" y="1600200"/>
-            <a:ext cx="274320" cy="274320"/>
-          </a:xfrm>
-          <a:prstGeom prst="rect">
-            <a:avLst/>
-          </a:prstGeom>
-        </p:spPr>
-      </p:pic>
-      <p:sp>
-        <p:nvSpPr>
-          <p:cNvPr id="13" name="Text 9"/>
-          <p:cNvSpPr/>
-          <p:nvPr/>
-        </p:nvSpPr>
-        <p:spPr>
-          <a:xfrm>
-            <a:off x="3703320" y="1554480"/>
-            <a:ext cx="1965960" cy="457200"/>
-          </a:xfrm>
-          <a:prstGeom prst="rect">
-            <a:avLst/>
-          </a:prstGeom>
-          <a:noFill/>
-          <a:ln/>
-        </p:spPr>
-        <p:txBody>
-          <a:bodyPr wrap="square" lIns="0" tIns="0" rIns="0" bIns="0" rtlCol="0" anchor="ctr"/>
-          <a:lstStyle/>
-          <a:p>
-            <a:pPr indent="0" marL="0">
-              <a:buNone/>
-            </a:pPr>
-            <a:r>
-              <a:rPr lang="en-US" sz="1100" b="1" dirty="0">
-                <a:solidFill>
-                  <a:srgbClr val="1E2761"/>
-                </a:solidFill>
-                <a:latin typeface="Meiryo" pitchFamily="34" charset="0"/>
-                <a:ea typeface="Meiryo" pitchFamily="34" charset="-122"/>
-                <a:cs typeface="Meiryo" pitchFamily="34" charset="-120"/>
-              </a:rPr>
-              <a:t>バージョン管理と</a:t>
-            </a:r>
-            <a:endParaRPr lang="en-US" sz="1100" dirty="0"/>
-          </a:p>
-          <a:p>
-            <a:pPr indent="0" marL="0">
-              <a:buNone/>
-            </a:pPr>
-            <a:r>
-              <a:rPr lang="en-US" sz="1100" b="1" dirty="0">
-                <a:solidFill>
-                  <a:srgbClr val="1E2761"/>
-                </a:solidFill>
-                <a:latin typeface="Meiryo" pitchFamily="34" charset="0"/>
-                <a:ea typeface="Meiryo" pitchFamily="34" charset="-122"/>
-                <a:cs typeface="Meiryo" pitchFamily="34" charset="-120"/>
-              </a:rPr>
-              <a:t>ロールバック</a:t>
-            </a:r>
-            <a:endParaRPr lang="en-US" sz="1100" dirty="0"/>
-          </a:p>
-        </p:txBody>
-      </p:sp>
-      <p:sp>
-        <p:nvSpPr>
-          <p:cNvPr id="14" name="Text 10"/>
-          <p:cNvSpPr/>
-          <p:nvPr/>
-        </p:nvSpPr>
-        <p:spPr>
-          <a:xfrm>
-            <a:off x="3337560" y="2103120"/>
-            <a:ext cx="2331720" cy="1645920"/>
-          </a:xfrm>
-          <a:prstGeom prst="rect">
-            <a:avLst/>
-          </a:prstGeom>
-          <a:noFill/>
-          <a:ln/>
-        </p:spPr>
-        <p:txBody>
-          <a:bodyPr wrap="square" lIns="0" tIns="0" rIns="0" bIns="0" rtlCol="0" anchor="t"/>
-          <a:lstStyle/>
-          <a:p>
-            <a:pPr marL="342900" indent="-342900">
-              <a:spcAft>
-                <a:spcPts val="300"/>
-              </a:spcAft>
-              <a:buSzPct val="100000"/>
-              <a:buChar char="•"/>
-            </a:pPr>
-            <a:r>
-              <a:rPr lang="en-US" sz="900" dirty="0">
-                <a:solidFill>
-                  <a:srgbClr val="2D3748"/>
-                </a:solidFill>
-                <a:latin typeface="Meiryo" pitchFamily="34" charset="0"/>
-                <a:ea typeface="Meiryo" pitchFamily="34" charset="-122"/>
-                <a:cs typeface="Meiryo" pitchFamily="34" charset="-120"/>
-              </a:rPr>
-              <a:t>全変更が新バージョンとして記録</a:t>
-            </a:r>
-            <a:endParaRPr lang="en-US" sz="900" dirty="0"/>
-          </a:p>
-          <a:p>
-            <a:pPr marL="342900" indent="-342900">
-              <a:spcAft>
-                <a:spcPts val="300"/>
-              </a:spcAft>
-              <a:buSzPct val="100000"/>
-              <a:buChar char="•"/>
-            </a:pPr>
-            <a:r>
-              <a:rPr lang="en-US" sz="900" dirty="0">
-                <a:solidFill>
-                  <a:srgbClr val="2D3748"/>
-                </a:solidFill>
-                <a:latin typeface="Meiryo" pitchFamily="34" charset="0"/>
-                <a:ea typeface="Meiryo" pitchFamily="34" charset="-122"/>
-                <a:cs typeface="Meiryo" pitchFamily="34" charset="-120"/>
-              </a:rPr>
-              <a:t>即座なロールバック（巻き戻し）可能</a:t>
-            </a:r>
-            <a:endParaRPr lang="en-US" sz="900" dirty="0"/>
-          </a:p>
-          <a:p>
-            <a:pPr marL="342900" indent="-342900">
-              <a:spcAft>
-                <a:spcPts val="300"/>
-              </a:spcAft>
-              <a:buSzPct val="100000"/>
-              <a:buChar char="•"/>
-            </a:pPr>
-            <a:r>
-              <a:rPr lang="en-US" sz="900" dirty="0">
-                <a:solidFill>
-                  <a:srgbClr val="2D3748"/>
-                </a:solidFill>
-                <a:latin typeface="Meiryo" pitchFamily="34" charset="0"/>
-                <a:ea typeface="Meiryo" pitchFamily="34" charset="-122"/>
-                <a:cs typeface="Meiryo" pitchFamily="34" charset="-120"/>
-              </a:rPr>
-              <a:t>production / staging ラベルで安全リリース</a:t>
-            </a:r>
-            <a:endParaRPr lang="en-US" sz="900" dirty="0"/>
-          </a:p>
-        </p:txBody>
-      </p:sp>
-      <p:sp>
-        <p:nvSpPr>
-          <p:cNvPr id="15" name="Shape 11"/>
-          <p:cNvSpPr/>
-          <p:nvPr/>
-        </p:nvSpPr>
-        <p:spPr>
-          <a:xfrm>
-            <a:off x="5943600" y="1417320"/>
-            <a:ext cx="2606040" cy="2468880"/>
-          </a:xfrm>
-          <a:prstGeom prst="rect">
-            <a:avLst/>
-          </a:prstGeom>
-          <a:solidFill>
-            <a:srgbClr val="F8F9FC"/>
-          </a:solidFill>
-          <a:ln w="9525">
-            <a:solidFill>
-              <a:srgbClr val="E5E9F2"/>
-            </a:solidFill>
-            <a:prstDash val="solid"/>
-          </a:ln>
-          <a:effectLst>
-            <a:outerShdw sx="100000" sy="100000" kx="0" ky="0" algn="bl" rotWithShape="0" blurRad="50800" dist="12700" dir="8100000">
-              <a:srgbClr val="000000">
-                <a:alpha val="10000"/>
-              </a:srgbClr>
-            </a:outerShdw>
-          </a:effectLst>
-        </p:spPr>
-      </p:sp>
-      <p:sp>
-        <p:nvSpPr>
-          <p:cNvPr id="16" name="Shape 12"/>
-          <p:cNvSpPr/>
-          <p:nvPr/>
-        </p:nvSpPr>
-        <p:spPr>
-          <a:xfrm>
-            <a:off x="5943600" y="1417320"/>
-            <a:ext cx="2606040" cy="64008"/>
-          </a:xfrm>
-          <a:prstGeom prst="rect">
-            <a:avLst/>
-          </a:prstGeom>
-          <a:solidFill>
-            <a:srgbClr val="1E2761"/>
-          </a:solidFill>
-          <a:ln w="12700">
-            <a:solidFill>
-              <a:srgbClr val="1E2761"/>
-            </a:solidFill>
-            <a:prstDash val="solid"/>
-          </a:ln>
-        </p:spPr>
-      </p:sp>
-      <p:pic>
-        <p:nvPicPr>
-          <p:cNvPr id="17" name="Image 2" descr="preencoded.png">    </p:cNvPr>
-          <p:cNvPicPr>
-            <a:picLocks noChangeAspect="1"/>
-          </p:cNvPicPr>
-          <p:nvPr/>
-        </p:nvPicPr>
-        <p:blipFill>
-          <a:blip r:embed="rId3"/>
-          <a:stretch>
-            <a:fillRect/>
-          </a:stretch>
-        </p:blipFill>
-        <p:spPr>
-          <a:xfrm>
-            <a:off x="6080760" y="1600200"/>
-            <a:ext cx="274320" cy="274320"/>
-          </a:xfrm>
-          <a:prstGeom prst="rect">
-            <a:avLst/>
-          </a:prstGeom>
-        </p:spPr>
-      </p:pic>
-      <p:sp>
-        <p:nvSpPr>
-          <p:cNvPr id="18" name="Text 13"/>
-          <p:cNvSpPr/>
-          <p:nvPr/>
-        </p:nvSpPr>
-        <p:spPr>
-          <a:xfrm>
-            <a:off x="6446520" y="1554480"/>
-            <a:ext cx="1965960" cy="457200"/>
-          </a:xfrm>
-          <a:prstGeom prst="rect">
-            <a:avLst/>
-          </a:prstGeom>
-          <a:noFill/>
-          <a:ln/>
-        </p:spPr>
-        <p:txBody>
-          <a:bodyPr wrap="square" lIns="0" tIns="0" rIns="0" bIns="0" rtlCol="0" anchor="ctr"/>
-          <a:lstStyle/>
-          <a:p>
-            <a:pPr indent="0" marL="0">
-              <a:buNone/>
-            </a:pPr>
-            <a:r>
-              <a:rPr lang="en-US" sz="1100" b="1" dirty="0">
-                <a:solidFill>
-                  <a:srgbClr val="1E2761"/>
-                </a:solidFill>
-                <a:latin typeface="Meiryo" pitchFamily="34" charset="0"/>
-                <a:ea typeface="Meiryo" pitchFamily="34" charset="-122"/>
-                <a:cs typeface="Meiryo" pitchFamily="34" charset="-120"/>
-              </a:rPr>
-              <a:t>ドメイン専門家との</a:t>
-            </a:r>
-            <a:endParaRPr lang="en-US" sz="1100" dirty="0"/>
-          </a:p>
-          <a:p>
-            <a:pPr indent="0" marL="0">
-              <a:buNone/>
-            </a:pPr>
-            <a:r>
-              <a:rPr lang="en-US" sz="1100" b="1" dirty="0">
-                <a:solidFill>
-                  <a:srgbClr val="1E2761"/>
-                </a:solidFill>
-                <a:latin typeface="Meiryo" pitchFamily="34" charset="0"/>
-                <a:ea typeface="Meiryo" pitchFamily="34" charset="-122"/>
-                <a:cs typeface="Meiryo" pitchFamily="34" charset="-120"/>
-              </a:rPr>
-              <a:t>コラボレーション</a:t>
-            </a:r>
-            <a:endParaRPr lang="en-US" sz="1100" dirty="0"/>
-          </a:p>
-        </p:txBody>
-      </p:sp>
-      <p:sp>
-        <p:nvSpPr>
-          <p:cNvPr id="19" name="Text 14"/>
-          <p:cNvSpPr/>
-          <p:nvPr/>
-        </p:nvSpPr>
-        <p:spPr>
-          <a:xfrm>
-            <a:off x="6080760" y="2103120"/>
-            <a:ext cx="2331720" cy="1645920"/>
-          </a:xfrm>
-          <a:prstGeom prst="rect">
-            <a:avLst/>
-          </a:prstGeom>
-          <a:noFill/>
-          <a:ln/>
-        </p:spPr>
-        <p:txBody>
-          <a:bodyPr wrap="square" lIns="0" tIns="0" rIns="0" bIns="0" rtlCol="0" anchor="t"/>
-          <a:lstStyle/>
-          <a:p>
-            <a:pPr marL="342900" indent="-342900">
-              <a:spcAft>
-                <a:spcPts val="300"/>
-              </a:spcAft>
-              <a:buSzPct val="100000"/>
-              <a:buChar char="•"/>
-            </a:pPr>
-            <a:r>
-              <a:rPr lang="en-US" sz="900" dirty="0">
-                <a:solidFill>
-                  <a:srgbClr val="2D3748"/>
-                </a:solidFill>
-                <a:latin typeface="Meiryo" pitchFamily="34" charset="0"/>
-                <a:ea typeface="Meiryo" pitchFamily="34" charset="-122"/>
-                <a:cs typeface="Meiryo" pitchFamily="34" charset="-120"/>
-              </a:rPr>
-              <a:t>金融専門家・コンプライアンス担当者がUIで直接テスト</a:t>
-            </a:r>
-            <a:endParaRPr lang="en-US" sz="900" dirty="0"/>
-          </a:p>
-          <a:p>
-            <a:pPr marL="342900" indent="-342900">
-              <a:spcAft>
-                <a:spcPts val="300"/>
-              </a:spcAft>
-              <a:buSzPct val="100000"/>
-              <a:buChar char="•"/>
-            </a:pPr>
-            <a:r>
-              <a:rPr lang="en-US" sz="900" dirty="0">
-                <a:solidFill>
-                  <a:srgbClr val="2D3748"/>
-                </a:solidFill>
-                <a:latin typeface="Meiryo" pitchFamily="34" charset="0"/>
-                <a:ea typeface="Meiryo" pitchFamily="34" charset="-122"/>
-                <a:cs typeface="Meiryo" pitchFamily="34" charset="-120"/>
-              </a:rPr>
-              <a:t>Playgroundで試行→比較→本番反映</a:t>
-            </a:r>
-            <a:endParaRPr lang="en-US" sz="900" dirty="0"/>
-          </a:p>
-          <a:p>
-            <a:pPr marL="342900" indent="-342900">
-              <a:spcAft>
-                <a:spcPts val="300"/>
-              </a:spcAft>
-              <a:buSzPct val="100000"/>
-              <a:buChar char="•"/>
-            </a:pPr>
-            <a:r>
-              <a:rPr lang="en-US" sz="900" dirty="0">
-                <a:solidFill>
-                  <a:srgbClr val="2D3748"/>
-                </a:solidFill>
-                <a:latin typeface="Meiryo" pitchFamily="34" charset="0"/>
-                <a:ea typeface="Meiryo" pitchFamily="34" charset="-122"/>
-                <a:cs typeface="Meiryo" pitchFamily="34" charset="-120"/>
-              </a:rPr>
-              <a:t>調整サイクルを日→分単位に短縮</a:t>
-            </a:r>
-            <a:endParaRPr lang="en-US" sz="900" dirty="0"/>
-          </a:p>
-        </p:txBody>
-      </p:sp>
-      <p:sp>
-        <p:nvSpPr>
-          <p:cNvPr id="20" name="Shape 15"/>
-          <p:cNvSpPr/>
-          <p:nvPr/>
-        </p:nvSpPr>
-        <p:spPr>
-          <a:xfrm>
-            <a:off x="457200" y="4114800"/>
-            <a:ext cx="8229600" cy="365760"/>
-          </a:xfrm>
-          <a:prstGeom prst="rect">
-            <a:avLst/>
-          </a:prstGeom>
-          <a:solidFill>
-            <a:srgbClr val="151B47"/>
-          </a:solidFill>
-          <a:ln w="12700">
-            <a:solidFill>
-              <a:srgbClr val="151B47"/>
-            </a:solidFill>
-            <a:prstDash val="solid"/>
-          </a:ln>
-        </p:spPr>
-      </p:sp>
-      <p:sp>
-        <p:nvSpPr>
-          <p:cNvPr id="21" name="Text 16"/>
-          <p:cNvSpPr/>
-          <p:nvPr/>
-        </p:nvSpPr>
-        <p:spPr>
-          <a:xfrm>
-            <a:off x="594360" y="4114800"/>
-            <a:ext cx="7955280" cy="365760"/>
-          </a:xfrm>
-          <a:prstGeom prst="rect">
-            <a:avLst/>
-          </a:prstGeom>
-          <a:noFill/>
-          <a:ln/>
-        </p:spPr>
-        <p:txBody>
-          <a:bodyPr wrap="square" lIns="0" tIns="0" rIns="0" bIns="0" rtlCol="0" anchor="ctr"/>
-          <a:lstStyle/>
-          <a:p>
-            <a:pPr indent="0" marL="0">
-              <a:buNone/>
-            </a:pPr>
-            <a:r>
-              <a:rPr lang="en-US" sz="1200" dirty="0">
-                <a:solidFill>
-                  <a:srgbClr val="FFFFFF"/>
-                </a:solidFill>
-                <a:latin typeface="Meiryo" pitchFamily="34" charset="0"/>
-                <a:ea typeface="Meiryo" pitchFamily="34" charset="-122"/>
-                <a:cs typeface="Meiryo" pitchFamily="34" charset="-120"/>
-              </a:rPr>
-              <a:t>💡 </a:t>
-            </a:r>
-            <a:pPr indent="0" marL="0">
-              <a:buNone/>
-            </a:pPr>
-            <a:r>
-              <a:rPr lang="en-US" sz="1000" b="1" dirty="0">
-                <a:solidFill>
-                  <a:srgbClr val="FFFFFF"/>
-                </a:solidFill>
-                <a:latin typeface="Meiryo" pitchFamily="34" charset="0"/>
-                <a:ea typeface="Meiryo" pitchFamily="34" charset="-122"/>
-                <a:cs typeface="Meiryo" pitchFamily="34" charset="-120"/>
-              </a:rPr>
-              <a:t>デプロイサイクルの分離 = アジリティの劇的な向上。</a:t>
-            </a:r>
-            <a:pPr indent="0" marL="0">
-              <a:buNone/>
-            </a:pPr>
-            <a:r>
-              <a:rPr lang="en-US" sz="1000" dirty="0">
-                <a:solidFill>
-                  <a:srgbClr val="CADCFC"/>
-                </a:solidFill>
-                <a:latin typeface="Meiryo" pitchFamily="34" charset="0"/>
-                <a:ea typeface="Meiryo" pitchFamily="34" charset="-122"/>
-                <a:cs typeface="Meiryo" pitchFamily="34" charset="-120"/>
-              </a:rPr>
-              <a:t>SDDのステアリングファイルをシステムレベルに拡張</a:t>
-            </a:r>
-            <a:endParaRPr lang="en-US" sz="1100" dirty="0"/>
-          </a:p>
-        </p:txBody>
-      </p:sp>
-      <p:sp>
-        <p:nvSpPr>
-          <p:cNvPr id="22" name="Text 17"/>
-          <p:cNvSpPr/>
-          <p:nvPr/>
-        </p:nvSpPr>
-        <p:spPr>
-          <a:xfrm>
-            <a:off x="5486400" y="4828032"/>
-            <a:ext cx="3474720" cy="228600"/>
-          </a:xfrm>
-          <a:prstGeom prst="rect">
-            <a:avLst/>
-          </a:prstGeom>
-          <a:noFill/>
-          <a:ln/>
-        </p:spPr>
-        <p:txBody>
-          <a:bodyPr wrap="square" rtlCol="0" anchor="ctr"/>
-          <a:lstStyle/>
-          <a:p>
-            <a:pPr algn="r" indent="0" marL="0">
-              <a:buNone/>
-            </a:pPr>
-            <a:r>
-              <a:rPr lang="en-US" sz="1000" spc="100" kern="0" dirty="0">
-                <a:solidFill>
-                  <a:srgbClr val="64748B"/>
-                </a:solidFill>
-                <a:latin typeface="Arial" pitchFamily="34" charset="0"/>
-                <a:ea typeface="Arial" pitchFamily="34" charset="-122"/>
-                <a:cs typeface="Arial" pitchFamily="34" charset="-120"/>
-              </a:rPr>
-              <a:t>○ ○ ○ ○ ○ ● ○ ○ ○ ○</a:t>
-            </a:r>
-            <a:endParaRPr lang="en-US" sz="1000" dirty="0"/>
           </a:p>
         </p:txBody>
       </p:sp>
